--- a/reports/WorkPulse_Business_Deck.pptx
+++ b/reports/WorkPulse_Business_Deck.pptx
@@ -4,9 +4,6 @@
   <p:sldMasterIdLst>
     <p:sldMasterId id="2147483648" r:id="rId1"/>
   </p:sldMasterIdLst>
-  <p:notesMasterIdLst>
-    <p:notesMasterId r:id="rId14"/>
-  </p:notesMasterIdLst>
   <p:sldIdLst>
     <p:sldId id="256" r:id="rId2"/>
     <p:sldId id="257" r:id="rId3"/>
@@ -21,7 +18,10 @@
     <p:sldId id="266" r:id="rId12"/>
     <p:sldId id="267" r:id="rId13"/>
   </p:sldIdLst>
-  <p:sldSz cx="9144000" cy="5143500" type="screen16x9"/>
+  <p:notesMasterIdLst>
+    <p:notesMasterId r:id="rId14"/>
+  </p:notesMasterIdLst>
+  <p:sldSz cx="9144000" cy="5143500"/>
   <p:notesSz cx="5143500" cy="9144000"/>
   <p:defaultTextStyle>
     <a:lvl1pPr marL="0" algn="l" defTabSz="914400" rtl="0" eaLnBrk="1" latinLnBrk="0" hangingPunct="1">
@@ -115,20 +115,13 @@
       </a:defRPr>
     </a:lvl9pPr>
   </p:defaultTextStyle>
-  <p:extLst>
-    <p:ext uri="{EFAFB233-063F-42B5-8137-9DF3F51BA10A}">
-      <p15:sldGuideLst xmlns:p15="http://schemas.microsoft.com/office/powerpoint/2012/main"/>
-    </p:ext>
-  </p:extLst>
 </p:presentation>
 </file>
 
 <file path=ppt/charts/chart1.xml><?xml version="1.0" encoding="utf-8"?>
-<c:chartSpace xmlns:c="http://schemas.openxmlformats.org/drawingml/2006/chart" xmlns:a="http://schemas.openxmlformats.org/drawingml/2006/main" xmlns:r="http://schemas.openxmlformats.org/officeDocument/2006/relationships" xmlns:c16r2="http://schemas.microsoft.com/office/drawing/2015/06/chart">
+<c:chartSpace xmlns:c="http://schemas.openxmlformats.org/drawingml/2006/chart" xmlns:a="http://schemas.openxmlformats.org/drawingml/2006/main" xmlns:r="http://schemas.openxmlformats.org/officeDocument/2006/relationships">
   <c:date1904 val="0"/>
-  <c:lang val="en-US"/>
   <c:roundedCorners val="1"/>
-  <c:style val="2"/>
   <c:chart>
     <c:autoTitleDeleted val="1"/>
     <c:plotArea>
@@ -160,26 +153,18 @@
           <c:invertIfNegative val="0"/>
           <c:dLbls>
             <c:numFmt formatCode="#,##0" sourceLinked="0"/>
-            <c:spPr>
-              <a:noFill/>
-              <a:ln>
-                <a:noFill/>
-              </a:ln>
-              <a:effectLst/>
-            </c:spPr>
             <c:txPr>
               <a:bodyPr/>
               <a:lstStyle/>
               <a:p>
                 <a:pPr>
-                  <a:defRPr sz="1200" b="0" i="0" u="none" strike="noStrike">
+                  <a:defRPr b="0" i="0" strike="noStrike" sz="1200" u="none">
                     <a:solidFill>
                       <a:srgbClr val="1E2761"/>
                     </a:solidFill>
                     <a:latin typeface="Arial"/>
                   </a:defRPr>
                 </a:pPr>
-                <a:endParaRPr lang="en-US"/>
               </a:p>
             </c:txPr>
             <c:showLegendKey val="0"/>
@@ -189,47 +174,44 @@
             <c:showPercent val="0"/>
             <c:showBubbleSize val="0"/>
             <c:showLeaderLines val="0"/>
-            <c:extLst>
-              <c:ext xmlns:c15="http://schemas.microsoft.com/office/drawing/2012/chart" uri="{CE6537A1-D6FC-4f65-9D91-7224C49458BB}">
-                <c15:showLeaderLines val="0"/>
-              </c:ext>
-            </c:extLst>
           </c:dLbls>
           <c:cat>
-            <c:strRef>
+            <c:multiLvlStrRef>
               <c:f>Sheet1!$A$2:$A$8</c:f>
-              <c:strCache>
+              <c:multiLvlStrCache>
                 <c:ptCount val="7"/>
-                <c:pt idx="0">
-                  <c:v>XGBoost
+                <c:lvl>
+                  <c:pt idx="0">
+                    <c:v>XGBoost
 (Tuned)</c:v>
-                </c:pt>
-                <c:pt idx="1">
-                  <c:v>LightGBM
+                  </c:pt>
+                  <c:pt idx="1">
+                    <c:v>LightGBM
 (Tuned)</c:v>
-                </c:pt>
-                <c:pt idx="2">
-                  <c:v>Stacking
+                  </c:pt>
+                  <c:pt idx="2">
+                    <c:v>Stacking
 Ensemble</c:v>
-                </c:pt>
-                <c:pt idx="3">
-                  <c:v>MLP
+                  </c:pt>
+                  <c:pt idx="3">
+                    <c:v>MLP
 Neural Net</c:v>
-                </c:pt>
-                <c:pt idx="4">
-                  <c:v>Logistic
+                  </c:pt>
+                  <c:pt idx="4">
+                    <c:v>Logistic
 Regression</c:v>
-                </c:pt>
-                <c:pt idx="5">
-                  <c:v>Random
+                  </c:pt>
+                  <c:pt idx="5">
+                    <c:v>Random
 Forest</c:v>
-                </c:pt>
-                <c:pt idx="6">
-                  <c:v>Dummy
+                  </c:pt>
+                  <c:pt idx="6">
+                    <c:v>Dummy
 Baseline</c:v>
-                </c:pt>
-              </c:strCache>
-            </c:strRef>
+                  </c:pt>
+                </c:lvl>
+              </c:multiLvlStrCache>
+            </c:multiLvlStrRef>
           </c:cat>
           <c:val>
             <c:numRef>
@@ -256,28 +238,41 @@
                   <c:v>0.89</c:v>
                 </c:pt>
                 <c:pt idx="6">
-                  <c:v>0.28999999999999998</c:v>
+                  <c:v>0.29</c:v>
                 </c:pt>
               </c:numCache>
             </c:numRef>
           </c:val>
-          <c:extLst>
-            <c:ext xmlns:c16="http://schemas.microsoft.com/office/drawing/2014/chart" uri="{C3380CC4-5D6E-409C-BE32-E72D297353CC}">
-              <c16:uniqueId val="{00000000-FF6D-8648-9A82-19B25E2B62D7}"/>
-            </c:ext>
-          </c:extLst>
         </c:ser>
         <c:dLbls>
+          <c:numFmt formatCode="#,##0" sourceLinked="0"/>
+          <c:txPr>
+            <a:bodyPr/>
+            <a:lstStyle/>
+            <a:p>
+              <a:pPr>
+                <a:defRPr b="0" i="0" strike="noStrike" sz="1200" u="none">
+                  <a:solidFill>
+                    <a:srgbClr val="1E2761"/>
+                  </a:solidFill>
+                  <a:latin typeface="Arial"/>
+                </a:defRPr>
+              </a:pPr>
+            </a:p>
+          </c:txPr>
           <c:showLegendKey val="0"/>
           <c:showVal val="1"/>
           <c:showCatName val="0"/>
           <c:showSerName val="0"/>
           <c:showPercent val="0"/>
           <c:showBubbleSize val="0"/>
+          <c:showLeaderLines val="0"/>
         </c:dLbls>
         <c:gapWidth val="150"/>
+        <c:overlap val="0"/>
         <c:axId val="2094734554"/>
         <c:axId val="2094734552"/>
+        <c:axId val="2094734556"/>
       </c:barChart>
       <c:catAx>
         <c:axId val="2094734554"/>
@@ -318,7 +313,6 @@
         <c:crosses val="autoZero"/>
         <c:auto val="1"/>
         <c:lblAlgn val="ctr"/>
-        <c:lblOffset val="100"/>
         <c:noMultiLvlLbl val="1"/>
       </c:catAx>
       <c:valAx>
@@ -383,7 +377,6 @@
     </c:plotArea>
     <c:plotVisOnly val="1"/>
     <c:dispBlanksAs val="span"/>
-    <c:showDLblsOverMax val="1"/>
   </c:chart>
   <c:spPr>
     <a:solidFill>
@@ -401,11 +394,9 @@
 </file>
 
 <file path=ppt/charts/chart2.xml><?xml version="1.0" encoding="utf-8"?>
-<c:chartSpace xmlns:c="http://schemas.openxmlformats.org/drawingml/2006/chart" xmlns:a="http://schemas.openxmlformats.org/drawingml/2006/main" xmlns:r="http://schemas.openxmlformats.org/officeDocument/2006/relationships" xmlns:c16r2="http://schemas.microsoft.com/office/drawing/2015/06/chart">
+<c:chartSpace xmlns:c="http://schemas.openxmlformats.org/drawingml/2006/chart" xmlns:a="http://schemas.openxmlformats.org/drawingml/2006/main" xmlns:r="http://schemas.openxmlformats.org/officeDocument/2006/relationships">
   <c:date1904 val="0"/>
-  <c:lang val="en-US"/>
   <c:roundedCorners val="1"/>
-  <c:style val="2"/>
   <c:chart>
     <c:autoTitleDeleted val="1"/>
     <c:plotArea>
@@ -437,26 +428,18 @@
           <c:invertIfNegative val="0"/>
           <c:dLbls>
             <c:numFmt formatCode="#,##0" sourceLinked="0"/>
-            <c:spPr>
-              <a:noFill/>
-              <a:ln>
-                <a:noFill/>
-              </a:ln>
-              <a:effectLst/>
-            </c:spPr>
             <c:txPr>
               <a:bodyPr/>
               <a:lstStyle/>
               <a:p>
                 <a:pPr>
-                  <a:defRPr sz="1200" b="0" i="0" u="none" strike="noStrike">
+                  <a:defRPr b="0" i="0" strike="noStrike" sz="1200" u="none">
                     <a:solidFill>
                       <a:srgbClr val="1E2761"/>
                     </a:solidFill>
                     <a:latin typeface="Arial"/>
                   </a:defRPr>
                 </a:pPr>
-                <a:endParaRPr lang="en-US"/>
               </a:p>
             </c:txPr>
             <c:showLegendKey val="0"/>
@@ -466,37 +449,34 @@
             <c:showPercent val="0"/>
             <c:showBubbleSize val="0"/>
             <c:showLeaderLines val="0"/>
-            <c:extLst>
-              <c:ext xmlns:c15="http://schemas.microsoft.com/office/drawing/2012/chart" uri="{CE6537A1-D6FC-4f65-9D91-7224C49458BB}">
-                <c15:showLeaderLines val="0"/>
-              </c:ext>
-            </c:extLst>
           </c:dLbls>
           <c:cat>
-            <c:strRef>
+            <c:multiLvlStrRef>
               <c:f>Sheet1!$A$2:$A$7</c:f>
-              <c:strCache>
+              <c:multiLvlStrCache>
                 <c:ptCount val="6"/>
-                <c:pt idx="0">
-                  <c:v>High Stress Flag</c:v>
-                </c:pt>
-                <c:pt idx="1">
-                  <c:v>Overtime Index</c:v>
-                </c:pt>
-                <c:pt idx="2">
-                  <c:v>Tenure Risk Window</c:v>
-                </c:pt>
-                <c:pt idx="3">
-                  <c:v>Low Wellbeing</c:v>
-                </c:pt>
-                <c:pt idx="4">
-                  <c:v>Tenure Years</c:v>
-                </c:pt>
-                <c:pt idx="5">
-                  <c:v>Satisfaction Gap</c:v>
-                </c:pt>
-              </c:strCache>
-            </c:strRef>
+                <c:lvl>
+                  <c:pt idx="0">
+                    <c:v>High Stress Flag</c:v>
+                  </c:pt>
+                  <c:pt idx="1">
+                    <c:v>Overtime Index</c:v>
+                  </c:pt>
+                  <c:pt idx="2">
+                    <c:v>Tenure Risk Window</c:v>
+                  </c:pt>
+                  <c:pt idx="3">
+                    <c:v>Low Wellbeing</c:v>
+                  </c:pt>
+                  <c:pt idx="4">
+                    <c:v>Tenure Years</c:v>
+                  </c:pt>
+                  <c:pt idx="5">
+                    <c:v>Satisfaction Gap</c:v>
+                  </c:pt>
+                </c:lvl>
+              </c:multiLvlStrCache>
+            </c:multiLvlStrRef>
           </c:cat>
           <c:val>
             <c:numRef>
@@ -525,23 +505,36 @@
               </c:numCache>
             </c:numRef>
           </c:val>
-          <c:extLst>
-            <c:ext xmlns:c16="http://schemas.microsoft.com/office/drawing/2014/chart" uri="{C3380CC4-5D6E-409C-BE32-E72D297353CC}">
-              <c16:uniqueId val="{00000000-4249-144B-94EC-5EAEC16922BC}"/>
-            </c:ext>
-          </c:extLst>
         </c:ser>
         <c:dLbls>
+          <c:numFmt formatCode="#,##0" sourceLinked="0"/>
+          <c:txPr>
+            <a:bodyPr/>
+            <a:lstStyle/>
+            <a:p>
+              <a:pPr>
+                <a:defRPr b="0" i="0" strike="noStrike" sz="1200" u="none">
+                  <a:solidFill>
+                    <a:srgbClr val="1E2761"/>
+                  </a:solidFill>
+                  <a:latin typeface="Arial"/>
+                </a:defRPr>
+              </a:pPr>
+            </a:p>
+          </c:txPr>
           <c:showLegendKey val="0"/>
           <c:showVal val="1"/>
           <c:showCatName val="0"/>
           <c:showSerName val="0"/>
           <c:showPercent val="0"/>
           <c:showBubbleSize val="0"/>
+          <c:showLeaderLines val="0"/>
         </c:dLbls>
         <c:gapWidth val="150"/>
+        <c:overlap val="0"/>
         <c:axId val="2094734554"/>
         <c:axId val="2094734552"/>
+        <c:axId val="2094734556"/>
       </c:barChart>
       <c:catAx>
         <c:axId val="2094734554"/>
@@ -582,7 +575,6 @@
         <c:crosses val="autoZero"/>
         <c:auto val="1"/>
         <c:lblAlgn val="ctr"/>
-        <c:lblOffset val="100"/>
         <c:noMultiLvlLbl val="1"/>
       </c:catAx>
       <c:valAx>
@@ -645,7 +637,6 @@
     </c:plotArea>
     <c:plotVisOnly val="1"/>
     <c:dispBlanksAs val="span"/>
-    <c:showDLblsOverMax val="1"/>
   </c:chart>
   <c:spPr>
     <a:solidFill>
@@ -684,10 +675,234 @@
           <a:chExt cx="0" cy="0"/>
         </a:xfrm>
       </p:grpSpPr>
+      <p:sp>
+        <p:nvSpPr>
+          <p:cNvPr id="2" name="Header Placeholder 1"/>
+          <p:cNvSpPr>
+            <a:spLocks noGrp="1"/>
+          </p:cNvSpPr>
+          <p:nvPr>
+            <p:ph type="hdr" sz="quarter"/>
+          </p:nvPr>
+        </p:nvSpPr>
+        <p:spPr>
+          <a:xfrm>
+            <a:off x="0" y="0"/>
+            <a:ext cx="2971800" cy="458788"/>
+          </a:xfrm>
+          <a:prstGeom prst="rect">
+            <a:avLst/>
+          </a:prstGeom>
+        </p:spPr>
+        <p:txBody>
+          <a:bodyPr vert="horz" lIns="91440" tIns="45720" rIns="91440" bIns="45720" rtlCol="0"/>
+          <a:lstStyle>
+            <a:lvl1pPr algn="l">
+              <a:defRPr sz="1200"/>
+            </a:lvl1pPr>
+          </a:lstStyle>
+          <a:p>
+            <a:endParaRPr lang="en-US"/>
+          </a:p>
+        </p:txBody>
+      </p:sp>
+      <p:sp>
+        <p:nvSpPr>
+          <p:cNvPr id="3" name="Date Placeholder 2"/>
+          <p:cNvSpPr>
+            <a:spLocks noGrp="1"/>
+          </p:cNvSpPr>
+          <p:nvPr>
+            <p:ph type="dt" idx="1"/>
+          </p:nvPr>
+        </p:nvSpPr>
+        <p:spPr>
+          <a:xfrm>
+            <a:off x="3884613" y="0"/>
+            <a:ext cx="2971800" cy="458788"/>
+          </a:xfrm>
+          <a:prstGeom prst="rect">
+            <a:avLst/>
+          </a:prstGeom>
+        </p:spPr>
+        <p:txBody>
+          <a:bodyPr vert="horz" lIns="91440" tIns="45720" rIns="91440" bIns="45720" rtlCol="0"/>
+          <a:lstStyle>
+            <a:lvl1pPr algn="r">
+              <a:defRPr sz="1200"/>
+            </a:lvl1pPr>
+          </a:lstStyle>
+          <a:p>
+            <a:fld id="{5282F153-3F37-0F45-9E97-73ACFA13230C}" type="datetimeFigureOut">
+              <a:rPr lang="en-US"/>
+              <a:t>7/23/19</a:t>
+            </a:fld>
+            <a:endParaRPr lang="en-US"/>
+          </a:p>
+        </p:txBody>
+      </p:sp>
+      <p:sp>
+        <p:nvSpPr>
+          <p:cNvPr id="4" name="Slide Image Placeholder 3"/>
+          <p:cNvSpPr>
+            <a:spLocks noGrp="1" noRot="1" noChangeAspect="1"/>
+          </p:cNvSpPr>
+          <p:nvPr>
+            <p:ph type="sldImg" idx="2"/>
+          </p:nvPr>
+        </p:nvSpPr>
+        <p:spPr>
+          <a:xfrm>
+            <a:off x="685800" y="1143000"/>
+            <a:ext cx="5486400" cy="3086100"/>
+          </a:xfrm>
+          <a:prstGeom prst="rect">
+            <a:avLst/>
+          </a:prstGeom>
+          <a:noFill/>
+          <a:ln w="12700">
+            <a:solidFill>
+              <a:prstClr val="black"/>
+            </a:solidFill>
+          </a:ln>
+        </p:spPr>
+        <p:txBody>
+          <a:bodyPr vert="horz" lIns="91440" tIns="45720" rIns="91440" bIns="45720" rtlCol="0" anchor="ctr"/>
+          <a:lstStyle/>
+          <a:p>
+            <a:endParaRPr lang="en-US"/>
+          </a:p>
+        </p:txBody>
+      </p:sp>
+      <p:sp>
+        <p:nvSpPr>
+          <p:cNvPr id="5" name="Notes Placeholder 4"/>
+          <p:cNvSpPr>
+            <a:spLocks noGrp="1"/>
+          </p:cNvSpPr>
+          <p:nvPr>
+            <p:ph type="body" sz="quarter" idx="3"/>
+          </p:nvPr>
+        </p:nvSpPr>
+        <p:spPr>
+          <a:xfrm>
+            <a:off x="685800" y="4400550"/>
+            <a:ext cx="5486400" cy="3600450"/>
+          </a:xfrm>
+          <a:prstGeom prst="rect">
+            <a:avLst/>
+          </a:prstGeom>
+        </p:spPr>
+        <p:txBody>
+          <a:bodyPr vert="horz" lIns="91440" tIns="45720" rIns="91440" bIns="45720" rtlCol="0"/>
+          <a:lstStyle/>
+          <a:p>
+            <a:pPr lvl="0"/>
+            <a:r>
+              <a:rPr lang="en-US"/>
+              <a:t>Click to edit Master text styles</a:t>
+            </a:r>
+          </a:p>
+          <a:p>
+            <a:pPr lvl="1"/>
+            <a:r>
+              <a:rPr lang="en-US"/>
+              <a:t>Second level</a:t>
+            </a:r>
+          </a:p>
+          <a:p>
+            <a:pPr lvl="2"/>
+            <a:r>
+              <a:rPr lang="en-US"/>
+              <a:t>Third level</a:t>
+            </a:r>
+          </a:p>
+          <a:p>
+            <a:pPr lvl="3"/>
+            <a:r>
+              <a:rPr lang="en-US"/>
+              <a:t>Fourth level</a:t>
+            </a:r>
+          </a:p>
+          <a:p>
+            <a:pPr lvl="4"/>
+            <a:r>
+              <a:rPr lang="en-US"/>
+              <a:t>Fifth level</a:t>
+            </a:r>
+          </a:p>
+        </p:txBody>
+      </p:sp>
+      <p:sp>
+        <p:nvSpPr>
+          <p:cNvPr id="6" name="Footer Placeholder 5"/>
+          <p:cNvSpPr>
+            <a:spLocks noGrp="1"/>
+          </p:cNvSpPr>
+          <p:nvPr>
+            <p:ph type="ftr" sz="quarter" idx="4"/>
+          </p:nvPr>
+        </p:nvSpPr>
+        <p:spPr>
+          <a:xfrm>
+            <a:off x="0" y="8685213"/>
+            <a:ext cx="2971800" cy="458787"/>
+          </a:xfrm>
+          <a:prstGeom prst="rect">
+            <a:avLst/>
+          </a:prstGeom>
+        </p:spPr>
+        <p:txBody>
+          <a:bodyPr vert="horz" lIns="91440" tIns="45720" rIns="91440" bIns="45720" rtlCol="0" anchor="b"/>
+          <a:lstStyle>
+            <a:lvl1pPr algn="l">
+              <a:defRPr sz="1200"/>
+            </a:lvl1pPr>
+          </a:lstStyle>
+          <a:p>
+            <a:endParaRPr lang="en-US"/>
+          </a:p>
+        </p:txBody>
+      </p:sp>
+      <p:sp>
+        <p:nvSpPr>
+          <p:cNvPr id="7" name="Slide Number Placeholder 6"/>
+          <p:cNvSpPr>
+            <a:spLocks noGrp="1"/>
+          </p:cNvSpPr>
+          <p:nvPr>
+            <p:ph type="sldNum" sz="quarter" idx="5"/>
+          </p:nvPr>
+        </p:nvSpPr>
+        <p:spPr>
+          <a:xfrm>
+            <a:off x="3884613" y="8685213"/>
+            <a:ext cx="2971800" cy="458787"/>
+          </a:xfrm>
+          <a:prstGeom prst="rect">
+            <a:avLst/>
+          </a:prstGeom>
+        </p:spPr>
+        <p:txBody>
+          <a:bodyPr vert="horz" lIns="91440" tIns="45720" rIns="91440" bIns="45720" rtlCol="0" anchor="b"/>
+          <a:lstStyle>
+            <a:lvl1pPr algn="r">
+              <a:defRPr sz="1200"/>
+            </a:lvl1pPr>
+          </a:lstStyle>
+          <a:p>
+            <a:fld id="{CE5E9CC1-C706-0F49-92D6-E571CC5EEA8F}" type="slidenum">
+              <a:rPr lang="en-US"/>
+              <a:t>‹#›</a:t>
+            </a:fld>
+            <a:endParaRPr lang="en-US"/>
+          </a:p>
+        </p:txBody>
+      </p:sp>
     </p:spTree>
     <p:extLst>
       <p:ext uri="{BB962C8B-B14F-4D97-AF65-F5344CB8AC3E}">
-        <p14:creationId xmlns:p14="http://schemas.microsoft.com/office/powerpoint/2010/main" val="2797867525"/>
+        <p14:creationId xmlns:p14="http://schemas.microsoft.com/office/powerpoint/2010/main" val="1024086991"/>
       </p:ext>
     </p:extLst>
   </p:cSld>
@@ -831,6 +1046,10 @@
           <a:bodyPr/>
           <a:lstStyle/>
           <a:p>
+            <a:r>
+              <a:rPr lang="en-US" dirty="0"/>
+              <a:t/>
+            </a:r>
             <a:endParaRPr lang="en-US" dirty="0"/>
           </a:p>
         </p:txBody>
@@ -915,6 +1134,10 @@
           <a:bodyPr/>
           <a:lstStyle/>
           <a:p>
+            <a:r>
+              <a:rPr lang="en-US" dirty="0"/>
+              <a:t/>
+            </a:r>
             <a:endParaRPr lang="en-US" dirty="0"/>
           </a:p>
         </p:txBody>
@@ -999,6 +1222,10 @@
           <a:bodyPr/>
           <a:lstStyle/>
           <a:p>
+            <a:r>
+              <a:rPr lang="en-US" dirty="0"/>
+              <a:t/>
+            </a:r>
             <a:endParaRPr lang="en-US" dirty="0"/>
           </a:p>
         </p:txBody>
@@ -1083,6 +1310,10 @@
           <a:bodyPr/>
           <a:lstStyle/>
           <a:p>
+            <a:r>
+              <a:rPr lang="en-US" dirty="0"/>
+              <a:t/>
+            </a:r>
             <a:endParaRPr lang="en-US" dirty="0"/>
           </a:p>
         </p:txBody>
@@ -1167,6 +1398,10 @@
           <a:bodyPr/>
           <a:lstStyle/>
           <a:p>
+            <a:r>
+              <a:rPr lang="en-US" dirty="0"/>
+              <a:t/>
+            </a:r>
             <a:endParaRPr lang="en-US" dirty="0"/>
           </a:p>
         </p:txBody>
@@ -1251,6 +1486,10 @@
           <a:bodyPr/>
           <a:lstStyle/>
           <a:p>
+            <a:r>
+              <a:rPr lang="en-US" dirty="0"/>
+              <a:t/>
+            </a:r>
             <a:endParaRPr lang="en-US" dirty="0"/>
           </a:p>
         </p:txBody>
@@ -1335,6 +1574,10 @@
           <a:bodyPr/>
           <a:lstStyle/>
           <a:p>
+            <a:r>
+              <a:rPr lang="en-US" dirty="0"/>
+              <a:t/>
+            </a:r>
             <a:endParaRPr lang="en-US" dirty="0"/>
           </a:p>
         </p:txBody>
@@ -1419,6 +1662,10 @@
           <a:bodyPr/>
           <a:lstStyle/>
           <a:p>
+            <a:r>
+              <a:rPr lang="en-US" dirty="0"/>
+              <a:t/>
+            </a:r>
             <a:endParaRPr lang="en-US" dirty="0"/>
           </a:p>
         </p:txBody>
@@ -1503,6 +1750,10 @@
           <a:bodyPr/>
           <a:lstStyle/>
           <a:p>
+            <a:r>
+              <a:rPr lang="en-US" dirty="0"/>
+              <a:t/>
+            </a:r>
             <a:endParaRPr lang="en-US" dirty="0"/>
           </a:p>
         </p:txBody>
@@ -1587,6 +1838,10 @@
           <a:bodyPr/>
           <a:lstStyle/>
           <a:p>
+            <a:r>
+              <a:rPr lang="en-US" dirty="0"/>
+              <a:t/>
+            </a:r>
             <a:endParaRPr lang="en-US" dirty="0"/>
           </a:p>
         </p:txBody>
@@ -1671,6 +1926,10 @@
           <a:bodyPr/>
           <a:lstStyle/>
           <a:p>
+            <a:r>
+              <a:rPr lang="en-US" dirty="0"/>
+              <a:t/>
+            </a:r>
             <a:endParaRPr lang="en-US" dirty="0"/>
           </a:p>
         </p:txBody>
@@ -1755,6 +2014,10 @@
           <a:bodyPr/>
           <a:lstStyle/>
           <a:p>
+            <a:r>
+              <a:rPr lang="en-US" dirty="0"/>
+              <a:t/>
+            </a:r>
             <a:endParaRPr lang="en-US" dirty="0"/>
           </a:p>
         </p:txBody>
@@ -1828,11 +2091,6 @@
 <file path=ppt/slideMasters/slideMaster1.xml><?xml version="1.0" encoding="utf-8"?>
 <p:sldMaster xmlns:a="http://schemas.openxmlformats.org/drawingml/2006/main" xmlns:r="http://schemas.openxmlformats.org/officeDocument/2006/relationships" xmlns:p="http://schemas.openxmlformats.org/presentationml/2006/main">
   <p:cSld>
-    <p:bg>
-      <p:bgRef idx="1001">
-        <a:schemeClr val="bg1"/>
-      </p:bgRef>
-    </p:bg>
     <p:spTree>
       <p:nvGrpSpPr>
         <p:cNvPr id="1" name=""/>
@@ -2115,7 +2373,6 @@
         <a:solidFill>
           <a:srgbClr val="1E2761"/>
         </a:solidFill>
-        <a:effectLst/>
       </p:bgPr>
     </p:bg>
     <p:spTree>
@@ -2174,14 +2431,14 @@
       </p:sp>
       <p:pic>
         <p:nvPicPr>
-          <p:cNvPr id="4" name="Image 0" descr="preencoded.png"/>
+          <p:cNvPr id="4" name="Image 0" descr="preencoded.png">    </p:cNvPr>
           <p:cNvPicPr>
             <a:picLocks noChangeAspect="1"/>
           </p:cNvPicPr>
           <p:nvPr/>
         </p:nvPicPr>
         <p:blipFill>
-          <a:blip r:embed="rId3"/>
+          <a:blip r:embed="rId1"/>
           <a:stretch>
             <a:fillRect/>
           </a:stretch>
@@ -2217,11 +2474,11 @@
           <a:bodyPr wrap="square" lIns="0" tIns="0" rIns="0" bIns="0" rtlCol="0" anchor="ctr"/>
           <a:lstStyle/>
           <a:p>
-            <a:pPr marL="0" indent="0" algn="l">
-              <a:buNone/>
-            </a:pPr>
-            <a:r>
-              <a:rPr lang="en-US" sz="4800" b="1" kern="0" spc="600" dirty="0">
+            <a:pPr algn="l" indent="0" marL="0">
+              <a:buNone/>
+            </a:pPr>
+            <a:r>
+              <a:rPr lang="en-US" sz="4800" b="1" spc="600" kern="0" dirty="0">
                 <a:solidFill>
                   <a:srgbClr val="FFFFFF"/>
                 </a:solidFill>
@@ -2256,7 +2513,7 @@
           <a:bodyPr wrap="square" lIns="0" tIns="0" rIns="0" bIns="0" rtlCol="0" anchor="ctr"/>
           <a:lstStyle/>
           <a:p>
-            <a:pPr marL="0" indent="0">
+            <a:pPr indent="0" marL="0">
               <a:buNone/>
             </a:pPr>
             <a:r>
@@ -2295,7 +2552,7 @@
           <a:bodyPr wrap="square" lIns="0" tIns="0" rIns="0" bIns="0" rtlCol="0" anchor="ctr"/>
           <a:lstStyle/>
           <a:p>
-            <a:pPr marL="0" indent="0">
+            <a:pPr indent="0" marL="0">
               <a:buNone/>
             </a:pPr>
             <a:r>
@@ -2315,14 +2572,14 @@
       </p:sp>
       <p:pic>
         <p:nvPicPr>
-          <p:cNvPr id="8" name="Image 1" descr="preencoded.png"/>
+          <p:cNvPr id="8" name="Image 1" descr="preencoded.png">    </p:cNvPr>
           <p:cNvPicPr>
             <a:picLocks noChangeAspect="1"/>
           </p:cNvPicPr>
           <p:nvPr/>
         </p:nvPicPr>
         <p:blipFill>
-          <a:blip r:embed="rId4"/>
+          <a:blip r:embed="rId2"/>
           <a:stretch>
             <a:fillRect/>
           </a:stretch>
@@ -2358,7 +2615,7 @@
           <a:bodyPr wrap="square" lIns="0" tIns="0" rIns="0" bIns="0" rtlCol="0" anchor="ctr"/>
           <a:lstStyle/>
           <a:p>
-            <a:pPr marL="0" indent="0">
+            <a:pPr indent="0" marL="0">
               <a:buNone/>
             </a:pPr>
             <a:r>
@@ -2371,51 +2628,6 @@
                 <a:cs typeface="Calibri" pitchFamily="34" charset="-120"/>
               </a:rPr>
               <a:t>Post Graduate Programme in AI &amp; Machine Learning</a:t>
-            </a:r>
-            <a:endParaRPr lang="en-US" sz="1200" dirty="0"/>
-          </a:p>
-        </p:txBody>
-      </p:sp>
-      <p:sp>
-        <p:nvSpPr>
-          <p:cNvPr id="10" name="Text 5">
-            <a:extLst>
-              <a:ext uri="{FF2B5EF4-FFF2-40B4-BE49-F238E27FC236}">
-                <a16:creationId xmlns:a16="http://schemas.microsoft.com/office/drawing/2014/main" id="{C503D579-849F-124E-3CE0-F5D41273A857}"/>
-              </a:ext>
-            </a:extLst>
-          </p:cNvPr>
-          <p:cNvSpPr/>
-          <p:nvPr/>
-        </p:nvSpPr>
-        <p:spPr>
-          <a:xfrm>
-            <a:off x="731520" y="3749040"/>
-            <a:ext cx="4572000" cy="365760"/>
-          </a:xfrm>
-          <a:prstGeom prst="rect">
-            <a:avLst/>
-          </a:prstGeom>
-          <a:noFill/>
-          <a:ln/>
-        </p:spPr>
-        <p:txBody>
-          <a:bodyPr wrap="square" lIns="0" tIns="0" rIns="0" bIns="0" rtlCol="0" anchor="ctr"/>
-          <a:lstStyle/>
-          <a:p>
-            <a:pPr marL="0" indent="0">
-              <a:buNone/>
-            </a:pPr>
-            <a:r>
-              <a:rPr lang="en-US" sz="1200" dirty="0">
-                <a:solidFill>
-                  <a:srgbClr val="ADB5BD"/>
-                </a:solidFill>
-                <a:latin typeface="Calibri" pitchFamily="34" charset="0"/>
-                <a:ea typeface="Calibri" pitchFamily="34" charset="-122"/>
-                <a:cs typeface="Calibri" pitchFamily="34" charset="-120"/>
-              </a:rPr>
-              <a:t>Author: Jesse Liamzon</a:t>
             </a:r>
             <a:endParaRPr lang="en-US" sz="1200" dirty="0"/>
           </a:p>
@@ -2437,7 +2649,6 @@
         <a:solidFill>
           <a:srgbClr val="F8F9FA"/>
         </a:solidFill>
-        <a:effectLst/>
       </p:bgPr>
     </p:bg>
     <p:spTree>
@@ -2476,7 +2687,285 @@
       </p:sp>
       <p:pic>
         <p:nvPicPr>
-          <p:cNvPr id="3" name="Image 0" descr="preencoded.png"/>
+          <p:cNvPr id="3" name="Image 0" descr="preencoded.png">    </p:cNvPr>
+          <p:cNvPicPr>
+            <a:picLocks noChangeAspect="1"/>
+          </p:cNvPicPr>
+          <p:nvPr/>
+        </p:nvPicPr>
+        <p:blipFill>
+          <a:blip r:embed="rId1"/>
+          <a:stretch>
+            <a:fillRect/>
+          </a:stretch>
+        </p:blipFill>
+        <p:spPr>
+          <a:xfrm>
+            <a:off x="731520" y="228600"/>
+            <a:ext cx="365760" cy="365760"/>
+          </a:xfrm>
+          <a:prstGeom prst="rect">
+            <a:avLst/>
+          </a:prstGeom>
+        </p:spPr>
+      </p:pic>
+      <p:sp>
+        <p:nvSpPr>
+          <p:cNvPr id="4" name="Text 1"/>
+          <p:cNvSpPr/>
+          <p:nvPr/>
+        </p:nvSpPr>
+        <p:spPr>
+          <a:xfrm>
+            <a:off x="1234440" y="228600"/>
+            <a:ext cx="7315200" cy="548640"/>
+          </a:xfrm>
+          <a:prstGeom prst="rect">
+            <a:avLst/>
+          </a:prstGeom>
+          <a:noFill/>
+          <a:ln/>
+        </p:spPr>
+        <p:txBody>
+          <a:bodyPr wrap="square" lIns="0" tIns="0" rIns="0" bIns="0" rtlCol="0" anchor="ctr"/>
+          <a:lstStyle/>
+          <a:p>
+            <a:pPr indent="0" marL="0">
+              <a:buNone/>
+            </a:pPr>
+            <a:r>
+              <a:rPr lang="en-US" sz="3400" b="1" dirty="0">
+                <a:solidFill>
+                  <a:srgbClr val="1E2761"/>
+                </a:solidFill>
+                <a:latin typeface="Georgia" pitchFamily="34" charset="0"/>
+                <a:ea typeface="Georgia" pitchFamily="34" charset="-122"/>
+                <a:cs typeface="Georgia" pitchFamily="34" charset="-120"/>
+              </a:rPr>
+              <a:t>Risks &amp; Considerations</a:t>
+            </a:r>
+            <a:endParaRPr lang="en-US" sz="3400" dirty="0"/>
+          </a:p>
+        </p:txBody>
+      </p:sp>
+      <p:sp>
+        <p:nvSpPr>
+          <p:cNvPr id="5" name="Shape 2"/>
+          <p:cNvSpPr/>
+          <p:nvPr/>
+        </p:nvSpPr>
+        <p:spPr>
+          <a:xfrm>
+            <a:off x="731520" y="914400"/>
+            <a:ext cx="7680960" cy="621792"/>
+          </a:xfrm>
+          <a:prstGeom prst="rect">
+            <a:avLst/>
+          </a:prstGeom>
+          <a:solidFill>
+            <a:srgbClr val="FFFFFF"/>
+          </a:solidFill>
+          <a:ln/>
+          <a:effectLst>
+            <a:outerShdw sx="100000" sy="100000" kx="0" ky="0" algn="bl" rotWithShape="0" blurRad="76200" dist="25400" dir="8100000">
+              <a:srgbClr val="000000">
+                <a:alpha val="12000"/>
+              </a:srgbClr>
+            </a:outerShdw>
+          </a:effectLst>
+        </p:spPr>
+      </p:sp>
+      <p:pic>
+        <p:nvPicPr>
+          <p:cNvPr id="6" name="Image 1" descr="preencoded.png">    </p:cNvPr>
+          <p:cNvPicPr>
+            <a:picLocks noChangeAspect="1"/>
+          </p:cNvPicPr>
+          <p:nvPr/>
+        </p:nvPicPr>
+        <p:blipFill>
+          <a:blip r:embed="rId2"/>
+          <a:stretch>
+            <a:fillRect/>
+          </a:stretch>
+        </p:blipFill>
+        <p:spPr>
+          <a:xfrm>
+            <a:off x="914400" y="1051560"/>
+            <a:ext cx="365760" cy="365760"/>
+          </a:xfrm>
+          <a:prstGeom prst="rect">
+            <a:avLst/>
+          </a:prstGeom>
+        </p:spPr>
+      </p:pic>
+      <p:sp>
+        <p:nvSpPr>
+          <p:cNvPr id="7" name="Text 3"/>
+          <p:cNvSpPr/>
+          <p:nvPr/>
+        </p:nvSpPr>
+        <p:spPr>
+          <a:xfrm>
+            <a:off x="1417320" y="960120"/>
+            <a:ext cx="1645920" cy="320040"/>
+          </a:xfrm>
+          <a:prstGeom prst="rect">
+            <a:avLst/>
+          </a:prstGeom>
+          <a:noFill/>
+          <a:ln/>
+        </p:spPr>
+        <p:txBody>
+          <a:bodyPr wrap="square" lIns="0" tIns="0" rIns="0" bIns="0" rtlCol="0" anchor="ctr"/>
+          <a:lstStyle/>
+          <a:p>
+            <a:pPr indent="0" marL="0">
+              <a:buNone/>
+            </a:pPr>
+            <a:r>
+              <a:rPr lang="en-US" sz="1300" b="1" dirty="0">
+                <a:solidFill>
+                  <a:srgbClr val="1E2761"/>
+                </a:solidFill>
+                <a:latin typeface="Georgia" pitchFamily="34" charset="0"/>
+                <a:ea typeface="Georgia" pitchFamily="34" charset="-122"/>
+                <a:cs typeface="Georgia" pitchFamily="34" charset="-120"/>
+              </a:rPr>
+              <a:t>Data Quality</a:t>
+            </a:r>
+            <a:endParaRPr lang="en-US" sz="1300" dirty="0"/>
+          </a:p>
+        </p:txBody>
+      </p:sp>
+      <p:sp>
+        <p:nvSpPr>
+          <p:cNvPr id="8" name="Text 4"/>
+          <p:cNvSpPr/>
+          <p:nvPr/>
+        </p:nvSpPr>
+        <p:spPr>
+          <a:xfrm>
+            <a:off x="3200400" y="1005840"/>
+            <a:ext cx="4114800" cy="502920"/>
+          </a:xfrm>
+          <a:prstGeom prst="rect">
+            <a:avLst/>
+          </a:prstGeom>
+          <a:noFill/>
+          <a:ln/>
+        </p:spPr>
+        <p:txBody>
+          <a:bodyPr wrap="square" lIns="0" tIns="0" rIns="0" bIns="0" rtlCol="0" anchor="ctr"/>
+          <a:lstStyle/>
+          <a:p>
+            <a:pPr indent="0" marL="0">
+              <a:buNone/>
+            </a:pPr>
+            <a:r>
+              <a:rPr lang="en-US" sz="1100" dirty="0">
+                <a:solidFill>
+                  <a:srgbClr val="6C757D"/>
+                </a:solidFill>
+                <a:latin typeface="Calibri" pitchFamily="34" charset="0"/>
+                <a:ea typeface="Calibri" pitchFamily="34" charset="-122"/>
+                <a:cs typeface="Calibri" pitchFamily="34" charset="-120"/>
+              </a:rPr>
+              <a:t>Model trained on survey data; real org data may differ</a:t>
+            </a:r>
+            <a:endParaRPr lang="en-US" sz="1100" dirty="0"/>
+          </a:p>
+        </p:txBody>
+      </p:sp>
+      <p:sp>
+        <p:nvSpPr>
+          <p:cNvPr id="9" name="Shape 5"/>
+          <p:cNvSpPr/>
+          <p:nvPr/>
+        </p:nvSpPr>
+        <p:spPr>
+          <a:xfrm>
+            <a:off x="7589520" y="1078992"/>
+            <a:ext cx="365760" cy="365760"/>
+          </a:xfrm>
+          <a:prstGeom prst="ellipse">
+            <a:avLst/>
+          </a:prstGeom>
+          <a:solidFill>
+            <a:srgbClr val="FF9800"/>
+          </a:solidFill>
+          <a:ln/>
+        </p:spPr>
+      </p:sp>
+      <p:sp>
+        <p:nvSpPr>
+          <p:cNvPr id="10" name="Text 6"/>
+          <p:cNvSpPr/>
+          <p:nvPr/>
+        </p:nvSpPr>
+        <p:spPr>
+          <a:xfrm>
+            <a:off x="7589520" y="1078992"/>
+            <a:ext cx="365760" cy="365760"/>
+          </a:xfrm>
+          <a:prstGeom prst="rect">
+            <a:avLst/>
+          </a:prstGeom>
+          <a:noFill/>
+          <a:ln/>
+        </p:spPr>
+        <p:txBody>
+          <a:bodyPr wrap="square" lIns="0" tIns="0" rIns="0" bIns="0" rtlCol="0" anchor="ctr"/>
+          <a:lstStyle/>
+          <a:p>
+            <a:pPr algn="ctr" indent="0" marL="0">
+              <a:buNone/>
+            </a:pPr>
+            <a:r>
+              <a:rPr lang="en-US" sz="1200" b="1" dirty="0">
+                <a:solidFill>
+                  <a:srgbClr val="FFFFFF"/>
+                </a:solidFill>
+                <a:latin typeface="Calibri" pitchFamily="34" charset="0"/>
+                <a:ea typeface="Calibri" pitchFamily="34" charset="-122"/>
+                <a:cs typeface="Calibri" pitchFamily="34" charset="-120"/>
+              </a:rPr>
+              <a:t>M</a:t>
+            </a:r>
+            <a:endParaRPr lang="en-US" sz="1200" dirty="0"/>
+          </a:p>
+        </p:txBody>
+      </p:sp>
+      <p:sp>
+        <p:nvSpPr>
+          <p:cNvPr id="11" name="Shape 7"/>
+          <p:cNvSpPr/>
+          <p:nvPr/>
+        </p:nvSpPr>
+        <p:spPr>
+          <a:xfrm>
+            <a:off x="731520" y="1664208"/>
+            <a:ext cx="7680960" cy="621792"/>
+          </a:xfrm>
+          <a:prstGeom prst="rect">
+            <a:avLst/>
+          </a:prstGeom>
+          <a:solidFill>
+            <a:srgbClr val="FFFFFF"/>
+          </a:solidFill>
+          <a:ln/>
+          <a:effectLst>
+            <a:outerShdw sx="100000" sy="100000" kx="0" ky="0" algn="bl" rotWithShape="0" blurRad="76200" dist="25400" dir="8100000">
+              <a:srgbClr val="000000">
+                <a:alpha val="12000"/>
+              </a:srgbClr>
+            </a:outerShdw>
+          </a:effectLst>
+        </p:spPr>
+      </p:sp>
+      <p:pic>
+        <p:nvPicPr>
+          <p:cNvPr id="12" name="Image 2" descr="preencoded.png">    </p:cNvPr>
           <p:cNvPicPr>
             <a:picLocks noChangeAspect="1"/>
           </p:cNvPicPr>
@@ -2490,7 +2979,7 @@
         </p:blipFill>
         <p:spPr>
           <a:xfrm>
-            <a:off x="731520" y="228600"/>
+            <a:off x="914400" y="1801368"/>
             <a:ext cx="365760" cy="365760"/>
           </a:xfrm>
           <a:prstGeom prst="rect">
@@ -2500,14 +2989,14 @@
       </p:pic>
       <p:sp>
         <p:nvSpPr>
-          <p:cNvPr id="4" name="Text 1"/>
-          <p:cNvSpPr/>
-          <p:nvPr/>
-        </p:nvSpPr>
-        <p:spPr>
-          <a:xfrm>
-            <a:off x="1234440" y="228600"/>
-            <a:ext cx="7315200" cy="548640"/>
+          <p:cNvPr id="13" name="Text 8"/>
+          <p:cNvSpPr/>
+          <p:nvPr/>
+        </p:nvSpPr>
+        <p:spPr>
+          <a:xfrm>
+            <a:off x="1417320" y="1709928"/>
+            <a:ext cx="1645920" cy="320040"/>
           </a:xfrm>
           <a:prstGeom prst="rect">
             <a:avLst/>
@@ -2519,11 +3008,11 @@
           <a:bodyPr wrap="square" lIns="0" tIns="0" rIns="0" bIns="0" rtlCol="0" anchor="ctr"/>
           <a:lstStyle/>
           <a:p>
-            <a:pPr marL="0" indent="0">
-              <a:buNone/>
-            </a:pPr>
-            <a:r>
-              <a:rPr lang="en-US" sz="3400" b="1" dirty="0">
+            <a:pPr indent="0" marL="0">
+              <a:buNone/>
+            </a:pPr>
+            <a:r>
+              <a:rPr lang="en-US" sz="1300" b="1" dirty="0">
                 <a:solidFill>
                   <a:srgbClr val="1E2761"/>
                 </a:solidFill>
@@ -2531,21 +3020,119 @@
                 <a:ea typeface="Georgia" pitchFamily="34" charset="-122"/>
                 <a:cs typeface="Georgia" pitchFamily="34" charset="-120"/>
               </a:rPr>
-              <a:t>Risks &amp; Considerations</a:t>
-            </a:r>
-            <a:endParaRPr lang="en-US" sz="3400" dirty="0"/>
-          </a:p>
-        </p:txBody>
-      </p:sp>
-      <p:sp>
-        <p:nvSpPr>
-          <p:cNvPr id="5" name="Shape 2"/>
-          <p:cNvSpPr/>
-          <p:nvPr/>
-        </p:nvSpPr>
-        <p:spPr>
-          <a:xfrm>
-            <a:off x="731520" y="914400"/>
+              <a:t>Privacy</a:t>
+            </a:r>
+            <a:endParaRPr lang="en-US" sz="1300" dirty="0"/>
+          </a:p>
+        </p:txBody>
+      </p:sp>
+      <p:sp>
+        <p:nvSpPr>
+          <p:cNvPr id="14" name="Text 9"/>
+          <p:cNvSpPr/>
+          <p:nvPr/>
+        </p:nvSpPr>
+        <p:spPr>
+          <a:xfrm>
+            <a:off x="3200400" y="1755648"/>
+            <a:ext cx="4114800" cy="502920"/>
+          </a:xfrm>
+          <a:prstGeom prst="rect">
+            <a:avLst/>
+          </a:prstGeom>
+          <a:noFill/>
+          <a:ln/>
+        </p:spPr>
+        <p:txBody>
+          <a:bodyPr wrap="square" lIns="0" tIns="0" rIns="0" bIns="0" rtlCol="0" anchor="ctr"/>
+          <a:lstStyle/>
+          <a:p>
+            <a:pPr indent="0" marL="0">
+              <a:buNone/>
+            </a:pPr>
+            <a:r>
+              <a:rPr lang="en-US" sz="1100" dirty="0">
+                <a:solidFill>
+                  <a:srgbClr val="6C757D"/>
+                </a:solidFill>
+                <a:latin typeface="Calibri" pitchFamily="34" charset="0"/>
+                <a:ea typeface="Calibri" pitchFamily="34" charset="-122"/>
+                <a:cs typeface="Calibri" pitchFamily="34" charset="-120"/>
+              </a:rPr>
+              <a:t>Transparent comms and opt-in participation essential</a:t>
+            </a:r>
+            <a:endParaRPr lang="en-US" sz="1100" dirty="0"/>
+          </a:p>
+        </p:txBody>
+      </p:sp>
+      <p:sp>
+        <p:nvSpPr>
+          <p:cNvPr id="15" name="Shape 10"/>
+          <p:cNvSpPr/>
+          <p:nvPr/>
+        </p:nvSpPr>
+        <p:spPr>
+          <a:xfrm>
+            <a:off x="7589520" y="1828800"/>
+            <a:ext cx="365760" cy="365760"/>
+          </a:xfrm>
+          <a:prstGeom prst="ellipse">
+            <a:avLst/>
+          </a:prstGeom>
+          <a:solidFill>
+            <a:srgbClr val="DC3545"/>
+          </a:solidFill>
+          <a:ln/>
+        </p:spPr>
+      </p:sp>
+      <p:sp>
+        <p:nvSpPr>
+          <p:cNvPr id="16" name="Text 11"/>
+          <p:cNvSpPr/>
+          <p:nvPr/>
+        </p:nvSpPr>
+        <p:spPr>
+          <a:xfrm>
+            <a:off x="7589520" y="1828800"/>
+            <a:ext cx="365760" cy="365760"/>
+          </a:xfrm>
+          <a:prstGeom prst="rect">
+            <a:avLst/>
+          </a:prstGeom>
+          <a:noFill/>
+          <a:ln/>
+        </p:spPr>
+        <p:txBody>
+          <a:bodyPr wrap="square" lIns="0" tIns="0" rIns="0" bIns="0" rtlCol="0" anchor="ctr"/>
+          <a:lstStyle/>
+          <a:p>
+            <a:pPr algn="ctr" indent="0" marL="0">
+              <a:buNone/>
+            </a:pPr>
+            <a:r>
+              <a:rPr lang="en-US" sz="1200" b="1" dirty="0">
+                <a:solidFill>
+                  <a:srgbClr val="FFFFFF"/>
+                </a:solidFill>
+                <a:latin typeface="Calibri" pitchFamily="34" charset="0"/>
+                <a:ea typeface="Calibri" pitchFamily="34" charset="-122"/>
+                <a:cs typeface="Calibri" pitchFamily="34" charset="-120"/>
+              </a:rPr>
+              <a:t>H</a:t>
+            </a:r>
+            <a:endParaRPr lang="en-US" sz="1200" dirty="0"/>
+          </a:p>
+        </p:txBody>
+      </p:sp>
+      <p:sp>
+        <p:nvSpPr>
+          <p:cNvPr id="17" name="Shape 12"/>
+          <p:cNvSpPr/>
+          <p:nvPr/>
+        </p:nvSpPr>
+        <p:spPr>
+          <a:xfrm>
+            <a:off x="731520" y="2414016"/>
             <a:ext cx="7680960" cy="621792"/>
           </a:xfrm>
           <a:prstGeom prst="rect">
@@ -2556,7 +3143,7 @@
           </a:solidFill>
           <a:ln/>
           <a:effectLst>
-            <a:outerShdw blurRad="76200" dist="25400" dir="8100000" algn="bl" rotWithShape="0">
+            <a:outerShdw sx="100000" sy="100000" kx="0" ky="0" algn="bl" rotWithShape="0" blurRad="76200" dist="25400" dir="8100000">
               <a:srgbClr val="000000">
                 <a:alpha val="12000"/>
               </a:srgbClr>
@@ -2566,7 +3153,7 @@
       </p:sp>
       <p:pic>
         <p:nvPicPr>
-          <p:cNvPr id="6" name="Image 1" descr="preencoded.png"/>
+          <p:cNvPr id="18" name="Image 3" descr="preencoded.png">    </p:cNvPr>
           <p:cNvPicPr>
             <a:picLocks noChangeAspect="1"/>
           </p:cNvPicPr>
@@ -2580,7 +3167,7 @@
         </p:blipFill>
         <p:spPr>
           <a:xfrm>
-            <a:off x="914400" y="1051560"/>
+            <a:off x="914400" y="2551176"/>
             <a:ext cx="365760" cy="365760"/>
           </a:xfrm>
           <a:prstGeom prst="rect">
@@ -2590,13 +3177,13 @@
       </p:pic>
       <p:sp>
         <p:nvSpPr>
-          <p:cNvPr id="7" name="Text 3"/>
-          <p:cNvSpPr/>
-          <p:nvPr/>
-        </p:nvSpPr>
-        <p:spPr>
-          <a:xfrm>
-            <a:off x="1417320" y="960120"/>
+          <p:cNvPr id="19" name="Text 13"/>
+          <p:cNvSpPr/>
+          <p:nvPr/>
+        </p:nvSpPr>
+        <p:spPr>
+          <a:xfrm>
+            <a:off x="1417320" y="2459736"/>
             <a:ext cx="1645920" cy="320040"/>
           </a:xfrm>
           <a:prstGeom prst="rect">
@@ -2609,7 +3196,7 @@
           <a:bodyPr wrap="square" lIns="0" tIns="0" rIns="0" bIns="0" rtlCol="0" anchor="ctr"/>
           <a:lstStyle/>
           <a:p>
-            <a:pPr marL="0" indent="0">
+            <a:pPr indent="0" marL="0">
               <a:buNone/>
             </a:pPr>
             <a:r>
@@ -2621,7 +3208,7 @@
                 <a:ea typeface="Georgia" pitchFamily="34" charset="-122"/>
                 <a:cs typeface="Georgia" pitchFamily="34" charset="-120"/>
               </a:rPr>
-              <a:t>Data Quality</a:t>
+              <a:t>Over-Reliance</a:t>
             </a:r>
             <a:endParaRPr lang="en-US" sz="1300" dirty="0"/>
           </a:p>
@@ -2629,13 +3216,13 @@
       </p:sp>
       <p:sp>
         <p:nvSpPr>
-          <p:cNvPr id="8" name="Text 4"/>
-          <p:cNvSpPr/>
-          <p:nvPr/>
-        </p:nvSpPr>
-        <p:spPr>
-          <a:xfrm>
-            <a:off x="3200400" y="1005840"/>
+          <p:cNvPr id="20" name="Text 14"/>
+          <p:cNvSpPr/>
+          <p:nvPr/>
+        </p:nvSpPr>
+        <p:spPr>
+          <a:xfrm>
+            <a:off x="3200400" y="2505456"/>
             <a:ext cx="4114800" cy="502920"/>
           </a:xfrm>
           <a:prstGeom prst="rect">
@@ -2648,7 +3235,7 @@
           <a:bodyPr wrap="square" lIns="0" tIns="0" rIns="0" bIns="0" rtlCol="0" anchor="ctr"/>
           <a:lstStyle/>
           <a:p>
-            <a:pPr marL="0" indent="0">
+            <a:pPr indent="0" marL="0">
               <a:buNone/>
             </a:pPr>
             <a:r>
@@ -2660,7 +3247,7 @@
                 <a:ea typeface="Calibri" pitchFamily="34" charset="-122"/>
                 <a:cs typeface="Calibri" pitchFamily="34" charset="-120"/>
               </a:rPr>
-              <a:t>Model trained on survey data; real org data may differ</a:t>
+              <a:t>Model should inform, not replace, human HR judgement</a:t>
             </a:r>
             <a:endParaRPr lang="en-US" sz="1100" dirty="0"/>
           </a:p>
@@ -2668,13 +3255,13 @@
       </p:sp>
       <p:sp>
         <p:nvSpPr>
-          <p:cNvPr id="9" name="Shape 5"/>
-          <p:cNvSpPr/>
-          <p:nvPr/>
-        </p:nvSpPr>
-        <p:spPr>
-          <a:xfrm>
-            <a:off x="7589520" y="1078992"/>
+          <p:cNvPr id="21" name="Shape 15"/>
+          <p:cNvSpPr/>
+          <p:nvPr/>
+        </p:nvSpPr>
+        <p:spPr>
+          <a:xfrm>
+            <a:off x="7589520" y="2578608"/>
             <a:ext cx="365760" cy="365760"/>
           </a:xfrm>
           <a:prstGeom prst="ellipse">
@@ -2688,13 +3275,13 @@
       </p:sp>
       <p:sp>
         <p:nvSpPr>
-          <p:cNvPr id="10" name="Text 6"/>
-          <p:cNvSpPr/>
-          <p:nvPr/>
-        </p:nvSpPr>
-        <p:spPr>
-          <a:xfrm>
-            <a:off x="7589520" y="1078992"/>
+          <p:cNvPr id="22" name="Text 16"/>
+          <p:cNvSpPr/>
+          <p:nvPr/>
+        </p:nvSpPr>
+        <p:spPr>
+          <a:xfrm>
+            <a:off x="7589520" y="2578608"/>
             <a:ext cx="365760" cy="365760"/>
           </a:xfrm>
           <a:prstGeom prst="rect">
@@ -2707,7 +3294,7 @@
           <a:bodyPr wrap="square" lIns="0" tIns="0" rIns="0" bIns="0" rtlCol="0" anchor="ctr"/>
           <a:lstStyle/>
           <a:p>
-            <a:pPr marL="0" indent="0" algn="ctr">
+            <a:pPr algn="ctr" indent="0" marL="0">
               <a:buNone/>
             </a:pPr>
             <a:r>
@@ -2727,13 +3314,13 @@
       </p:sp>
       <p:sp>
         <p:nvSpPr>
-          <p:cNvPr id="11" name="Shape 7"/>
-          <p:cNvSpPr/>
-          <p:nvPr/>
-        </p:nvSpPr>
-        <p:spPr>
-          <a:xfrm>
-            <a:off x="731520" y="1664208"/>
+          <p:cNvPr id="23" name="Shape 17"/>
+          <p:cNvSpPr/>
+          <p:nvPr/>
+        </p:nvSpPr>
+        <p:spPr>
+          <a:xfrm>
+            <a:off x="731520" y="3163824"/>
             <a:ext cx="7680960" cy="621792"/>
           </a:xfrm>
           <a:prstGeom prst="rect">
@@ -2744,7 +3331,7 @@
           </a:solidFill>
           <a:ln/>
           <a:effectLst>
-            <a:outerShdw blurRad="76200" dist="25400" dir="8100000" algn="bl" rotWithShape="0">
+            <a:outerShdw sx="100000" sy="100000" kx="0" ky="0" algn="bl" rotWithShape="0" blurRad="76200" dist="25400" dir="8100000">
               <a:srgbClr val="000000">
                 <a:alpha val="12000"/>
               </a:srgbClr>
@@ -2754,7 +3341,7 @@
       </p:sp>
       <p:pic>
         <p:nvPicPr>
-          <p:cNvPr id="12" name="Image 2" descr="preencoded.png"/>
+          <p:cNvPr id="24" name="Image 4" descr="preencoded.png">    </p:cNvPr>
           <p:cNvPicPr>
             <a:picLocks noChangeAspect="1"/>
           </p:cNvPicPr>
@@ -2768,7 +3355,7 @@
         </p:blipFill>
         <p:spPr>
           <a:xfrm>
-            <a:off x="914400" y="1801368"/>
+            <a:off x="914400" y="3300984"/>
             <a:ext cx="365760" cy="365760"/>
           </a:xfrm>
           <a:prstGeom prst="rect">
@@ -2778,13 +3365,13 @@
       </p:pic>
       <p:sp>
         <p:nvSpPr>
-          <p:cNvPr id="13" name="Text 8"/>
-          <p:cNvSpPr/>
-          <p:nvPr/>
-        </p:nvSpPr>
-        <p:spPr>
-          <a:xfrm>
-            <a:off x="1417320" y="1709928"/>
+          <p:cNvPr id="25" name="Text 18"/>
+          <p:cNvSpPr/>
+          <p:nvPr/>
+        </p:nvSpPr>
+        <p:spPr>
+          <a:xfrm>
+            <a:off x="1417320" y="3209544"/>
             <a:ext cx="1645920" cy="320040"/>
           </a:xfrm>
           <a:prstGeom prst="rect">
@@ -2797,7 +3384,7 @@
           <a:bodyPr wrap="square" lIns="0" tIns="0" rIns="0" bIns="0" rtlCol="0" anchor="ctr"/>
           <a:lstStyle/>
           <a:p>
-            <a:pPr marL="0" indent="0">
+            <a:pPr indent="0" marL="0">
               <a:buNone/>
             </a:pPr>
             <a:r>
@@ -2809,7 +3396,7 @@
                 <a:ea typeface="Georgia" pitchFamily="34" charset="-122"/>
                 <a:cs typeface="Georgia" pitchFamily="34" charset="-120"/>
               </a:rPr>
-              <a:t>Privacy</a:t>
+              <a:t>Model Drift</a:t>
             </a:r>
             <a:endParaRPr lang="en-US" sz="1300" dirty="0"/>
           </a:p>
@@ -2817,13 +3404,13 @@
       </p:sp>
       <p:sp>
         <p:nvSpPr>
-          <p:cNvPr id="14" name="Text 9"/>
-          <p:cNvSpPr/>
-          <p:nvPr/>
-        </p:nvSpPr>
-        <p:spPr>
-          <a:xfrm>
-            <a:off x="3200400" y="1755648"/>
+          <p:cNvPr id="26" name="Text 19"/>
+          <p:cNvSpPr/>
+          <p:nvPr/>
+        </p:nvSpPr>
+        <p:spPr>
+          <a:xfrm>
+            <a:off x="3200400" y="3255264"/>
             <a:ext cx="4114800" cy="502920"/>
           </a:xfrm>
           <a:prstGeom prst="rect">
@@ -2836,7 +3423,7 @@
           <a:bodyPr wrap="square" lIns="0" tIns="0" rIns="0" bIns="0" rtlCol="0" anchor="ctr"/>
           <a:lstStyle/>
           <a:p>
-            <a:pPr marL="0" indent="0">
+            <a:pPr indent="0" marL="0">
               <a:buNone/>
             </a:pPr>
             <a:r>
@@ -2848,7 +3435,7 @@
                 <a:ea typeface="Calibri" pitchFamily="34" charset="-122"/>
                 <a:cs typeface="Calibri" pitchFamily="34" charset="-120"/>
               </a:rPr>
-              <a:t>Transparent comms and opt-in participation essential</a:t>
+              <a:t>Quarterly retraining and monitoring plan required</a:t>
             </a:r>
             <a:endParaRPr lang="en-US" sz="1100" dirty="0"/>
           </a:p>
@@ -2856,33 +3443,33 @@
       </p:sp>
       <p:sp>
         <p:nvSpPr>
-          <p:cNvPr id="15" name="Shape 10"/>
-          <p:cNvSpPr/>
-          <p:nvPr/>
-        </p:nvSpPr>
-        <p:spPr>
-          <a:xfrm>
-            <a:off x="7589520" y="1828800"/>
+          <p:cNvPr id="27" name="Shape 20"/>
+          <p:cNvSpPr/>
+          <p:nvPr/>
+        </p:nvSpPr>
+        <p:spPr>
+          <a:xfrm>
+            <a:off x="7589520" y="3328416"/>
             <a:ext cx="365760" cy="365760"/>
           </a:xfrm>
           <a:prstGeom prst="ellipse">
             <a:avLst/>
           </a:prstGeom>
           <a:solidFill>
-            <a:srgbClr val="DC3545"/>
+            <a:srgbClr val="28A745"/>
           </a:solidFill>
           <a:ln/>
         </p:spPr>
       </p:sp>
       <p:sp>
         <p:nvSpPr>
-          <p:cNvPr id="16" name="Text 11"/>
-          <p:cNvSpPr/>
-          <p:nvPr/>
-        </p:nvSpPr>
-        <p:spPr>
-          <a:xfrm>
-            <a:off x="7589520" y="1828800"/>
+          <p:cNvPr id="28" name="Text 21"/>
+          <p:cNvSpPr/>
+          <p:nvPr/>
+        </p:nvSpPr>
+        <p:spPr>
+          <a:xfrm>
+            <a:off x="7589520" y="3328416"/>
             <a:ext cx="365760" cy="365760"/>
           </a:xfrm>
           <a:prstGeom prst="rect">
@@ -2895,7 +3482,7 @@
           <a:bodyPr wrap="square" lIns="0" tIns="0" rIns="0" bIns="0" rtlCol="0" anchor="ctr"/>
           <a:lstStyle/>
           <a:p>
-            <a:pPr marL="0" indent="0" algn="ctr">
+            <a:pPr algn="ctr" indent="0" marL="0">
               <a:buNone/>
             </a:pPr>
             <a:r>
@@ -2907,7 +3494,7 @@
                 <a:ea typeface="Calibri" pitchFamily="34" charset="-122"/>
                 <a:cs typeface="Calibri" pitchFamily="34" charset="-120"/>
               </a:rPr>
-              <a:t>H</a:t>
+              <a:t>L</a:t>
             </a:r>
             <a:endParaRPr lang="en-US" sz="1200" dirty="0"/>
           </a:p>
@@ -2915,14 +3502,14 @@
       </p:sp>
       <p:sp>
         <p:nvSpPr>
-          <p:cNvPr id="17" name="Shape 12"/>
-          <p:cNvSpPr/>
-          <p:nvPr/>
-        </p:nvSpPr>
-        <p:spPr>
-          <a:xfrm>
-            <a:off x="731520" y="2414016"/>
-            <a:ext cx="7680960" cy="621792"/>
+          <p:cNvPr id="29" name="Shape 22"/>
+          <p:cNvSpPr/>
+          <p:nvPr/>
+        </p:nvSpPr>
+        <p:spPr>
+          <a:xfrm>
+            <a:off x="731520" y="4023360"/>
+            <a:ext cx="7680960" cy="777240"/>
           </a:xfrm>
           <a:prstGeom prst="rect">
             <a:avLst/>
@@ -2932,7 +3519,7 @@
           </a:solidFill>
           <a:ln/>
           <a:effectLst>
-            <a:outerShdw blurRad="76200" dist="25400" dir="8100000" algn="bl" rotWithShape="0">
+            <a:outerShdw sx="100000" sy="100000" kx="0" ky="0" algn="bl" rotWithShape="0" blurRad="76200" dist="25400" dir="8100000">
               <a:srgbClr val="000000">
                 <a:alpha val="12000"/>
               </a:srgbClr>
@@ -2942,7 +3529,7 @@
       </p:sp>
       <p:pic>
         <p:nvPicPr>
-          <p:cNvPr id="18" name="Image 3" descr="preencoded.png"/>
+          <p:cNvPr id="30" name="Image 5" descr="preencoded.png">    </p:cNvPr>
           <p:cNvPicPr>
             <a:picLocks noChangeAspect="1"/>
           </p:cNvPicPr>
@@ -2956,8 +3543,8 @@
         </p:blipFill>
         <p:spPr>
           <a:xfrm>
-            <a:off x="914400" y="2551176"/>
-            <a:ext cx="365760" cy="365760"/>
+            <a:off x="914400" y="4114800"/>
+            <a:ext cx="274320" cy="274320"/>
           </a:xfrm>
           <a:prstGeom prst="rect">
             <a:avLst/>
@@ -2966,14 +3553,14 @@
       </p:pic>
       <p:sp>
         <p:nvSpPr>
-          <p:cNvPr id="19" name="Text 13"/>
-          <p:cNvSpPr/>
-          <p:nvPr/>
-        </p:nvSpPr>
-        <p:spPr>
-          <a:xfrm>
-            <a:off x="1417320" y="2459736"/>
-            <a:ext cx="1645920" cy="320040"/>
+          <p:cNvPr id="31" name="Text 23"/>
+          <p:cNvSpPr/>
+          <p:nvPr/>
+        </p:nvSpPr>
+        <p:spPr>
+          <a:xfrm>
+            <a:off x="1371600" y="4069080"/>
+            <a:ext cx="6858000" cy="640080"/>
           </a:xfrm>
           <a:prstGeom prst="rect">
             <a:avLst/>
@@ -2985,396 +3572,23 @@
           <a:bodyPr wrap="square" lIns="0" tIns="0" rIns="0" bIns="0" rtlCol="0" anchor="ctr"/>
           <a:lstStyle/>
           <a:p>
-            <a:pPr marL="0" indent="0">
-              <a:buNone/>
-            </a:pPr>
-            <a:r>
-              <a:rPr lang="en-US" sz="1300" b="1" dirty="0">
-                <a:solidFill>
-                  <a:srgbClr val="1E2761"/>
-                </a:solidFill>
-                <a:latin typeface="Georgia" pitchFamily="34" charset="0"/>
-                <a:ea typeface="Georgia" pitchFamily="34" charset="-122"/>
-                <a:cs typeface="Georgia" pitchFamily="34" charset="-120"/>
-              </a:rPr>
-              <a:t>Over-Reliance</a:t>
-            </a:r>
-            <a:endParaRPr lang="en-US" sz="1300" dirty="0"/>
-          </a:p>
-        </p:txBody>
-      </p:sp>
-      <p:sp>
-        <p:nvSpPr>
-          <p:cNvPr id="20" name="Text 14"/>
-          <p:cNvSpPr/>
-          <p:nvPr/>
-        </p:nvSpPr>
-        <p:spPr>
-          <a:xfrm>
-            <a:off x="3200400" y="2505456"/>
-            <a:ext cx="4114800" cy="502920"/>
-          </a:xfrm>
-          <a:prstGeom prst="rect">
-            <a:avLst/>
-          </a:prstGeom>
-          <a:noFill/>
-          <a:ln/>
-        </p:spPr>
-        <p:txBody>
-          <a:bodyPr wrap="square" lIns="0" tIns="0" rIns="0" bIns="0" rtlCol="0" anchor="ctr"/>
-          <a:lstStyle/>
-          <a:p>
-            <a:pPr marL="0" indent="0">
-              <a:buNone/>
-            </a:pPr>
-            <a:r>
-              <a:rPr lang="en-US" sz="1100" dirty="0">
-                <a:solidFill>
-                  <a:srgbClr val="6C757D"/>
+            <a:pPr indent="0" marL="0">
+              <a:buNone/>
+            </a:pPr>
+            <a:r>
+              <a:rPr lang="en-US" sz="1000" b="1" dirty="0">
+                <a:solidFill>
+                  <a:srgbClr val="F96167"/>
                 </a:solidFill>
                 <a:latin typeface="Calibri" pitchFamily="34" charset="0"/>
                 <a:ea typeface="Calibri" pitchFamily="34" charset="-122"/>
                 <a:cs typeface="Calibri" pitchFamily="34" charset="-120"/>
               </a:rPr>
-              <a:t>Model should inform, not replace, human HR judgement</a:t>
-            </a:r>
-            <a:endParaRPr lang="en-US" sz="1100" dirty="0"/>
-          </a:p>
-        </p:txBody>
-      </p:sp>
-      <p:sp>
-        <p:nvSpPr>
-          <p:cNvPr id="21" name="Shape 15"/>
-          <p:cNvSpPr/>
-          <p:nvPr/>
-        </p:nvSpPr>
-        <p:spPr>
-          <a:xfrm>
-            <a:off x="7589520" y="2578608"/>
-            <a:ext cx="365760" cy="365760"/>
-          </a:xfrm>
-          <a:prstGeom prst="ellipse">
-            <a:avLst/>
-          </a:prstGeom>
-          <a:solidFill>
-            <a:srgbClr val="FF9800"/>
-          </a:solidFill>
-          <a:ln/>
-        </p:spPr>
-      </p:sp>
-      <p:sp>
-        <p:nvSpPr>
-          <p:cNvPr id="22" name="Text 16"/>
-          <p:cNvSpPr/>
-          <p:nvPr/>
-        </p:nvSpPr>
-        <p:spPr>
-          <a:xfrm>
-            <a:off x="7589520" y="2578608"/>
-            <a:ext cx="365760" cy="365760"/>
-          </a:xfrm>
-          <a:prstGeom prst="rect">
-            <a:avLst/>
-          </a:prstGeom>
-          <a:noFill/>
-          <a:ln/>
-        </p:spPr>
-        <p:txBody>
-          <a:bodyPr wrap="square" lIns="0" tIns="0" rIns="0" bIns="0" rtlCol="0" anchor="ctr"/>
-          <a:lstStyle/>
-          <a:p>
-            <a:pPr marL="0" indent="0" algn="ctr">
-              <a:buNone/>
-            </a:pPr>
-            <a:r>
-              <a:rPr lang="en-US" sz="1200" b="1" dirty="0">
-                <a:solidFill>
-                  <a:srgbClr val="FFFFFF"/>
-                </a:solidFill>
-                <a:latin typeface="Calibri" pitchFamily="34" charset="0"/>
-                <a:ea typeface="Calibri" pitchFamily="34" charset="-122"/>
-                <a:cs typeface="Calibri" pitchFamily="34" charset="-120"/>
-              </a:rPr>
-              <a:t>M</a:t>
-            </a:r>
-            <a:endParaRPr lang="en-US" sz="1200" dirty="0"/>
-          </a:p>
-        </p:txBody>
-      </p:sp>
-      <p:sp>
-        <p:nvSpPr>
-          <p:cNvPr id="23" name="Shape 17"/>
-          <p:cNvSpPr/>
-          <p:nvPr/>
-        </p:nvSpPr>
-        <p:spPr>
-          <a:xfrm>
-            <a:off x="731520" y="3163824"/>
-            <a:ext cx="7680960" cy="621792"/>
-          </a:xfrm>
-          <a:prstGeom prst="rect">
-            <a:avLst/>
-          </a:prstGeom>
-          <a:solidFill>
-            <a:srgbClr val="FFFFFF"/>
-          </a:solidFill>
-          <a:ln/>
-          <a:effectLst>
-            <a:outerShdw blurRad="76200" dist="25400" dir="8100000" algn="bl" rotWithShape="0">
-              <a:srgbClr val="000000">
-                <a:alpha val="12000"/>
-              </a:srgbClr>
-            </a:outerShdw>
-          </a:effectLst>
-        </p:spPr>
-      </p:sp>
-      <p:pic>
-        <p:nvPicPr>
-          <p:cNvPr id="24" name="Image 4" descr="preencoded.png"/>
-          <p:cNvPicPr>
-            <a:picLocks noChangeAspect="1"/>
-          </p:cNvPicPr>
-          <p:nvPr/>
-        </p:nvPicPr>
-        <p:blipFill>
-          <a:blip r:embed="rId7"/>
-          <a:stretch>
-            <a:fillRect/>
-          </a:stretch>
-        </p:blipFill>
-        <p:spPr>
-          <a:xfrm>
-            <a:off x="914400" y="3300984"/>
-            <a:ext cx="365760" cy="365760"/>
-          </a:xfrm>
-          <a:prstGeom prst="rect">
-            <a:avLst/>
-          </a:prstGeom>
-        </p:spPr>
-      </p:pic>
-      <p:sp>
-        <p:nvSpPr>
-          <p:cNvPr id="25" name="Text 18"/>
-          <p:cNvSpPr/>
-          <p:nvPr/>
-        </p:nvSpPr>
-        <p:spPr>
-          <a:xfrm>
-            <a:off x="1417320" y="3209544"/>
-            <a:ext cx="1645920" cy="320040"/>
-          </a:xfrm>
-          <a:prstGeom prst="rect">
-            <a:avLst/>
-          </a:prstGeom>
-          <a:noFill/>
-          <a:ln/>
-        </p:spPr>
-        <p:txBody>
-          <a:bodyPr wrap="square" lIns="0" tIns="0" rIns="0" bIns="0" rtlCol="0" anchor="ctr"/>
-          <a:lstStyle/>
-          <a:p>
-            <a:pPr marL="0" indent="0">
-              <a:buNone/>
-            </a:pPr>
-            <a:r>
-              <a:rPr lang="en-US" sz="1300" b="1" dirty="0">
-                <a:solidFill>
-                  <a:srgbClr val="1E2761"/>
-                </a:solidFill>
-                <a:latin typeface="Georgia" pitchFamily="34" charset="0"/>
-                <a:ea typeface="Georgia" pitchFamily="34" charset="-122"/>
-                <a:cs typeface="Georgia" pitchFamily="34" charset="-120"/>
-              </a:rPr>
-              <a:t>Model Drift</a:t>
-            </a:r>
-            <a:endParaRPr lang="en-US" sz="1300" dirty="0"/>
-          </a:p>
-        </p:txBody>
-      </p:sp>
-      <p:sp>
-        <p:nvSpPr>
-          <p:cNvPr id="26" name="Text 19"/>
-          <p:cNvSpPr/>
-          <p:nvPr/>
-        </p:nvSpPr>
-        <p:spPr>
-          <a:xfrm>
-            <a:off x="3200400" y="3255264"/>
-            <a:ext cx="4114800" cy="502920"/>
-          </a:xfrm>
-          <a:prstGeom prst="rect">
-            <a:avLst/>
-          </a:prstGeom>
-          <a:noFill/>
-          <a:ln/>
-        </p:spPr>
-        <p:txBody>
-          <a:bodyPr wrap="square" lIns="0" tIns="0" rIns="0" bIns="0" rtlCol="0" anchor="ctr"/>
-          <a:lstStyle/>
-          <a:p>
-            <a:pPr marL="0" indent="0">
-              <a:buNone/>
-            </a:pPr>
-            <a:r>
-              <a:rPr lang="en-US" sz="1100" dirty="0">
-                <a:solidFill>
-                  <a:srgbClr val="6C757D"/>
-                </a:solidFill>
-                <a:latin typeface="Calibri" pitchFamily="34" charset="0"/>
-                <a:ea typeface="Calibri" pitchFamily="34" charset="-122"/>
-                <a:cs typeface="Calibri" pitchFamily="34" charset="-120"/>
-              </a:rPr>
-              <a:t>Quarterly retraining and monitoring plan required</a:t>
-            </a:r>
-            <a:endParaRPr lang="en-US" sz="1100" dirty="0"/>
-          </a:p>
-        </p:txBody>
-      </p:sp>
-      <p:sp>
-        <p:nvSpPr>
-          <p:cNvPr id="27" name="Shape 20"/>
-          <p:cNvSpPr/>
-          <p:nvPr/>
-        </p:nvSpPr>
-        <p:spPr>
-          <a:xfrm>
-            <a:off x="7589520" y="3328416"/>
-            <a:ext cx="365760" cy="365760"/>
-          </a:xfrm>
-          <a:prstGeom prst="ellipse">
-            <a:avLst/>
-          </a:prstGeom>
-          <a:solidFill>
-            <a:srgbClr val="28A745"/>
-          </a:solidFill>
-          <a:ln/>
-        </p:spPr>
-      </p:sp>
-      <p:sp>
-        <p:nvSpPr>
-          <p:cNvPr id="28" name="Text 21"/>
-          <p:cNvSpPr/>
-          <p:nvPr/>
-        </p:nvSpPr>
-        <p:spPr>
-          <a:xfrm>
-            <a:off x="7589520" y="3328416"/>
-            <a:ext cx="365760" cy="365760"/>
-          </a:xfrm>
-          <a:prstGeom prst="rect">
-            <a:avLst/>
-          </a:prstGeom>
-          <a:noFill/>
-          <a:ln/>
-        </p:spPr>
-        <p:txBody>
-          <a:bodyPr wrap="square" lIns="0" tIns="0" rIns="0" bIns="0" rtlCol="0" anchor="ctr"/>
-          <a:lstStyle/>
-          <a:p>
-            <a:pPr marL="0" indent="0" algn="ctr">
-              <a:buNone/>
-            </a:pPr>
-            <a:r>
-              <a:rPr lang="en-US" sz="1200" b="1" dirty="0">
-                <a:solidFill>
-                  <a:srgbClr val="FFFFFF"/>
-                </a:solidFill>
-                <a:latin typeface="Calibri" pitchFamily="34" charset="0"/>
-                <a:ea typeface="Calibri" pitchFamily="34" charset="-122"/>
-                <a:cs typeface="Calibri" pitchFamily="34" charset="-120"/>
-              </a:rPr>
-              <a:t>L</a:t>
-            </a:r>
-            <a:endParaRPr lang="en-US" sz="1200" dirty="0"/>
-          </a:p>
-        </p:txBody>
-      </p:sp>
-      <p:sp>
-        <p:nvSpPr>
-          <p:cNvPr id="29" name="Shape 22"/>
-          <p:cNvSpPr/>
-          <p:nvPr/>
-        </p:nvSpPr>
-        <p:spPr>
-          <a:xfrm>
-            <a:off x="731520" y="4023360"/>
-            <a:ext cx="7680960" cy="777240"/>
-          </a:xfrm>
-          <a:prstGeom prst="rect">
-            <a:avLst/>
-          </a:prstGeom>
-          <a:solidFill>
-            <a:srgbClr val="FFFFFF"/>
-          </a:solidFill>
-          <a:ln/>
-          <a:effectLst>
-            <a:outerShdw blurRad="76200" dist="25400" dir="8100000" algn="bl" rotWithShape="0">
-              <a:srgbClr val="000000">
-                <a:alpha val="12000"/>
-              </a:srgbClr>
-            </a:outerShdw>
-          </a:effectLst>
-        </p:spPr>
-      </p:sp>
-      <p:pic>
-        <p:nvPicPr>
-          <p:cNvPr id="30" name="Image 5" descr="preencoded.png"/>
-          <p:cNvPicPr>
-            <a:picLocks noChangeAspect="1"/>
-          </p:cNvPicPr>
-          <p:nvPr/>
-        </p:nvPicPr>
-        <p:blipFill>
-          <a:blip r:embed="rId8"/>
-          <a:stretch>
-            <a:fillRect/>
-          </a:stretch>
-        </p:blipFill>
-        <p:spPr>
-          <a:xfrm>
-            <a:off x="914400" y="4114800"/>
-            <a:ext cx="274320" cy="274320"/>
-          </a:xfrm>
-          <a:prstGeom prst="rect">
-            <a:avLst/>
-          </a:prstGeom>
-        </p:spPr>
-      </p:pic>
-      <p:sp>
-        <p:nvSpPr>
-          <p:cNvPr id="31" name="Text 23"/>
-          <p:cNvSpPr/>
-          <p:nvPr/>
-        </p:nvSpPr>
-        <p:spPr>
-          <a:xfrm>
-            <a:off x="1371600" y="4069080"/>
-            <a:ext cx="6858000" cy="640080"/>
-          </a:xfrm>
-          <a:prstGeom prst="rect">
-            <a:avLst/>
-          </a:prstGeom>
-          <a:noFill/>
-          <a:ln/>
-        </p:spPr>
-        <p:txBody>
-          <a:bodyPr wrap="square" lIns="0" tIns="0" rIns="0" bIns="0" rtlCol="0" anchor="ctr"/>
-          <a:lstStyle/>
-          <a:p>
-            <a:pPr marL="0" indent="0">
-              <a:buNone/>
-            </a:pPr>
-            <a:r>
-              <a:rPr lang="en-US" sz="1000" b="1" dirty="0">
-                <a:solidFill>
-                  <a:srgbClr val="F96167"/>
-                </a:solidFill>
-                <a:latin typeface="Calibri" pitchFamily="34" charset="0"/>
-                <a:ea typeface="Calibri" pitchFamily="34" charset="-122"/>
-                <a:cs typeface="Calibri" pitchFamily="34" charset="-120"/>
-              </a:rPr>
               <a:t>Key principle: </a:t>
             </a:r>
+            <a:pPr indent="0" marL="0">
+              <a:buNone/>
+            </a:pPr>
             <a:r>
               <a:rPr lang="en-US" sz="1000" dirty="0">
                 <a:solidFill>
@@ -3406,7 +3620,6 @@
         <a:solidFill>
           <a:srgbClr val="FFFFFF"/>
         </a:solidFill>
-        <a:effectLst/>
       </p:bgPr>
     </p:bg>
     <p:spTree>
@@ -3445,7 +3658,290 @@
       </p:sp>
       <p:pic>
         <p:nvPicPr>
-          <p:cNvPr id="3" name="Image 0" descr="preencoded.png"/>
+          <p:cNvPr id="3" name="Image 0" descr="preencoded.png">    </p:cNvPr>
+          <p:cNvPicPr>
+            <a:picLocks noChangeAspect="1"/>
+          </p:cNvPicPr>
+          <p:nvPr/>
+        </p:nvPicPr>
+        <p:blipFill>
+          <a:blip r:embed="rId1"/>
+          <a:stretch>
+            <a:fillRect/>
+          </a:stretch>
+        </p:blipFill>
+        <p:spPr>
+          <a:xfrm>
+            <a:off x="731520" y="228600"/>
+            <a:ext cx="365760" cy="365760"/>
+          </a:xfrm>
+          <a:prstGeom prst="rect">
+            <a:avLst/>
+          </a:prstGeom>
+        </p:spPr>
+      </p:pic>
+      <p:sp>
+        <p:nvSpPr>
+          <p:cNvPr id="4" name="Text 1"/>
+          <p:cNvSpPr/>
+          <p:nvPr/>
+        </p:nvSpPr>
+        <p:spPr>
+          <a:xfrm>
+            <a:off x="1234440" y="228600"/>
+            <a:ext cx="7315200" cy="548640"/>
+          </a:xfrm>
+          <a:prstGeom prst="rect">
+            <a:avLst/>
+          </a:prstGeom>
+          <a:noFill/>
+          <a:ln/>
+        </p:spPr>
+        <p:txBody>
+          <a:bodyPr wrap="square" lIns="0" tIns="0" rIns="0" bIns="0" rtlCol="0" anchor="ctr"/>
+          <a:lstStyle/>
+          <a:p>
+            <a:pPr indent="0" marL="0">
+              <a:buNone/>
+            </a:pPr>
+            <a:r>
+              <a:rPr lang="en-US" sz="3400" b="1" dirty="0">
+                <a:solidFill>
+                  <a:srgbClr val="1E2761"/>
+                </a:solidFill>
+                <a:latin typeface="Georgia" pitchFamily="34" charset="0"/>
+                <a:ea typeface="Georgia" pitchFamily="34" charset="-122"/>
+                <a:cs typeface="Georgia" pitchFamily="34" charset="-120"/>
+              </a:rPr>
+              <a:t>Recommended Next Steps</a:t>
+            </a:r>
+            <a:endParaRPr lang="en-US" sz="3400" dirty="0"/>
+          </a:p>
+        </p:txBody>
+      </p:sp>
+      <p:sp>
+        <p:nvSpPr>
+          <p:cNvPr id="5" name="Shape 2"/>
+          <p:cNvSpPr/>
+          <p:nvPr/>
+        </p:nvSpPr>
+        <p:spPr>
+          <a:xfrm>
+            <a:off x="731520" y="1051560"/>
+            <a:ext cx="502920" cy="502920"/>
+          </a:xfrm>
+          <a:prstGeom prst="ellipse">
+            <a:avLst/>
+          </a:prstGeom>
+          <a:solidFill>
+            <a:srgbClr val="F96167"/>
+          </a:solidFill>
+          <a:ln/>
+        </p:spPr>
+      </p:sp>
+      <p:sp>
+        <p:nvSpPr>
+          <p:cNvPr id="6" name="Text 3"/>
+          <p:cNvSpPr/>
+          <p:nvPr/>
+        </p:nvSpPr>
+        <p:spPr>
+          <a:xfrm>
+            <a:off x="731520" y="1051560"/>
+            <a:ext cx="502920" cy="502920"/>
+          </a:xfrm>
+          <a:prstGeom prst="rect">
+            <a:avLst/>
+          </a:prstGeom>
+          <a:noFill/>
+          <a:ln/>
+        </p:spPr>
+        <p:txBody>
+          <a:bodyPr wrap="square" lIns="0" tIns="0" rIns="0" bIns="0" rtlCol="0" anchor="ctr"/>
+          <a:lstStyle/>
+          <a:p>
+            <a:pPr algn="ctr" indent="0" marL="0">
+              <a:buNone/>
+            </a:pPr>
+            <a:r>
+              <a:rPr lang="en-US" sz="1100" b="1" dirty="0">
+                <a:solidFill>
+                  <a:srgbClr val="FFFFFF"/>
+                </a:solidFill>
+                <a:latin typeface="Georgia" pitchFamily="34" charset="0"/>
+                <a:ea typeface="Georgia" pitchFamily="34" charset="-122"/>
+                <a:cs typeface="Georgia" pitchFamily="34" charset="-120"/>
+              </a:rPr>
+              <a:t>Q1</a:t>
+            </a:r>
+            <a:endParaRPr lang="en-US" sz="1100" dirty="0"/>
+          </a:p>
+        </p:txBody>
+      </p:sp>
+      <p:pic>
+        <p:nvPicPr>
+          <p:cNvPr id="7" name="Image 1" descr="preencoded.png">    </p:cNvPr>
+          <p:cNvPicPr>
+            <a:picLocks noChangeAspect="1"/>
+          </p:cNvPicPr>
+          <p:nvPr/>
+        </p:nvPicPr>
+        <p:blipFill>
+          <a:blip r:embed="rId2"/>
+          <a:stretch>
+            <a:fillRect/>
+          </a:stretch>
+        </p:blipFill>
+        <p:spPr>
+          <a:xfrm>
+            <a:off x="1417320" y="1097280"/>
+            <a:ext cx="320040" cy="320040"/>
+          </a:xfrm>
+          <a:prstGeom prst="rect">
+            <a:avLst/>
+          </a:prstGeom>
+        </p:spPr>
+      </p:pic>
+      <p:sp>
+        <p:nvSpPr>
+          <p:cNvPr id="8" name="Text 4"/>
+          <p:cNvSpPr/>
+          <p:nvPr/>
+        </p:nvSpPr>
+        <p:spPr>
+          <a:xfrm>
+            <a:off x="1874520" y="1005840"/>
+            <a:ext cx="2286000" cy="320040"/>
+          </a:xfrm>
+          <a:prstGeom prst="rect">
+            <a:avLst/>
+          </a:prstGeom>
+          <a:noFill/>
+          <a:ln/>
+        </p:spPr>
+        <p:txBody>
+          <a:bodyPr wrap="square" lIns="0" tIns="0" rIns="0" bIns="0" rtlCol="0" anchor="ctr"/>
+          <a:lstStyle/>
+          <a:p>
+            <a:pPr indent="0" marL="0">
+              <a:buNone/>
+            </a:pPr>
+            <a:r>
+              <a:rPr lang="en-US" sz="1400" b="1" dirty="0">
+                <a:solidFill>
+                  <a:srgbClr val="1E2761"/>
+                </a:solidFill>
+                <a:latin typeface="Georgia" pitchFamily="34" charset="0"/>
+                <a:ea typeface="Georgia" pitchFamily="34" charset="-122"/>
+                <a:cs typeface="Georgia" pitchFamily="34" charset="-120"/>
+              </a:rPr>
+              <a:t>Pilot Programme</a:t>
+            </a:r>
+            <a:endParaRPr lang="en-US" sz="1400" dirty="0"/>
+          </a:p>
+        </p:txBody>
+      </p:sp>
+      <p:sp>
+        <p:nvSpPr>
+          <p:cNvPr id="9" name="Text 5"/>
+          <p:cNvSpPr/>
+          <p:nvPr/>
+        </p:nvSpPr>
+        <p:spPr>
+          <a:xfrm>
+            <a:off x="1874520" y="1325880"/>
+            <a:ext cx="6583680" cy="457200"/>
+          </a:xfrm>
+          <a:prstGeom prst="rect">
+            <a:avLst/>
+          </a:prstGeom>
+          <a:noFill/>
+          <a:ln/>
+        </p:spPr>
+        <p:txBody>
+          <a:bodyPr wrap="square" lIns="0" tIns="0" rIns="0" bIns="0" rtlCol="0" anchor="ctr"/>
+          <a:lstStyle/>
+          <a:p>
+            <a:pPr indent="0" marL="0">
+              <a:buNone/>
+            </a:pPr>
+            <a:r>
+              <a:rPr lang="en-US" sz="1100" dirty="0">
+                <a:solidFill>
+                  <a:srgbClr val="6C757D"/>
+                </a:solidFill>
+                <a:latin typeface="Calibri" pitchFamily="34" charset="0"/>
+                <a:ea typeface="Calibri" pitchFamily="34" charset="-122"/>
+                <a:cs typeface="Calibri" pitchFamily="34" charset="-120"/>
+              </a:rPr>
+              <a:t>Deploy with 2 volunteer departments (200 employees). Validate predictions against real outcomes.</a:t>
+            </a:r>
+            <a:endParaRPr lang="en-US" sz="1100" dirty="0"/>
+          </a:p>
+        </p:txBody>
+      </p:sp>
+      <p:sp>
+        <p:nvSpPr>
+          <p:cNvPr id="10" name="Shape 6"/>
+          <p:cNvSpPr/>
+          <p:nvPr/>
+        </p:nvSpPr>
+        <p:spPr>
+          <a:xfrm>
+            <a:off x="731520" y="1965960"/>
+            <a:ext cx="502920" cy="502920"/>
+          </a:xfrm>
+          <a:prstGeom prst="ellipse">
+            <a:avLst/>
+          </a:prstGeom>
+          <a:solidFill>
+            <a:srgbClr val="1E2761"/>
+          </a:solidFill>
+          <a:ln/>
+        </p:spPr>
+      </p:sp>
+      <p:sp>
+        <p:nvSpPr>
+          <p:cNvPr id="11" name="Text 7"/>
+          <p:cNvSpPr/>
+          <p:nvPr/>
+        </p:nvSpPr>
+        <p:spPr>
+          <a:xfrm>
+            <a:off x="731520" y="1965960"/>
+            <a:ext cx="502920" cy="502920"/>
+          </a:xfrm>
+          <a:prstGeom prst="rect">
+            <a:avLst/>
+          </a:prstGeom>
+          <a:noFill/>
+          <a:ln/>
+        </p:spPr>
+        <p:txBody>
+          <a:bodyPr wrap="square" lIns="0" tIns="0" rIns="0" bIns="0" rtlCol="0" anchor="ctr"/>
+          <a:lstStyle/>
+          <a:p>
+            <a:pPr algn="ctr" indent="0" marL="0">
+              <a:buNone/>
+            </a:pPr>
+            <a:r>
+              <a:rPr lang="en-US" sz="1100" b="1" dirty="0">
+                <a:solidFill>
+                  <a:srgbClr val="FFFFFF"/>
+                </a:solidFill>
+                <a:latin typeface="Georgia" pitchFamily="34" charset="0"/>
+                <a:ea typeface="Georgia" pitchFamily="34" charset="-122"/>
+                <a:cs typeface="Georgia" pitchFamily="34" charset="-120"/>
+              </a:rPr>
+              <a:t>Q2</a:t>
+            </a:r>
+            <a:endParaRPr lang="en-US" sz="1100" dirty="0"/>
+          </a:p>
+        </p:txBody>
+      </p:sp>
+      <p:pic>
+        <p:nvPicPr>
+          <p:cNvPr id="12" name="Image 2" descr="preencoded.png">    </p:cNvPr>
           <p:cNvPicPr>
             <a:picLocks noChangeAspect="1"/>
           </p:cNvPicPr>
@@ -3459,8 +3955,8 @@
         </p:blipFill>
         <p:spPr>
           <a:xfrm>
-            <a:off x="731520" y="228600"/>
-            <a:ext cx="365760" cy="365760"/>
+            <a:off x="1417320" y="2011680"/>
+            <a:ext cx="320040" cy="320040"/>
           </a:xfrm>
           <a:prstGeom prst="rect">
             <a:avLst/>
@@ -3469,14 +3965,14 @@
       </p:pic>
       <p:sp>
         <p:nvSpPr>
-          <p:cNvPr id="4" name="Text 1"/>
-          <p:cNvSpPr/>
-          <p:nvPr/>
-        </p:nvSpPr>
-        <p:spPr>
-          <a:xfrm>
-            <a:off x="1234440" y="228600"/>
-            <a:ext cx="7315200" cy="548640"/>
+          <p:cNvPr id="13" name="Text 8"/>
+          <p:cNvSpPr/>
+          <p:nvPr/>
+        </p:nvSpPr>
+        <p:spPr>
+          <a:xfrm>
+            <a:off x="1874520" y="1920240"/>
+            <a:ext cx="2286000" cy="320040"/>
           </a:xfrm>
           <a:prstGeom prst="rect">
             <a:avLst/>
@@ -3488,11 +3984,11 @@
           <a:bodyPr wrap="square" lIns="0" tIns="0" rIns="0" bIns="0" rtlCol="0" anchor="ctr"/>
           <a:lstStyle/>
           <a:p>
-            <a:pPr marL="0" indent="0">
-              <a:buNone/>
-            </a:pPr>
-            <a:r>
-              <a:rPr lang="en-US" sz="3400" b="1" dirty="0">
+            <a:pPr indent="0" marL="0">
+              <a:buNone/>
+            </a:pPr>
+            <a:r>
+              <a:rPr lang="en-US" sz="1400" b="1" dirty="0">
                 <a:solidFill>
                   <a:srgbClr val="1E2761"/>
                 </a:solidFill>
@@ -3500,41 +3996,80 @@
                 <a:ea typeface="Georgia" pitchFamily="34" charset="-122"/>
                 <a:cs typeface="Georgia" pitchFamily="34" charset="-120"/>
               </a:rPr>
-              <a:t>Recommended Next Steps</a:t>
-            </a:r>
-            <a:endParaRPr lang="en-US" sz="3400" dirty="0"/>
-          </a:p>
-        </p:txBody>
-      </p:sp>
-      <p:sp>
-        <p:nvSpPr>
-          <p:cNvPr id="5" name="Shape 2"/>
-          <p:cNvSpPr/>
-          <p:nvPr/>
-        </p:nvSpPr>
-        <p:spPr>
-          <a:xfrm>
-            <a:off x="731520" y="1051560"/>
+              <a:t>Integration &amp; Training</a:t>
+            </a:r>
+            <a:endParaRPr lang="en-US" sz="1400" dirty="0"/>
+          </a:p>
+        </p:txBody>
+      </p:sp>
+      <p:sp>
+        <p:nvSpPr>
+          <p:cNvPr id="14" name="Text 9"/>
+          <p:cNvSpPr/>
+          <p:nvPr/>
+        </p:nvSpPr>
+        <p:spPr>
+          <a:xfrm>
+            <a:off x="1874520" y="2240280"/>
+            <a:ext cx="6583680" cy="457200"/>
+          </a:xfrm>
+          <a:prstGeom prst="rect">
+            <a:avLst/>
+          </a:prstGeom>
+          <a:noFill/>
+          <a:ln/>
+        </p:spPr>
+        <p:txBody>
+          <a:bodyPr wrap="square" lIns="0" tIns="0" rIns="0" bIns="0" rtlCol="0" anchor="ctr"/>
+          <a:lstStyle/>
+          <a:p>
+            <a:pPr indent="0" marL="0">
+              <a:buNone/>
+            </a:pPr>
+            <a:r>
+              <a:rPr lang="en-US" sz="1100" dirty="0">
+                <a:solidFill>
+                  <a:srgbClr val="6C757D"/>
+                </a:solidFill>
+                <a:latin typeface="Calibri" pitchFamily="34" charset="0"/>
+                <a:ea typeface="Calibri" pitchFamily="34" charset="-122"/>
+                <a:cs typeface="Calibri" pitchFamily="34" charset="-120"/>
+              </a:rPr>
+              <a:t>Connect to HRIS data feeds. Train HR partners on interpreting risk scores.</a:t>
+            </a:r>
+            <a:endParaRPr lang="en-US" sz="1100" dirty="0"/>
+          </a:p>
+        </p:txBody>
+      </p:sp>
+      <p:sp>
+        <p:nvSpPr>
+          <p:cNvPr id="15" name="Shape 10"/>
+          <p:cNvSpPr/>
+          <p:nvPr/>
+        </p:nvSpPr>
+        <p:spPr>
+          <a:xfrm>
+            <a:off x="731520" y="2880360"/>
             <a:ext cx="502920" cy="502920"/>
           </a:xfrm>
           <a:prstGeom prst="ellipse">
             <a:avLst/>
           </a:prstGeom>
           <a:solidFill>
-            <a:srgbClr val="F96167"/>
+            <a:srgbClr val="1E2761"/>
           </a:solidFill>
           <a:ln/>
         </p:spPr>
       </p:sp>
       <p:sp>
         <p:nvSpPr>
-          <p:cNvPr id="6" name="Text 3"/>
-          <p:cNvSpPr/>
-          <p:nvPr/>
-        </p:nvSpPr>
-        <p:spPr>
-          <a:xfrm>
-            <a:off x="731520" y="1051560"/>
+          <p:cNvPr id="16" name="Text 11"/>
+          <p:cNvSpPr/>
+          <p:nvPr/>
+        </p:nvSpPr>
+        <p:spPr>
+          <a:xfrm>
+            <a:off x="731520" y="2880360"/>
             <a:ext cx="502920" cy="502920"/>
           </a:xfrm>
           <a:prstGeom prst="rect">
@@ -3547,7 +4082,7 @@
           <a:bodyPr wrap="square" lIns="0" tIns="0" rIns="0" bIns="0" rtlCol="0" anchor="ctr"/>
           <a:lstStyle/>
           <a:p>
-            <a:pPr marL="0" indent="0" algn="ctr">
+            <a:pPr algn="ctr" indent="0" marL="0">
               <a:buNone/>
             </a:pPr>
             <a:r>
@@ -3559,7 +4094,7 @@
                 <a:ea typeface="Georgia" pitchFamily="34" charset="-122"/>
                 <a:cs typeface="Georgia" pitchFamily="34" charset="-120"/>
               </a:rPr>
-              <a:t>Q1</a:t>
+              <a:t>Q3</a:t>
             </a:r>
             <a:endParaRPr lang="en-US" sz="1100" dirty="0"/>
           </a:p>
@@ -3567,7 +4102,7 @@
       </p:sp>
       <p:pic>
         <p:nvPicPr>
-          <p:cNvPr id="7" name="Image 1" descr="preencoded.png"/>
+          <p:cNvPr id="17" name="Image 3" descr="preencoded.png">    </p:cNvPr>
           <p:cNvPicPr>
             <a:picLocks noChangeAspect="1"/>
           </p:cNvPicPr>
@@ -3581,7 +4116,7 @@
         </p:blipFill>
         <p:spPr>
           <a:xfrm>
-            <a:off x="1417320" y="1097280"/>
+            <a:off x="1417320" y="2926080"/>
             <a:ext cx="320040" cy="320040"/>
           </a:xfrm>
           <a:prstGeom prst="rect">
@@ -3591,13 +4126,13 @@
       </p:pic>
       <p:sp>
         <p:nvSpPr>
-          <p:cNvPr id="8" name="Text 4"/>
-          <p:cNvSpPr/>
-          <p:nvPr/>
-        </p:nvSpPr>
-        <p:spPr>
-          <a:xfrm>
-            <a:off x="1874520" y="1005840"/>
+          <p:cNvPr id="18" name="Text 12"/>
+          <p:cNvSpPr/>
+          <p:nvPr/>
+        </p:nvSpPr>
+        <p:spPr>
+          <a:xfrm>
+            <a:off x="1874520" y="2834640"/>
             <a:ext cx="2286000" cy="320040"/>
           </a:xfrm>
           <a:prstGeom prst="rect">
@@ -3610,7 +4145,7 @@
           <a:bodyPr wrap="square" lIns="0" tIns="0" rIns="0" bIns="0" rtlCol="0" anchor="ctr"/>
           <a:lstStyle/>
           <a:p>
-            <a:pPr marL="0" indent="0">
+            <a:pPr indent="0" marL="0">
               <a:buNone/>
             </a:pPr>
             <a:r>
@@ -3622,7 +4157,7 @@
                 <a:ea typeface="Georgia" pitchFamily="34" charset="-122"/>
                 <a:cs typeface="Georgia" pitchFamily="34" charset="-120"/>
               </a:rPr>
-              <a:t>Pilot Programme</a:t>
+              <a:t>Full Rollout</a:t>
             </a:r>
             <a:endParaRPr lang="en-US" sz="1400" dirty="0"/>
           </a:p>
@@ -3630,13 +4165,13 @@
       </p:sp>
       <p:sp>
         <p:nvSpPr>
-          <p:cNvPr id="9" name="Text 5"/>
-          <p:cNvSpPr/>
-          <p:nvPr/>
-        </p:nvSpPr>
-        <p:spPr>
-          <a:xfrm>
-            <a:off x="1874520" y="1325880"/>
+          <p:cNvPr id="19" name="Text 13"/>
+          <p:cNvSpPr/>
+          <p:nvPr/>
+        </p:nvSpPr>
+        <p:spPr>
+          <a:xfrm>
+            <a:off x="1874520" y="3154680"/>
             <a:ext cx="6583680" cy="457200"/>
           </a:xfrm>
           <a:prstGeom prst="rect">
@@ -3649,7 +4184,7 @@
           <a:bodyPr wrap="square" lIns="0" tIns="0" rIns="0" bIns="0" rtlCol="0" anchor="ctr"/>
           <a:lstStyle/>
           <a:p>
-            <a:pPr marL="0" indent="0">
+            <a:pPr indent="0" marL="0">
               <a:buNone/>
             </a:pPr>
             <a:r>
@@ -3661,7 +4196,7 @@
                 <a:ea typeface="Calibri" pitchFamily="34" charset="-122"/>
                 <a:cs typeface="Calibri" pitchFamily="34" charset="-120"/>
               </a:rPr>
-              <a:t>Deploy with 2 volunteer departments (200 employees). Validate predictions against real outcomes.</a:t>
+              <a:t>Extend to all departments. Implement automated monthly retraining pipeline.</a:t>
             </a:r>
             <a:endParaRPr lang="en-US" sz="1100" dirty="0"/>
           </a:p>
@@ -3669,13 +4204,13 @@
       </p:sp>
       <p:sp>
         <p:nvSpPr>
-          <p:cNvPr id="10" name="Shape 6"/>
-          <p:cNvSpPr/>
-          <p:nvPr/>
-        </p:nvSpPr>
-        <p:spPr>
-          <a:xfrm>
-            <a:off x="731520" y="1965960"/>
+          <p:cNvPr id="20" name="Shape 14"/>
+          <p:cNvSpPr/>
+          <p:nvPr/>
+        </p:nvSpPr>
+        <p:spPr>
+          <a:xfrm>
+            <a:off x="731520" y="3794760"/>
             <a:ext cx="502920" cy="502920"/>
           </a:xfrm>
           <a:prstGeom prst="ellipse">
@@ -3689,13 +4224,13 @@
       </p:sp>
       <p:sp>
         <p:nvSpPr>
-          <p:cNvPr id="11" name="Text 7"/>
-          <p:cNvSpPr/>
-          <p:nvPr/>
-        </p:nvSpPr>
-        <p:spPr>
-          <a:xfrm>
-            <a:off x="731520" y="1965960"/>
+          <p:cNvPr id="21" name="Text 15"/>
+          <p:cNvSpPr/>
+          <p:nvPr/>
+        </p:nvSpPr>
+        <p:spPr>
+          <a:xfrm>
+            <a:off x="731520" y="3794760"/>
             <a:ext cx="502920" cy="502920"/>
           </a:xfrm>
           <a:prstGeom prst="rect">
@@ -3708,7 +4243,7 @@
           <a:bodyPr wrap="square" lIns="0" tIns="0" rIns="0" bIns="0" rtlCol="0" anchor="ctr"/>
           <a:lstStyle/>
           <a:p>
-            <a:pPr marL="0" indent="0" algn="ctr">
+            <a:pPr algn="ctr" indent="0" marL="0">
               <a:buNone/>
             </a:pPr>
             <a:r>
@@ -3720,7 +4255,7 @@
                 <a:ea typeface="Georgia" pitchFamily="34" charset="-122"/>
                 <a:cs typeface="Georgia" pitchFamily="34" charset="-120"/>
               </a:rPr>
-              <a:t>Q2</a:t>
+              <a:t>Q4</a:t>
             </a:r>
             <a:endParaRPr lang="en-US" sz="1100" dirty="0"/>
           </a:p>
@@ -3728,7 +4263,7 @@
       </p:sp>
       <p:pic>
         <p:nvPicPr>
-          <p:cNvPr id="12" name="Image 2" descr="preencoded.png"/>
+          <p:cNvPr id="22" name="Image 4" descr="preencoded.png">    </p:cNvPr>
           <p:cNvPicPr>
             <a:picLocks noChangeAspect="1"/>
           </p:cNvPicPr>
@@ -3742,7 +4277,7 @@
         </p:blipFill>
         <p:spPr>
           <a:xfrm>
-            <a:off x="1417320" y="2011680"/>
+            <a:off x="1417320" y="3840480"/>
             <a:ext cx="320040" cy="320040"/>
           </a:xfrm>
           <a:prstGeom prst="rect">
@@ -3752,13 +4287,13 @@
       </p:pic>
       <p:sp>
         <p:nvSpPr>
-          <p:cNvPr id="13" name="Text 8"/>
-          <p:cNvSpPr/>
-          <p:nvPr/>
-        </p:nvSpPr>
-        <p:spPr>
-          <a:xfrm>
-            <a:off x="1874520" y="1920240"/>
+          <p:cNvPr id="23" name="Text 16"/>
+          <p:cNvSpPr/>
+          <p:nvPr/>
+        </p:nvSpPr>
+        <p:spPr>
+          <a:xfrm>
+            <a:off x="1874520" y="3749040"/>
             <a:ext cx="2286000" cy="320040"/>
           </a:xfrm>
           <a:prstGeom prst="rect">
@@ -3771,7 +4306,7 @@
           <a:bodyPr wrap="square" lIns="0" tIns="0" rIns="0" bIns="0" rtlCol="0" anchor="ctr"/>
           <a:lstStyle/>
           <a:p>
-            <a:pPr marL="0" indent="0">
+            <a:pPr indent="0" marL="0">
               <a:buNone/>
             </a:pPr>
             <a:r>
@@ -3783,328 +4318,6 @@
                 <a:ea typeface="Georgia" pitchFamily="34" charset="-122"/>
                 <a:cs typeface="Georgia" pitchFamily="34" charset="-120"/>
               </a:rPr>
-              <a:t>Integration &amp; Training</a:t>
-            </a:r>
-            <a:endParaRPr lang="en-US" sz="1400" dirty="0"/>
-          </a:p>
-        </p:txBody>
-      </p:sp>
-      <p:sp>
-        <p:nvSpPr>
-          <p:cNvPr id="14" name="Text 9"/>
-          <p:cNvSpPr/>
-          <p:nvPr/>
-        </p:nvSpPr>
-        <p:spPr>
-          <a:xfrm>
-            <a:off x="1874520" y="2240280"/>
-            <a:ext cx="6583680" cy="457200"/>
-          </a:xfrm>
-          <a:prstGeom prst="rect">
-            <a:avLst/>
-          </a:prstGeom>
-          <a:noFill/>
-          <a:ln/>
-        </p:spPr>
-        <p:txBody>
-          <a:bodyPr wrap="square" lIns="0" tIns="0" rIns="0" bIns="0" rtlCol="0" anchor="ctr"/>
-          <a:lstStyle/>
-          <a:p>
-            <a:pPr marL="0" indent="0">
-              <a:buNone/>
-            </a:pPr>
-            <a:r>
-              <a:rPr lang="en-US" sz="1100" dirty="0">
-                <a:solidFill>
-                  <a:srgbClr val="6C757D"/>
-                </a:solidFill>
-                <a:latin typeface="Calibri" pitchFamily="34" charset="0"/>
-                <a:ea typeface="Calibri" pitchFamily="34" charset="-122"/>
-                <a:cs typeface="Calibri" pitchFamily="34" charset="-120"/>
-              </a:rPr>
-              <a:t>Connect to HRIS data feeds. Train HR partners on interpreting risk scores.</a:t>
-            </a:r>
-            <a:endParaRPr lang="en-US" sz="1100" dirty="0"/>
-          </a:p>
-        </p:txBody>
-      </p:sp>
-      <p:sp>
-        <p:nvSpPr>
-          <p:cNvPr id="15" name="Shape 10"/>
-          <p:cNvSpPr/>
-          <p:nvPr/>
-        </p:nvSpPr>
-        <p:spPr>
-          <a:xfrm>
-            <a:off x="731520" y="2880360"/>
-            <a:ext cx="502920" cy="502920"/>
-          </a:xfrm>
-          <a:prstGeom prst="ellipse">
-            <a:avLst/>
-          </a:prstGeom>
-          <a:solidFill>
-            <a:srgbClr val="1E2761"/>
-          </a:solidFill>
-          <a:ln/>
-        </p:spPr>
-      </p:sp>
-      <p:sp>
-        <p:nvSpPr>
-          <p:cNvPr id="16" name="Text 11"/>
-          <p:cNvSpPr/>
-          <p:nvPr/>
-        </p:nvSpPr>
-        <p:spPr>
-          <a:xfrm>
-            <a:off x="731520" y="2880360"/>
-            <a:ext cx="502920" cy="502920"/>
-          </a:xfrm>
-          <a:prstGeom prst="rect">
-            <a:avLst/>
-          </a:prstGeom>
-          <a:noFill/>
-          <a:ln/>
-        </p:spPr>
-        <p:txBody>
-          <a:bodyPr wrap="square" lIns="0" tIns="0" rIns="0" bIns="0" rtlCol="0" anchor="ctr"/>
-          <a:lstStyle/>
-          <a:p>
-            <a:pPr marL="0" indent="0" algn="ctr">
-              <a:buNone/>
-            </a:pPr>
-            <a:r>
-              <a:rPr lang="en-US" sz="1100" b="1" dirty="0">
-                <a:solidFill>
-                  <a:srgbClr val="FFFFFF"/>
-                </a:solidFill>
-                <a:latin typeface="Georgia" pitchFamily="34" charset="0"/>
-                <a:ea typeface="Georgia" pitchFamily="34" charset="-122"/>
-                <a:cs typeface="Georgia" pitchFamily="34" charset="-120"/>
-              </a:rPr>
-              <a:t>Q3</a:t>
-            </a:r>
-            <a:endParaRPr lang="en-US" sz="1100" dirty="0"/>
-          </a:p>
-        </p:txBody>
-      </p:sp>
-      <p:pic>
-        <p:nvPicPr>
-          <p:cNvPr id="17" name="Image 3" descr="preencoded.png"/>
-          <p:cNvPicPr>
-            <a:picLocks noChangeAspect="1"/>
-          </p:cNvPicPr>
-          <p:nvPr/>
-        </p:nvPicPr>
-        <p:blipFill>
-          <a:blip r:embed="rId6"/>
-          <a:stretch>
-            <a:fillRect/>
-          </a:stretch>
-        </p:blipFill>
-        <p:spPr>
-          <a:xfrm>
-            <a:off x="1417320" y="2926080"/>
-            <a:ext cx="320040" cy="320040"/>
-          </a:xfrm>
-          <a:prstGeom prst="rect">
-            <a:avLst/>
-          </a:prstGeom>
-        </p:spPr>
-      </p:pic>
-      <p:sp>
-        <p:nvSpPr>
-          <p:cNvPr id="18" name="Text 12"/>
-          <p:cNvSpPr/>
-          <p:nvPr/>
-        </p:nvSpPr>
-        <p:spPr>
-          <a:xfrm>
-            <a:off x="1874520" y="2834640"/>
-            <a:ext cx="2286000" cy="320040"/>
-          </a:xfrm>
-          <a:prstGeom prst="rect">
-            <a:avLst/>
-          </a:prstGeom>
-          <a:noFill/>
-          <a:ln/>
-        </p:spPr>
-        <p:txBody>
-          <a:bodyPr wrap="square" lIns="0" tIns="0" rIns="0" bIns="0" rtlCol="0" anchor="ctr"/>
-          <a:lstStyle/>
-          <a:p>
-            <a:pPr marL="0" indent="0">
-              <a:buNone/>
-            </a:pPr>
-            <a:r>
-              <a:rPr lang="en-US" sz="1400" b="1" dirty="0">
-                <a:solidFill>
-                  <a:srgbClr val="1E2761"/>
-                </a:solidFill>
-                <a:latin typeface="Georgia" pitchFamily="34" charset="0"/>
-                <a:ea typeface="Georgia" pitchFamily="34" charset="-122"/>
-                <a:cs typeface="Georgia" pitchFamily="34" charset="-120"/>
-              </a:rPr>
-              <a:t>Full Rollout</a:t>
-            </a:r>
-            <a:endParaRPr lang="en-US" sz="1400" dirty="0"/>
-          </a:p>
-        </p:txBody>
-      </p:sp>
-      <p:sp>
-        <p:nvSpPr>
-          <p:cNvPr id="19" name="Text 13"/>
-          <p:cNvSpPr/>
-          <p:nvPr/>
-        </p:nvSpPr>
-        <p:spPr>
-          <a:xfrm>
-            <a:off x="1874520" y="3154680"/>
-            <a:ext cx="6583680" cy="457200"/>
-          </a:xfrm>
-          <a:prstGeom prst="rect">
-            <a:avLst/>
-          </a:prstGeom>
-          <a:noFill/>
-          <a:ln/>
-        </p:spPr>
-        <p:txBody>
-          <a:bodyPr wrap="square" lIns="0" tIns="0" rIns="0" bIns="0" rtlCol="0" anchor="ctr"/>
-          <a:lstStyle/>
-          <a:p>
-            <a:pPr marL="0" indent="0">
-              <a:buNone/>
-            </a:pPr>
-            <a:r>
-              <a:rPr lang="en-US" sz="1100" dirty="0">
-                <a:solidFill>
-                  <a:srgbClr val="6C757D"/>
-                </a:solidFill>
-                <a:latin typeface="Calibri" pitchFamily="34" charset="0"/>
-                <a:ea typeface="Calibri" pitchFamily="34" charset="-122"/>
-                <a:cs typeface="Calibri" pitchFamily="34" charset="-120"/>
-              </a:rPr>
-              <a:t>Extend to all departments. Implement automated monthly retraining pipeline.</a:t>
-            </a:r>
-            <a:endParaRPr lang="en-US" sz="1100" dirty="0"/>
-          </a:p>
-        </p:txBody>
-      </p:sp>
-      <p:sp>
-        <p:nvSpPr>
-          <p:cNvPr id="20" name="Shape 14"/>
-          <p:cNvSpPr/>
-          <p:nvPr/>
-        </p:nvSpPr>
-        <p:spPr>
-          <a:xfrm>
-            <a:off x="731520" y="3794760"/>
-            <a:ext cx="502920" cy="502920"/>
-          </a:xfrm>
-          <a:prstGeom prst="ellipse">
-            <a:avLst/>
-          </a:prstGeom>
-          <a:solidFill>
-            <a:srgbClr val="1E2761"/>
-          </a:solidFill>
-          <a:ln/>
-        </p:spPr>
-      </p:sp>
-      <p:sp>
-        <p:nvSpPr>
-          <p:cNvPr id="21" name="Text 15"/>
-          <p:cNvSpPr/>
-          <p:nvPr/>
-        </p:nvSpPr>
-        <p:spPr>
-          <a:xfrm>
-            <a:off x="731520" y="3794760"/>
-            <a:ext cx="502920" cy="502920"/>
-          </a:xfrm>
-          <a:prstGeom prst="rect">
-            <a:avLst/>
-          </a:prstGeom>
-          <a:noFill/>
-          <a:ln/>
-        </p:spPr>
-        <p:txBody>
-          <a:bodyPr wrap="square" lIns="0" tIns="0" rIns="0" bIns="0" rtlCol="0" anchor="ctr"/>
-          <a:lstStyle/>
-          <a:p>
-            <a:pPr marL="0" indent="0" algn="ctr">
-              <a:buNone/>
-            </a:pPr>
-            <a:r>
-              <a:rPr lang="en-US" sz="1100" b="1" dirty="0">
-                <a:solidFill>
-                  <a:srgbClr val="FFFFFF"/>
-                </a:solidFill>
-                <a:latin typeface="Georgia" pitchFamily="34" charset="0"/>
-                <a:ea typeface="Georgia" pitchFamily="34" charset="-122"/>
-                <a:cs typeface="Georgia" pitchFamily="34" charset="-120"/>
-              </a:rPr>
-              <a:t>Q4</a:t>
-            </a:r>
-            <a:endParaRPr lang="en-US" sz="1100" dirty="0"/>
-          </a:p>
-        </p:txBody>
-      </p:sp>
-      <p:pic>
-        <p:nvPicPr>
-          <p:cNvPr id="22" name="Image 4" descr="preencoded.png"/>
-          <p:cNvPicPr>
-            <a:picLocks noChangeAspect="1"/>
-          </p:cNvPicPr>
-          <p:nvPr/>
-        </p:nvPicPr>
-        <p:blipFill>
-          <a:blip r:embed="rId7"/>
-          <a:stretch>
-            <a:fillRect/>
-          </a:stretch>
-        </p:blipFill>
-        <p:spPr>
-          <a:xfrm>
-            <a:off x="1417320" y="3840480"/>
-            <a:ext cx="320040" cy="320040"/>
-          </a:xfrm>
-          <a:prstGeom prst="rect">
-            <a:avLst/>
-          </a:prstGeom>
-        </p:spPr>
-      </p:pic>
-      <p:sp>
-        <p:nvSpPr>
-          <p:cNvPr id="23" name="Text 16"/>
-          <p:cNvSpPr/>
-          <p:nvPr/>
-        </p:nvSpPr>
-        <p:spPr>
-          <a:xfrm>
-            <a:off x="1874520" y="3749040"/>
-            <a:ext cx="2286000" cy="320040"/>
-          </a:xfrm>
-          <a:prstGeom prst="rect">
-            <a:avLst/>
-          </a:prstGeom>
-          <a:noFill/>
-          <a:ln/>
-        </p:spPr>
-        <p:txBody>
-          <a:bodyPr wrap="square" lIns="0" tIns="0" rIns="0" bIns="0" rtlCol="0" anchor="ctr"/>
-          <a:lstStyle/>
-          <a:p>
-            <a:pPr marL="0" indent="0">
-              <a:buNone/>
-            </a:pPr>
-            <a:r>
-              <a:rPr lang="en-US" sz="1400" b="1" dirty="0">
-                <a:solidFill>
-                  <a:srgbClr val="1E2761"/>
-                </a:solidFill>
-                <a:latin typeface="Georgia" pitchFamily="34" charset="0"/>
-                <a:ea typeface="Georgia" pitchFamily="34" charset="-122"/>
-                <a:cs typeface="Georgia" pitchFamily="34" charset="-120"/>
-              </a:rPr>
               <a:t>Impact Assessment</a:t>
             </a:r>
             <a:endParaRPr lang="en-US" sz="1400" dirty="0"/>
@@ -4132,7 +4345,7 @@
           <a:bodyPr wrap="square" lIns="0" tIns="0" rIns="0" bIns="0" rtlCol="0" anchor="ctr"/>
           <a:lstStyle/>
           <a:p>
-            <a:pPr marL="0" indent="0">
+            <a:pPr indent="0" marL="0">
               <a:buNone/>
             </a:pPr>
             <a:r>
@@ -4166,7 +4379,6 @@
         <a:solidFill>
           <a:srgbClr val="1E2761"/>
         </a:solidFill>
-        <a:effectLst/>
       </p:bgPr>
     </p:bg>
     <p:spTree>
@@ -4225,14 +4437,14 @@
       </p:sp>
       <p:pic>
         <p:nvPicPr>
-          <p:cNvPr id="4" name="Image 0" descr="preencoded.png"/>
+          <p:cNvPr id="4" name="Image 0" descr="preencoded.png">    </p:cNvPr>
           <p:cNvPicPr>
             <a:picLocks noChangeAspect="1"/>
           </p:cNvPicPr>
           <p:nvPr/>
         </p:nvPicPr>
         <p:blipFill>
-          <a:blip r:embed="rId3"/>
+          <a:blip r:embed="rId1"/>
           <a:stretch>
             <a:fillRect/>
           </a:stretch>
@@ -4268,7 +4480,7 @@
           <a:bodyPr wrap="square" lIns="0" tIns="0" rIns="0" bIns="0" rtlCol="0" anchor="ctr"/>
           <a:lstStyle/>
           <a:p>
-            <a:pPr marL="0" indent="0" algn="ctr">
+            <a:pPr algn="ctr" indent="0" marL="0">
               <a:buNone/>
             </a:pPr>
             <a:r>
@@ -4307,7 +4519,7 @@
           <a:bodyPr wrap="square" lIns="0" tIns="0" rIns="0" bIns="0" rtlCol="0" anchor="ctr"/>
           <a:lstStyle/>
           <a:p>
-            <a:pPr marL="0" indent="0" algn="ctr">
+            <a:pPr algn="ctr" indent="0" marL="0">
               <a:buNone/>
             </a:pPr>
             <a:r>
@@ -4346,7 +4558,7 @@
           <a:bodyPr wrap="square" lIns="0" tIns="0" rIns="0" bIns="0" rtlCol="0" anchor="ctr"/>
           <a:lstStyle/>
           <a:p>
-            <a:pPr marL="0" indent="0" algn="ctr">
+            <a:pPr algn="ctr" indent="0" marL="0">
               <a:buNone/>
             </a:pPr>
             <a:r>
@@ -4380,7 +4592,6 @@
         <a:solidFill>
           <a:srgbClr val="F8F9FA"/>
         </a:solidFill>
-        <a:effectLst/>
       </p:bgPr>
     </p:bg>
     <p:spTree>
@@ -4419,14 +4630,14 @@
       </p:sp>
       <p:pic>
         <p:nvPicPr>
-          <p:cNvPr id="3" name="Image 0" descr="preencoded.png"/>
+          <p:cNvPr id="3" name="Image 0" descr="preencoded.png">    </p:cNvPr>
           <p:cNvPicPr>
             <a:picLocks noChangeAspect="1"/>
           </p:cNvPicPr>
           <p:nvPr/>
         </p:nvPicPr>
         <p:blipFill>
-          <a:blip r:embed="rId3"/>
+          <a:blip r:embed="rId1"/>
           <a:stretch>
             <a:fillRect/>
           </a:stretch>
@@ -4462,7 +4673,7 @@
           <a:bodyPr wrap="square" lIns="0" tIns="0" rIns="0" bIns="0" rtlCol="0" anchor="ctr"/>
           <a:lstStyle/>
           <a:p>
-            <a:pPr marL="0" indent="0">
+            <a:pPr indent="0" marL="0">
               <a:buNone/>
             </a:pPr>
             <a:r>
@@ -4501,7 +4712,7 @@
           <a:bodyPr wrap="square" lIns="0" tIns="0" rIns="0" bIns="0" rtlCol="0" anchor="ctr"/>
           <a:lstStyle/>
           <a:p>
-            <a:pPr marL="0" indent="0">
+            <a:pPr indent="0" marL="0">
               <a:buNone/>
             </a:pPr>
             <a:r>
@@ -4521,14 +4732,14 @@
       </p:sp>
       <p:pic>
         <p:nvPicPr>
-          <p:cNvPr id="6" name="Image 1" descr="preencoded.png"/>
+          <p:cNvPr id="6" name="Image 1" descr="preencoded.png">    </p:cNvPr>
           <p:cNvPicPr>
             <a:picLocks noChangeAspect="1"/>
           </p:cNvPicPr>
           <p:nvPr/>
         </p:nvPicPr>
         <p:blipFill>
-          <a:blip r:embed="rId4"/>
+          <a:blip r:embed="rId2"/>
           <a:stretch>
             <a:fillRect/>
           </a:stretch>
@@ -4562,7 +4773,7 @@
           </a:solidFill>
           <a:ln/>
           <a:effectLst>
-            <a:outerShdw blurRad="76200" dist="25400" dir="8100000" algn="bl" rotWithShape="0">
+            <a:outerShdw sx="100000" sy="100000" kx="0" ky="0" algn="bl" rotWithShape="0" blurRad="76200" dist="25400" dir="8100000">
               <a:srgbClr val="000000">
                 <a:alpha val="12000"/>
               </a:srgbClr>
@@ -4611,7 +4822,7 @@
           <a:bodyPr wrap="square" lIns="0" tIns="0" rIns="0" bIns="0" rtlCol="0" anchor="ctr"/>
           <a:lstStyle/>
           <a:p>
-            <a:pPr marL="0" indent="0" algn="ctr">
+            <a:pPr algn="ctr" indent="0" marL="0">
               <a:buNone/>
             </a:pPr>
             <a:r>
@@ -4650,7 +4861,7 @@
           <a:bodyPr wrap="square" lIns="0" tIns="0" rIns="0" bIns="0" rtlCol="0" anchor="ctr"/>
           <a:lstStyle/>
           <a:p>
-            <a:pPr marL="0" indent="0" algn="ctr">
+            <a:pPr algn="ctr" indent="0" marL="0">
               <a:buNone/>
             </a:pPr>
             <a:r>
@@ -4667,7 +4878,7 @@
             <a:endParaRPr lang="en-US" sz="1100" dirty="0"/>
           </a:p>
           <a:p>
-            <a:pPr marL="0" indent="0" algn="ctr">
+            <a:pPr algn="ctr" indent="0" marL="0">
               <a:buNone/>
             </a:pPr>
             <a:r>
@@ -4704,7 +4915,7 @@
           </a:solidFill>
           <a:ln/>
           <a:effectLst>
-            <a:outerShdw blurRad="76200" dist="25400" dir="8100000" algn="bl" rotWithShape="0">
+            <a:outerShdw sx="100000" sy="100000" kx="0" ky="0" algn="bl" rotWithShape="0" blurRad="76200" dist="25400" dir="8100000">
               <a:srgbClr val="000000">
                 <a:alpha val="12000"/>
               </a:srgbClr>
@@ -4753,7 +4964,7 @@
           <a:bodyPr wrap="square" lIns="0" tIns="0" rIns="0" bIns="0" rtlCol="0" anchor="ctr"/>
           <a:lstStyle/>
           <a:p>
-            <a:pPr marL="0" indent="0" algn="ctr">
+            <a:pPr algn="ctr" indent="0" marL="0">
               <a:buNone/>
             </a:pPr>
             <a:r>
@@ -4792,7 +5003,7 @@
           <a:bodyPr wrap="square" lIns="0" tIns="0" rIns="0" bIns="0" rtlCol="0" anchor="ctr"/>
           <a:lstStyle/>
           <a:p>
-            <a:pPr marL="0" indent="0" algn="ctr">
+            <a:pPr algn="ctr" indent="0" marL="0">
               <a:buNone/>
             </a:pPr>
             <a:r>
@@ -4809,7 +5020,7 @@
             <a:endParaRPr lang="en-US" sz="1100" dirty="0"/>
           </a:p>
           <a:p>
-            <a:pPr marL="0" indent="0" algn="ctr">
+            <a:pPr algn="ctr" indent="0" marL="0">
               <a:buNone/>
             </a:pPr>
             <a:r>
@@ -4846,7 +5057,7 @@
           </a:solidFill>
           <a:ln/>
           <a:effectLst>
-            <a:outerShdw blurRad="76200" dist="25400" dir="8100000" algn="bl" rotWithShape="0">
+            <a:outerShdw sx="100000" sy="100000" kx="0" ky="0" algn="bl" rotWithShape="0" blurRad="76200" dist="25400" dir="8100000">
               <a:srgbClr val="000000">
                 <a:alpha val="12000"/>
               </a:srgbClr>
@@ -4895,7 +5106,7 @@
           <a:bodyPr wrap="square" lIns="0" tIns="0" rIns="0" bIns="0" rtlCol="0" anchor="ctr"/>
           <a:lstStyle/>
           <a:p>
-            <a:pPr marL="0" indent="0" algn="ctr">
+            <a:pPr algn="ctr" indent="0" marL="0">
               <a:buNone/>
             </a:pPr>
             <a:r>
@@ -4934,7 +5145,7 @@
           <a:bodyPr wrap="square" lIns="0" tIns="0" rIns="0" bIns="0" rtlCol="0" anchor="ctr"/>
           <a:lstStyle/>
           <a:p>
-            <a:pPr marL="0" indent="0" algn="ctr">
+            <a:pPr algn="ctr" indent="0" marL="0">
               <a:buNone/>
             </a:pPr>
             <a:r>
@@ -4951,7 +5162,7 @@
             <a:endParaRPr lang="en-US" sz="1100" dirty="0"/>
           </a:p>
           <a:p>
-            <a:pPr marL="0" indent="0" algn="ctr">
+            <a:pPr algn="ctr" indent="0" marL="0">
               <a:buNone/>
             </a:pPr>
             <a:r>
@@ -4990,7 +5201,7 @@
           <a:bodyPr wrap="square" lIns="0" tIns="0" rIns="0" bIns="0" rtlCol="0" anchor="ctr"/>
           <a:lstStyle/>
           <a:p>
-            <a:pPr marL="0" indent="0">
+            <a:pPr indent="0" marL="0">
               <a:buNone/>
             </a:pPr>
             <a:r>
@@ -5024,7 +5235,6 @@
         <a:solidFill>
           <a:srgbClr val="FFFFFF"/>
         </a:solidFill>
-        <a:effectLst/>
       </p:bgPr>
     </p:bg>
     <p:spTree>
@@ -5063,7 +5273,180 @@
       </p:sp>
       <p:pic>
         <p:nvPicPr>
-          <p:cNvPr id="3" name="Image 0" descr="preencoded.png"/>
+          <p:cNvPr id="3" name="Image 0" descr="preencoded.png">    </p:cNvPr>
+          <p:cNvPicPr>
+            <a:picLocks noChangeAspect="1"/>
+          </p:cNvPicPr>
+          <p:nvPr/>
+        </p:nvPicPr>
+        <p:blipFill>
+          <a:blip r:embed="rId1"/>
+          <a:stretch>
+            <a:fillRect/>
+          </a:stretch>
+        </p:blipFill>
+        <p:spPr>
+          <a:xfrm>
+            <a:off x="731520" y="228600"/>
+            <a:ext cx="411480" cy="411480"/>
+          </a:xfrm>
+          <a:prstGeom prst="rect">
+            <a:avLst/>
+          </a:prstGeom>
+        </p:spPr>
+      </p:pic>
+      <p:sp>
+        <p:nvSpPr>
+          <p:cNvPr id="4" name="Text 1"/>
+          <p:cNvSpPr/>
+          <p:nvPr/>
+        </p:nvSpPr>
+        <p:spPr>
+          <a:xfrm>
+            <a:off x="1280160" y="228600"/>
+            <a:ext cx="5029200" cy="548640"/>
+          </a:xfrm>
+          <a:prstGeom prst="rect">
+            <a:avLst/>
+          </a:prstGeom>
+          <a:noFill/>
+          <a:ln/>
+        </p:spPr>
+        <p:txBody>
+          <a:bodyPr wrap="square" lIns="0" tIns="0" rIns="0" bIns="0" rtlCol="0" anchor="ctr"/>
+          <a:lstStyle/>
+          <a:p>
+            <a:pPr indent="0" marL="0">
+              <a:buNone/>
+            </a:pPr>
+            <a:r>
+              <a:rPr lang="en-US" sz="2800" b="1" dirty="0">
+                <a:solidFill>
+                  <a:srgbClr val="1E2761"/>
+                </a:solidFill>
+                <a:latin typeface="Georgia" pitchFamily="34" charset="0"/>
+                <a:ea typeface="Georgia" pitchFamily="34" charset="-122"/>
+                <a:cs typeface="Georgia" pitchFamily="34" charset="-120"/>
+              </a:rPr>
+              <a:t>Our Solution: WorkPulse</a:t>
+            </a:r>
+            <a:endParaRPr lang="en-US" sz="2800" dirty="0"/>
+          </a:p>
+        </p:txBody>
+      </p:sp>
+      <p:pic>
+        <p:nvPicPr>
+          <p:cNvPr id="5" name="Image 1" descr="preencoded.png">    </p:cNvPr>
+          <p:cNvPicPr>
+            <a:picLocks noChangeAspect="1"/>
+          </p:cNvPicPr>
+          <p:nvPr/>
+        </p:nvPicPr>
+        <p:blipFill>
+          <a:blip r:embed="rId2"/>
+          <a:stretch>
+            <a:fillRect/>
+          </a:stretch>
+        </p:blipFill>
+        <p:spPr>
+          <a:xfrm>
+            <a:off x="6583680" y="91440"/>
+            <a:ext cx="2011680" cy="2011680"/>
+          </a:xfrm>
+          <a:prstGeom prst="rect">
+            <a:avLst/>
+          </a:prstGeom>
+        </p:spPr>
+      </p:pic>
+      <p:sp>
+        <p:nvSpPr>
+          <p:cNvPr id="6" name="Text 2"/>
+          <p:cNvSpPr/>
+          <p:nvPr/>
+        </p:nvSpPr>
+        <p:spPr>
+          <a:xfrm>
+            <a:off x="731520" y="822960"/>
+            <a:ext cx="5303520" cy="457200"/>
+          </a:xfrm>
+          <a:prstGeom prst="rect">
+            <a:avLst/>
+          </a:prstGeom>
+          <a:noFill/>
+          <a:ln/>
+        </p:spPr>
+        <p:txBody>
+          <a:bodyPr wrap="square" lIns="0" tIns="0" rIns="0" bIns="0" rtlCol="0" anchor="ctr"/>
+          <a:lstStyle/>
+          <a:p>
+            <a:pPr indent="0" marL="0">
+              <a:buNone/>
+            </a:pPr>
+            <a:r>
+              <a:rPr lang="en-US" sz="1300" dirty="0">
+                <a:solidFill>
+                  <a:srgbClr val="6C757D"/>
+                </a:solidFill>
+                <a:latin typeface="Calibri" pitchFamily="34" charset="0"/>
+                <a:ea typeface="Calibri" pitchFamily="34" charset="-122"/>
+                <a:cs typeface="Calibri" pitchFamily="34" charset="-120"/>
+              </a:rPr>
+              <a:t>A machine learning system that predicts burnout risk before it leads to attrition — enabling proactive, targeted HR interventions.</a:t>
+            </a:r>
+            <a:endParaRPr lang="en-US" sz="1300" dirty="0"/>
+          </a:p>
+        </p:txBody>
+      </p:sp>
+      <p:sp>
+        <p:nvSpPr>
+          <p:cNvPr id="7" name="Shape 3"/>
+          <p:cNvSpPr/>
+          <p:nvPr/>
+        </p:nvSpPr>
+        <p:spPr>
+          <a:xfrm>
+            <a:off x="731520" y="1554480"/>
+            <a:ext cx="3657600" cy="1188720"/>
+          </a:xfrm>
+          <a:prstGeom prst="rect">
+            <a:avLst/>
+          </a:prstGeom>
+          <a:solidFill>
+            <a:srgbClr val="F8F9FA"/>
+          </a:solidFill>
+          <a:ln/>
+          <a:effectLst>
+            <a:outerShdw sx="100000" sy="100000" kx="0" ky="0" algn="bl" rotWithShape="0" blurRad="76200" dist="25400" dir="8100000">
+              <a:srgbClr val="000000">
+                <a:alpha val="12000"/>
+              </a:srgbClr>
+            </a:outerShdw>
+          </a:effectLst>
+        </p:spPr>
+      </p:sp>
+      <p:sp>
+        <p:nvSpPr>
+          <p:cNvPr id="8" name="Shape 4"/>
+          <p:cNvSpPr/>
+          <p:nvPr/>
+        </p:nvSpPr>
+        <p:spPr>
+          <a:xfrm>
+            <a:off x="731520" y="1554480"/>
+            <a:ext cx="54864" cy="1188720"/>
+          </a:xfrm>
+          <a:prstGeom prst="rect">
+            <a:avLst/>
+          </a:prstGeom>
+          <a:solidFill>
+            <a:srgbClr val="F96167"/>
+          </a:solidFill>
+          <a:ln/>
+        </p:spPr>
+      </p:sp>
+      <p:pic>
+        <p:nvPicPr>
+          <p:cNvPr id="9" name="Image 2" descr="preencoded.png">    </p:cNvPr>
           <p:cNvPicPr>
             <a:picLocks noChangeAspect="1"/>
           </p:cNvPicPr>
@@ -5077,8 +5460,8 @@
         </p:blipFill>
         <p:spPr>
           <a:xfrm>
-            <a:off x="731520" y="228600"/>
-            <a:ext cx="411480" cy="411480"/>
+            <a:off x="914400" y="1691640"/>
+            <a:ext cx="320040" cy="320040"/>
           </a:xfrm>
           <a:prstGeom prst="rect">
             <a:avLst/>
@@ -5087,14 +5470,14 @@
       </p:pic>
       <p:sp>
         <p:nvSpPr>
-          <p:cNvPr id="4" name="Text 1"/>
-          <p:cNvSpPr/>
-          <p:nvPr/>
-        </p:nvSpPr>
-        <p:spPr>
-          <a:xfrm>
-            <a:off x="1280160" y="228600"/>
-            <a:ext cx="5029200" cy="548640"/>
+          <p:cNvPr id="10" name="Text 5"/>
+          <p:cNvSpPr/>
+          <p:nvPr/>
+        </p:nvSpPr>
+        <p:spPr>
+          <a:xfrm>
+            <a:off x="1325880" y="1664208"/>
+            <a:ext cx="2834640" cy="365760"/>
           </a:xfrm>
           <a:prstGeom prst="rect">
             <a:avLst/>
@@ -5106,11 +5489,11 @@
           <a:bodyPr wrap="square" lIns="0" tIns="0" rIns="0" bIns="0" rtlCol="0" anchor="ctr"/>
           <a:lstStyle/>
           <a:p>
-            <a:pPr marL="0" indent="0">
-              <a:buNone/>
-            </a:pPr>
-            <a:r>
-              <a:rPr lang="en-US" sz="2800" b="1" dirty="0">
+            <a:pPr indent="0" marL="0">
+              <a:buNone/>
+            </a:pPr>
+            <a:r>
+              <a:rPr lang="en-US" sz="1500" b="1" dirty="0">
                 <a:solidFill>
                   <a:srgbClr val="1E2761"/>
                 </a:solidFill>
@@ -5118,15 +5501,101 @@
                 <a:ea typeface="Georgia" pitchFamily="34" charset="-122"/>
                 <a:cs typeface="Georgia" pitchFamily="34" charset="-120"/>
               </a:rPr>
-              <a:t>Our Solution: WorkPulse</a:t>
-            </a:r>
-            <a:endParaRPr lang="en-US" sz="2800" dirty="0"/>
-          </a:p>
-        </p:txBody>
+              <a:t>Early Detection</a:t>
+            </a:r>
+            <a:endParaRPr lang="en-US" sz="1500" dirty="0"/>
+          </a:p>
+        </p:txBody>
+      </p:sp>
+      <p:sp>
+        <p:nvSpPr>
+          <p:cNvPr id="11" name="Text 6"/>
+          <p:cNvSpPr/>
+          <p:nvPr/>
+        </p:nvSpPr>
+        <p:spPr>
+          <a:xfrm>
+            <a:off x="960120" y="2103120"/>
+            <a:ext cx="3200400" cy="502920"/>
+          </a:xfrm>
+          <a:prstGeom prst="rect">
+            <a:avLst/>
+          </a:prstGeom>
+          <a:noFill/>
+          <a:ln/>
+        </p:spPr>
+        <p:txBody>
+          <a:bodyPr wrap="square" lIns="0" tIns="0" rIns="0" bIns="0" rtlCol="0" anchor="ctr"/>
+          <a:lstStyle/>
+          <a:p>
+            <a:pPr indent="0" marL="0">
+              <a:buNone/>
+            </a:pPr>
+            <a:r>
+              <a:rPr lang="en-US" sz="1100" dirty="0">
+                <a:solidFill>
+                  <a:srgbClr val="6C757D"/>
+                </a:solidFill>
+                <a:latin typeface="Calibri" pitchFamily="34" charset="0"/>
+                <a:ea typeface="Calibri" pitchFamily="34" charset="-122"/>
+                <a:cs typeface="Calibri" pitchFamily="34" charset="-120"/>
+              </a:rPr>
+              <a:t>Flags at-risk employees weeks before symptoms escalate</a:t>
+            </a:r>
+            <a:endParaRPr lang="en-US" sz="1100" dirty="0"/>
+          </a:p>
+        </p:txBody>
+      </p:sp>
+      <p:sp>
+        <p:nvSpPr>
+          <p:cNvPr id="12" name="Shape 7"/>
+          <p:cNvSpPr/>
+          <p:nvPr/>
+        </p:nvSpPr>
+        <p:spPr>
+          <a:xfrm>
+            <a:off x="4846320" y="1554480"/>
+            <a:ext cx="3657600" cy="1188720"/>
+          </a:xfrm>
+          <a:prstGeom prst="rect">
+            <a:avLst/>
+          </a:prstGeom>
+          <a:solidFill>
+            <a:srgbClr val="F8F9FA"/>
+          </a:solidFill>
+          <a:ln/>
+          <a:effectLst>
+            <a:outerShdw sx="100000" sy="100000" kx="0" ky="0" algn="bl" rotWithShape="0" blurRad="76200" dist="25400" dir="8100000">
+              <a:srgbClr val="000000">
+                <a:alpha val="12000"/>
+              </a:srgbClr>
+            </a:outerShdw>
+          </a:effectLst>
+        </p:spPr>
+      </p:sp>
+      <p:sp>
+        <p:nvSpPr>
+          <p:cNvPr id="13" name="Shape 8"/>
+          <p:cNvSpPr/>
+          <p:nvPr/>
+        </p:nvSpPr>
+        <p:spPr>
+          <a:xfrm>
+            <a:off x="4846320" y="1554480"/>
+            <a:ext cx="54864" cy="1188720"/>
+          </a:xfrm>
+          <a:prstGeom prst="rect">
+            <a:avLst/>
+          </a:prstGeom>
+          <a:solidFill>
+            <a:srgbClr val="F96167"/>
+          </a:solidFill>
+          <a:ln/>
+        </p:spPr>
       </p:sp>
       <p:pic>
         <p:nvPicPr>
-          <p:cNvPr id="5" name="Image 1" descr="preencoded.png"/>
+          <p:cNvPr id="14" name="Image 3" descr="preencoded.png">    </p:cNvPr>
           <p:cNvPicPr>
             <a:picLocks noChangeAspect="1"/>
           </p:cNvPicPr>
@@ -5140,8 +5609,8 @@
         </p:blipFill>
         <p:spPr>
           <a:xfrm>
-            <a:off x="6583680" y="91440"/>
-            <a:ext cx="2011680" cy="2011680"/>
+            <a:off x="5029200" y="1691640"/>
+            <a:ext cx="320040" cy="320040"/>
           </a:xfrm>
           <a:prstGeom prst="rect">
             <a:avLst/>
@@ -5150,14 +5619,14 @@
       </p:pic>
       <p:sp>
         <p:nvSpPr>
-          <p:cNvPr id="6" name="Text 2"/>
-          <p:cNvSpPr/>
-          <p:nvPr/>
-        </p:nvSpPr>
-        <p:spPr>
-          <a:xfrm>
-            <a:off x="731520" y="822960"/>
-            <a:ext cx="5303520" cy="457200"/>
+          <p:cNvPr id="15" name="Text 9"/>
+          <p:cNvSpPr/>
+          <p:nvPr/>
+        </p:nvSpPr>
+        <p:spPr>
+          <a:xfrm>
+            <a:off x="5440680" y="1664208"/>
+            <a:ext cx="2834640" cy="365760"/>
           </a:xfrm>
           <a:prstGeom prst="rect">
             <a:avLst/>
@@ -5169,11 +5638,50 @@
           <a:bodyPr wrap="square" lIns="0" tIns="0" rIns="0" bIns="0" rtlCol="0" anchor="ctr"/>
           <a:lstStyle/>
           <a:p>
-            <a:pPr marL="0" indent="0">
-              <a:buNone/>
-            </a:pPr>
-            <a:r>
-              <a:rPr lang="en-US" sz="1300" dirty="0">
+            <a:pPr indent="0" marL="0">
+              <a:buNone/>
+            </a:pPr>
+            <a:r>
+              <a:rPr lang="en-US" sz="1500" b="1" dirty="0">
+                <a:solidFill>
+                  <a:srgbClr val="1E2761"/>
+                </a:solidFill>
+                <a:latin typeface="Georgia" pitchFamily="34" charset="0"/>
+                <a:ea typeface="Georgia" pitchFamily="34" charset="-122"/>
+                <a:cs typeface="Georgia" pitchFamily="34" charset="-120"/>
+              </a:rPr>
+              <a:t>Explainable AI</a:t>
+            </a:r>
+            <a:endParaRPr lang="en-US" sz="1500" dirty="0"/>
+          </a:p>
+        </p:txBody>
+      </p:sp>
+      <p:sp>
+        <p:nvSpPr>
+          <p:cNvPr id="16" name="Text 10"/>
+          <p:cNvSpPr/>
+          <p:nvPr/>
+        </p:nvSpPr>
+        <p:spPr>
+          <a:xfrm>
+            <a:off x="5074920" y="2103120"/>
+            <a:ext cx="3200400" cy="502920"/>
+          </a:xfrm>
+          <a:prstGeom prst="rect">
+            <a:avLst/>
+          </a:prstGeom>
+          <a:noFill/>
+          <a:ln/>
+        </p:spPr>
+        <p:txBody>
+          <a:bodyPr wrap="square" lIns="0" tIns="0" rIns="0" bIns="0" rtlCol="0" anchor="ctr"/>
+          <a:lstStyle/>
+          <a:p>
+            <a:pPr indent="0" marL="0">
+              <a:buNone/>
+            </a:pPr>
+            <a:r>
+              <a:rPr lang="en-US" sz="1100" dirty="0">
                 <a:solidFill>
                   <a:srgbClr val="6C757D"/>
                 </a:solidFill>
@@ -5181,21 +5689,21 @@
                 <a:ea typeface="Calibri" pitchFamily="34" charset="-122"/>
                 <a:cs typeface="Calibri" pitchFamily="34" charset="-120"/>
               </a:rPr>
-              <a:t>A machine learning system that predicts burnout risk before it leads to attrition — enabling proactive, targeted HR interventions.</a:t>
-            </a:r>
-            <a:endParaRPr lang="en-US" sz="1300" dirty="0"/>
-          </a:p>
-        </p:txBody>
-      </p:sp>
-      <p:sp>
-        <p:nvSpPr>
-          <p:cNvPr id="7" name="Shape 3"/>
-          <p:cNvSpPr/>
-          <p:nvPr/>
-        </p:nvSpPr>
-        <p:spPr>
-          <a:xfrm>
-            <a:off x="731520" y="1554480"/>
+              <a:t>SHAP explanations tell managers exactly which factors drive risk</a:t>
+            </a:r>
+            <a:endParaRPr lang="en-US" sz="1100" dirty="0"/>
+          </a:p>
+        </p:txBody>
+      </p:sp>
+      <p:sp>
+        <p:nvSpPr>
+          <p:cNvPr id="17" name="Shape 11"/>
+          <p:cNvSpPr/>
+          <p:nvPr/>
+        </p:nvSpPr>
+        <p:spPr>
+          <a:xfrm>
+            <a:off x="731520" y="3017520"/>
             <a:ext cx="3657600" cy="1188720"/>
           </a:xfrm>
           <a:prstGeom prst="rect">
@@ -5206,7 +5714,7 @@
           </a:solidFill>
           <a:ln/>
           <a:effectLst>
-            <a:outerShdw blurRad="76200" dist="25400" dir="8100000" algn="bl" rotWithShape="0">
+            <a:outerShdw sx="100000" sy="100000" kx="0" ky="0" algn="bl" rotWithShape="0" blurRad="76200" dist="25400" dir="8100000">
               <a:srgbClr val="000000">
                 <a:alpha val="12000"/>
               </a:srgbClr>
@@ -5216,13 +5724,13 @@
       </p:sp>
       <p:sp>
         <p:nvSpPr>
-          <p:cNvPr id="8" name="Shape 4"/>
-          <p:cNvSpPr/>
-          <p:nvPr/>
-        </p:nvSpPr>
-        <p:spPr>
-          <a:xfrm>
-            <a:off x="731520" y="1554480"/>
+          <p:cNvPr id="18" name="Shape 12"/>
+          <p:cNvSpPr/>
+          <p:nvPr/>
+        </p:nvSpPr>
+        <p:spPr>
+          <a:xfrm>
+            <a:off x="731520" y="3017520"/>
             <a:ext cx="54864" cy="1188720"/>
           </a:xfrm>
           <a:prstGeom prst="rect">
@@ -5236,7 +5744,7 @@
       </p:sp>
       <p:pic>
         <p:nvPicPr>
-          <p:cNvPr id="9" name="Image 2" descr="preencoded.png"/>
+          <p:cNvPr id="19" name="Image 4" descr="preencoded.png">    </p:cNvPr>
           <p:cNvPicPr>
             <a:picLocks noChangeAspect="1"/>
           </p:cNvPicPr>
@@ -5250,7 +5758,7 @@
         </p:blipFill>
         <p:spPr>
           <a:xfrm>
-            <a:off x="914400" y="1691640"/>
+            <a:off x="914400" y="3154680"/>
             <a:ext cx="320040" cy="320040"/>
           </a:xfrm>
           <a:prstGeom prst="rect">
@@ -5260,13 +5768,13 @@
       </p:pic>
       <p:sp>
         <p:nvSpPr>
-          <p:cNvPr id="10" name="Text 5"/>
-          <p:cNvSpPr/>
-          <p:nvPr/>
-        </p:nvSpPr>
-        <p:spPr>
-          <a:xfrm>
-            <a:off x="1325880" y="1664208"/>
+          <p:cNvPr id="20" name="Text 13"/>
+          <p:cNvSpPr/>
+          <p:nvPr/>
+        </p:nvSpPr>
+        <p:spPr>
+          <a:xfrm>
+            <a:off x="1325880" y="3127248"/>
             <a:ext cx="2834640" cy="365760"/>
           </a:xfrm>
           <a:prstGeom prst="rect">
@@ -5279,7 +5787,7 @@
           <a:bodyPr wrap="square" lIns="0" tIns="0" rIns="0" bIns="0" rtlCol="0" anchor="ctr"/>
           <a:lstStyle/>
           <a:p>
-            <a:pPr marL="0" indent="0">
+            <a:pPr indent="0" marL="0">
               <a:buNone/>
             </a:pPr>
             <a:r>
@@ -5291,7 +5799,7 @@
                 <a:ea typeface="Georgia" pitchFamily="34" charset="-122"/>
                 <a:cs typeface="Georgia" pitchFamily="34" charset="-120"/>
               </a:rPr>
-              <a:t>Early Detection</a:t>
+              <a:t>Fair &amp; Auditable</a:t>
             </a:r>
             <a:endParaRPr lang="en-US" sz="1500" dirty="0"/>
           </a:p>
@@ -5299,13 +5807,13 @@
       </p:sp>
       <p:sp>
         <p:nvSpPr>
-          <p:cNvPr id="11" name="Text 6"/>
-          <p:cNvSpPr/>
-          <p:nvPr/>
-        </p:nvSpPr>
-        <p:spPr>
-          <a:xfrm>
-            <a:off x="960120" y="2103120"/>
+          <p:cNvPr id="21" name="Text 14"/>
+          <p:cNvSpPr/>
+          <p:nvPr/>
+        </p:nvSpPr>
+        <p:spPr>
+          <a:xfrm>
+            <a:off x="960120" y="3566160"/>
             <a:ext cx="3200400" cy="502920"/>
           </a:xfrm>
           <a:prstGeom prst="rect">
@@ -5318,7 +5826,7 @@
           <a:bodyPr wrap="square" lIns="0" tIns="0" rIns="0" bIns="0" rtlCol="0" anchor="ctr"/>
           <a:lstStyle/>
           <a:p>
-            <a:pPr marL="0" indent="0">
+            <a:pPr indent="0" marL="0">
               <a:buNone/>
             </a:pPr>
             <a:r>
@@ -5330,7 +5838,7 @@
                 <a:ea typeface="Calibri" pitchFamily="34" charset="-122"/>
                 <a:cs typeface="Calibri" pitchFamily="34" charset="-120"/>
               </a:rPr>
-              <a:t>Flags at-risk employees weeks before symptoms escalate</a:t>
+              <a:t>Bias-tested across gender, age, and income groups</a:t>
             </a:r>
             <a:endParaRPr lang="en-US" sz="1100" dirty="0"/>
           </a:p>
@@ -5338,13 +5846,13 @@
       </p:sp>
       <p:sp>
         <p:nvSpPr>
-          <p:cNvPr id="12" name="Shape 7"/>
-          <p:cNvSpPr/>
-          <p:nvPr/>
-        </p:nvSpPr>
-        <p:spPr>
-          <a:xfrm>
-            <a:off x="4846320" y="1554480"/>
+          <p:cNvPr id="22" name="Shape 15"/>
+          <p:cNvSpPr/>
+          <p:nvPr/>
+        </p:nvSpPr>
+        <p:spPr>
+          <a:xfrm>
+            <a:off x="4846320" y="3017520"/>
             <a:ext cx="3657600" cy="1188720"/>
           </a:xfrm>
           <a:prstGeom prst="rect">
@@ -5355,7 +5863,7 @@
           </a:solidFill>
           <a:ln/>
           <a:effectLst>
-            <a:outerShdw blurRad="76200" dist="25400" dir="8100000" algn="bl" rotWithShape="0">
+            <a:outerShdw sx="100000" sy="100000" kx="0" ky="0" algn="bl" rotWithShape="0" blurRad="76200" dist="25400" dir="8100000">
               <a:srgbClr val="000000">
                 <a:alpha val="12000"/>
               </a:srgbClr>
@@ -5365,13 +5873,13 @@
       </p:sp>
       <p:sp>
         <p:nvSpPr>
-          <p:cNvPr id="13" name="Shape 8"/>
-          <p:cNvSpPr/>
-          <p:nvPr/>
-        </p:nvSpPr>
-        <p:spPr>
-          <a:xfrm>
-            <a:off x="4846320" y="1554480"/>
+          <p:cNvPr id="23" name="Shape 16"/>
+          <p:cNvSpPr/>
+          <p:nvPr/>
+        </p:nvSpPr>
+        <p:spPr>
+          <a:xfrm>
+            <a:off x="4846320" y="3017520"/>
             <a:ext cx="54864" cy="1188720"/>
           </a:xfrm>
           <a:prstGeom prst="rect">
@@ -5385,7 +5893,7 @@
       </p:sp>
       <p:pic>
         <p:nvPicPr>
-          <p:cNvPr id="14" name="Image 3" descr="preencoded.png"/>
+          <p:cNvPr id="24" name="Image 5" descr="preencoded.png">    </p:cNvPr>
           <p:cNvPicPr>
             <a:picLocks noChangeAspect="1"/>
           </p:cNvPicPr>
@@ -5399,7 +5907,7 @@
         </p:blipFill>
         <p:spPr>
           <a:xfrm>
-            <a:off x="5029200" y="1691640"/>
+            <a:off x="5029200" y="3154680"/>
             <a:ext cx="320040" cy="320040"/>
           </a:xfrm>
           <a:prstGeom prst="rect">
@@ -5409,13 +5917,13 @@
       </p:pic>
       <p:sp>
         <p:nvSpPr>
-          <p:cNvPr id="15" name="Text 9"/>
-          <p:cNvSpPr/>
-          <p:nvPr/>
-        </p:nvSpPr>
-        <p:spPr>
-          <a:xfrm>
-            <a:off x="5440680" y="1664208"/>
+          <p:cNvPr id="25" name="Text 17"/>
+          <p:cNvSpPr/>
+          <p:nvPr/>
+        </p:nvSpPr>
+        <p:spPr>
+          <a:xfrm>
+            <a:off x="5440680" y="3127248"/>
             <a:ext cx="2834640" cy="365760"/>
           </a:xfrm>
           <a:prstGeom prst="rect">
@@ -5428,7 +5936,7 @@
           <a:bodyPr wrap="square" lIns="0" tIns="0" rIns="0" bIns="0" rtlCol="0" anchor="ctr"/>
           <a:lstStyle/>
           <a:p>
-            <a:pPr marL="0" indent="0">
+            <a:pPr indent="0" marL="0">
               <a:buNone/>
             </a:pPr>
             <a:r>
@@ -5440,304 +5948,6 @@
                 <a:ea typeface="Georgia" pitchFamily="34" charset="-122"/>
                 <a:cs typeface="Georgia" pitchFamily="34" charset="-120"/>
               </a:rPr>
-              <a:t>Explainable AI</a:t>
-            </a:r>
-            <a:endParaRPr lang="en-US" sz="1500" dirty="0"/>
-          </a:p>
-        </p:txBody>
-      </p:sp>
-      <p:sp>
-        <p:nvSpPr>
-          <p:cNvPr id="16" name="Text 10"/>
-          <p:cNvSpPr/>
-          <p:nvPr/>
-        </p:nvSpPr>
-        <p:spPr>
-          <a:xfrm>
-            <a:off x="5074920" y="2103120"/>
-            <a:ext cx="3200400" cy="502920"/>
-          </a:xfrm>
-          <a:prstGeom prst="rect">
-            <a:avLst/>
-          </a:prstGeom>
-          <a:noFill/>
-          <a:ln/>
-        </p:spPr>
-        <p:txBody>
-          <a:bodyPr wrap="square" lIns="0" tIns="0" rIns="0" bIns="0" rtlCol="0" anchor="ctr"/>
-          <a:lstStyle/>
-          <a:p>
-            <a:pPr marL="0" indent="0">
-              <a:buNone/>
-            </a:pPr>
-            <a:r>
-              <a:rPr lang="en-US" sz="1100" dirty="0">
-                <a:solidFill>
-                  <a:srgbClr val="6C757D"/>
-                </a:solidFill>
-                <a:latin typeface="Calibri" pitchFamily="34" charset="0"/>
-                <a:ea typeface="Calibri" pitchFamily="34" charset="-122"/>
-                <a:cs typeface="Calibri" pitchFamily="34" charset="-120"/>
-              </a:rPr>
-              <a:t>SHAP explanations tell managers exactly which factors drive risk</a:t>
-            </a:r>
-            <a:endParaRPr lang="en-US" sz="1100" dirty="0"/>
-          </a:p>
-        </p:txBody>
-      </p:sp>
-      <p:sp>
-        <p:nvSpPr>
-          <p:cNvPr id="17" name="Shape 11"/>
-          <p:cNvSpPr/>
-          <p:nvPr/>
-        </p:nvSpPr>
-        <p:spPr>
-          <a:xfrm>
-            <a:off x="731520" y="3017520"/>
-            <a:ext cx="3657600" cy="1188720"/>
-          </a:xfrm>
-          <a:prstGeom prst="rect">
-            <a:avLst/>
-          </a:prstGeom>
-          <a:solidFill>
-            <a:srgbClr val="F8F9FA"/>
-          </a:solidFill>
-          <a:ln/>
-          <a:effectLst>
-            <a:outerShdw blurRad="76200" dist="25400" dir="8100000" algn="bl" rotWithShape="0">
-              <a:srgbClr val="000000">
-                <a:alpha val="12000"/>
-              </a:srgbClr>
-            </a:outerShdw>
-          </a:effectLst>
-        </p:spPr>
-      </p:sp>
-      <p:sp>
-        <p:nvSpPr>
-          <p:cNvPr id="18" name="Shape 12"/>
-          <p:cNvSpPr/>
-          <p:nvPr/>
-        </p:nvSpPr>
-        <p:spPr>
-          <a:xfrm>
-            <a:off x="731520" y="3017520"/>
-            <a:ext cx="54864" cy="1188720"/>
-          </a:xfrm>
-          <a:prstGeom prst="rect">
-            <a:avLst/>
-          </a:prstGeom>
-          <a:solidFill>
-            <a:srgbClr val="F96167"/>
-          </a:solidFill>
-          <a:ln/>
-        </p:spPr>
-      </p:sp>
-      <p:pic>
-        <p:nvPicPr>
-          <p:cNvPr id="19" name="Image 4" descr="preencoded.png"/>
-          <p:cNvPicPr>
-            <a:picLocks noChangeAspect="1"/>
-          </p:cNvPicPr>
-          <p:nvPr/>
-        </p:nvPicPr>
-        <p:blipFill>
-          <a:blip r:embed="rId7"/>
-          <a:stretch>
-            <a:fillRect/>
-          </a:stretch>
-        </p:blipFill>
-        <p:spPr>
-          <a:xfrm>
-            <a:off x="914400" y="3154680"/>
-            <a:ext cx="320040" cy="320040"/>
-          </a:xfrm>
-          <a:prstGeom prst="rect">
-            <a:avLst/>
-          </a:prstGeom>
-        </p:spPr>
-      </p:pic>
-      <p:sp>
-        <p:nvSpPr>
-          <p:cNvPr id="20" name="Text 13"/>
-          <p:cNvSpPr/>
-          <p:nvPr/>
-        </p:nvSpPr>
-        <p:spPr>
-          <a:xfrm>
-            <a:off x="1325880" y="3127248"/>
-            <a:ext cx="2834640" cy="365760"/>
-          </a:xfrm>
-          <a:prstGeom prst="rect">
-            <a:avLst/>
-          </a:prstGeom>
-          <a:noFill/>
-          <a:ln/>
-        </p:spPr>
-        <p:txBody>
-          <a:bodyPr wrap="square" lIns="0" tIns="0" rIns="0" bIns="0" rtlCol="0" anchor="ctr"/>
-          <a:lstStyle/>
-          <a:p>
-            <a:pPr marL="0" indent="0">
-              <a:buNone/>
-            </a:pPr>
-            <a:r>
-              <a:rPr lang="en-US" sz="1500" b="1" dirty="0">
-                <a:solidFill>
-                  <a:srgbClr val="1E2761"/>
-                </a:solidFill>
-                <a:latin typeface="Georgia" pitchFamily="34" charset="0"/>
-                <a:ea typeface="Georgia" pitchFamily="34" charset="-122"/>
-                <a:cs typeface="Georgia" pitchFamily="34" charset="-120"/>
-              </a:rPr>
-              <a:t>Fair &amp; Auditable</a:t>
-            </a:r>
-            <a:endParaRPr lang="en-US" sz="1500" dirty="0"/>
-          </a:p>
-        </p:txBody>
-      </p:sp>
-      <p:sp>
-        <p:nvSpPr>
-          <p:cNvPr id="21" name="Text 14"/>
-          <p:cNvSpPr/>
-          <p:nvPr/>
-        </p:nvSpPr>
-        <p:spPr>
-          <a:xfrm>
-            <a:off x="960120" y="3566160"/>
-            <a:ext cx="3200400" cy="502920"/>
-          </a:xfrm>
-          <a:prstGeom prst="rect">
-            <a:avLst/>
-          </a:prstGeom>
-          <a:noFill/>
-          <a:ln/>
-        </p:spPr>
-        <p:txBody>
-          <a:bodyPr wrap="square" lIns="0" tIns="0" rIns="0" bIns="0" rtlCol="0" anchor="ctr"/>
-          <a:lstStyle/>
-          <a:p>
-            <a:pPr marL="0" indent="0">
-              <a:buNone/>
-            </a:pPr>
-            <a:r>
-              <a:rPr lang="en-US" sz="1100" dirty="0">
-                <a:solidFill>
-                  <a:srgbClr val="6C757D"/>
-                </a:solidFill>
-                <a:latin typeface="Calibri" pitchFamily="34" charset="0"/>
-                <a:ea typeface="Calibri" pitchFamily="34" charset="-122"/>
-                <a:cs typeface="Calibri" pitchFamily="34" charset="-120"/>
-              </a:rPr>
-              <a:t>Bias-tested across gender, age, and income groups</a:t>
-            </a:r>
-            <a:endParaRPr lang="en-US" sz="1100" dirty="0"/>
-          </a:p>
-        </p:txBody>
-      </p:sp>
-      <p:sp>
-        <p:nvSpPr>
-          <p:cNvPr id="22" name="Shape 15"/>
-          <p:cNvSpPr/>
-          <p:nvPr/>
-        </p:nvSpPr>
-        <p:spPr>
-          <a:xfrm>
-            <a:off x="4846320" y="3017520"/>
-            <a:ext cx="3657600" cy="1188720"/>
-          </a:xfrm>
-          <a:prstGeom prst="rect">
-            <a:avLst/>
-          </a:prstGeom>
-          <a:solidFill>
-            <a:srgbClr val="F8F9FA"/>
-          </a:solidFill>
-          <a:ln/>
-          <a:effectLst>
-            <a:outerShdw blurRad="76200" dist="25400" dir="8100000" algn="bl" rotWithShape="0">
-              <a:srgbClr val="000000">
-                <a:alpha val="12000"/>
-              </a:srgbClr>
-            </a:outerShdw>
-          </a:effectLst>
-        </p:spPr>
-      </p:sp>
-      <p:sp>
-        <p:nvSpPr>
-          <p:cNvPr id="23" name="Shape 16"/>
-          <p:cNvSpPr/>
-          <p:nvPr/>
-        </p:nvSpPr>
-        <p:spPr>
-          <a:xfrm>
-            <a:off x="4846320" y="3017520"/>
-            <a:ext cx="54864" cy="1188720"/>
-          </a:xfrm>
-          <a:prstGeom prst="rect">
-            <a:avLst/>
-          </a:prstGeom>
-          <a:solidFill>
-            <a:srgbClr val="F96167"/>
-          </a:solidFill>
-          <a:ln/>
-        </p:spPr>
-      </p:sp>
-      <p:pic>
-        <p:nvPicPr>
-          <p:cNvPr id="24" name="Image 5" descr="preencoded.png"/>
-          <p:cNvPicPr>
-            <a:picLocks noChangeAspect="1"/>
-          </p:cNvPicPr>
-          <p:nvPr/>
-        </p:nvPicPr>
-        <p:blipFill>
-          <a:blip r:embed="rId8"/>
-          <a:stretch>
-            <a:fillRect/>
-          </a:stretch>
-        </p:blipFill>
-        <p:spPr>
-          <a:xfrm>
-            <a:off x="5029200" y="3154680"/>
-            <a:ext cx="320040" cy="320040"/>
-          </a:xfrm>
-          <a:prstGeom prst="rect">
-            <a:avLst/>
-          </a:prstGeom>
-        </p:spPr>
-      </p:pic>
-      <p:sp>
-        <p:nvSpPr>
-          <p:cNvPr id="25" name="Text 17"/>
-          <p:cNvSpPr/>
-          <p:nvPr/>
-        </p:nvSpPr>
-        <p:spPr>
-          <a:xfrm>
-            <a:off x="5440680" y="3127248"/>
-            <a:ext cx="2834640" cy="365760"/>
-          </a:xfrm>
-          <a:prstGeom prst="rect">
-            <a:avLst/>
-          </a:prstGeom>
-          <a:noFill/>
-          <a:ln/>
-        </p:spPr>
-        <p:txBody>
-          <a:bodyPr wrap="square" lIns="0" tIns="0" rIns="0" bIns="0" rtlCol="0" anchor="ctr"/>
-          <a:lstStyle/>
-          <a:p>
-            <a:pPr marL="0" indent="0">
-              <a:buNone/>
-            </a:pPr>
-            <a:r>
-              <a:rPr lang="en-US" sz="1500" b="1" dirty="0">
-                <a:solidFill>
-                  <a:srgbClr val="1E2761"/>
-                </a:solidFill>
-                <a:latin typeface="Georgia" pitchFamily="34" charset="0"/>
-                <a:ea typeface="Georgia" pitchFamily="34" charset="-122"/>
-                <a:cs typeface="Georgia" pitchFamily="34" charset="-120"/>
-              </a:rPr>
               <a:t>Actionable Output</a:t>
             </a:r>
             <a:endParaRPr lang="en-US" sz="1500" dirty="0"/>
@@ -5765,7 +5975,7 @@
           <a:bodyPr wrap="square" lIns="0" tIns="0" rIns="0" bIns="0" rtlCol="0" anchor="ctr"/>
           <a:lstStyle/>
           <a:p>
-            <a:pPr marL="0" indent="0">
+            <a:pPr indent="0" marL="0">
               <a:buNone/>
             </a:pPr>
             <a:r>
@@ -5799,7 +6009,6 @@
         <a:solidFill>
           <a:srgbClr val="F8F9FA"/>
         </a:solidFill>
-        <a:effectLst/>
       </p:bgPr>
     </p:bg>
     <p:spTree>
@@ -5838,7 +6047,819 @@
       </p:sp>
       <p:pic>
         <p:nvPicPr>
-          <p:cNvPr id="3" name="Image 0" descr="preencoded.png"/>
+          <p:cNvPr id="3" name="Image 0" descr="preencoded.png">    </p:cNvPr>
+          <p:cNvPicPr>
+            <a:picLocks noChangeAspect="1"/>
+          </p:cNvPicPr>
+          <p:nvPr/>
+        </p:nvPicPr>
+        <p:blipFill>
+          <a:blip r:embed="rId1"/>
+          <a:stretch>
+            <a:fillRect/>
+          </a:stretch>
+        </p:blipFill>
+        <p:spPr>
+          <a:xfrm>
+            <a:off x="731520" y="228600"/>
+            <a:ext cx="365760" cy="365760"/>
+          </a:xfrm>
+          <a:prstGeom prst="rect">
+            <a:avLst/>
+          </a:prstGeom>
+        </p:spPr>
+      </p:pic>
+      <p:sp>
+        <p:nvSpPr>
+          <p:cNvPr id="4" name="Text 1"/>
+          <p:cNvSpPr/>
+          <p:nvPr/>
+        </p:nvSpPr>
+        <p:spPr>
+          <a:xfrm>
+            <a:off x="1234440" y="228600"/>
+            <a:ext cx="7315200" cy="548640"/>
+          </a:xfrm>
+          <a:prstGeom prst="rect">
+            <a:avLst/>
+          </a:prstGeom>
+          <a:noFill/>
+          <a:ln/>
+        </p:spPr>
+        <p:txBody>
+          <a:bodyPr wrap="square" lIns="0" tIns="0" rIns="0" bIns="0" rtlCol="0" anchor="ctr"/>
+          <a:lstStyle/>
+          <a:p>
+            <a:pPr indent="0" marL="0">
+              <a:buNone/>
+            </a:pPr>
+            <a:r>
+              <a:rPr lang="en-US" sz="3400" b="1" dirty="0">
+                <a:solidFill>
+                  <a:srgbClr val="1E2761"/>
+                </a:solidFill>
+                <a:latin typeface="Georgia" pitchFamily="34" charset="0"/>
+                <a:ea typeface="Georgia" pitchFamily="34" charset="-122"/>
+                <a:cs typeface="Georgia" pitchFamily="34" charset="-120"/>
+              </a:rPr>
+              <a:t>How It Works</a:t>
+            </a:r>
+            <a:endParaRPr lang="en-US" sz="3400" dirty="0"/>
+          </a:p>
+        </p:txBody>
+      </p:sp>
+      <p:sp>
+        <p:nvSpPr>
+          <p:cNvPr id="5" name="Shape 2"/>
+          <p:cNvSpPr/>
+          <p:nvPr/>
+        </p:nvSpPr>
+        <p:spPr>
+          <a:xfrm>
+            <a:off x="960120" y="1005840"/>
+            <a:ext cx="914400" cy="914400"/>
+          </a:xfrm>
+          <a:prstGeom prst="ellipse">
+            <a:avLst/>
+          </a:prstGeom>
+          <a:solidFill>
+            <a:srgbClr val="FFFFFF"/>
+          </a:solidFill>
+          <a:ln/>
+          <a:effectLst>
+            <a:outerShdw sx="100000" sy="100000" kx="0" ky="0" algn="bl" rotWithShape="0" blurRad="76200" dist="25400" dir="8100000">
+              <a:srgbClr val="000000">
+                <a:alpha val="12000"/>
+              </a:srgbClr>
+            </a:outerShdw>
+          </a:effectLst>
+        </p:spPr>
+      </p:sp>
+      <p:sp>
+        <p:nvSpPr>
+          <p:cNvPr id="6" name="Shape 3"/>
+          <p:cNvSpPr/>
+          <p:nvPr/>
+        </p:nvSpPr>
+        <p:spPr>
+          <a:xfrm>
+            <a:off x="960120" y="1005840"/>
+            <a:ext cx="914400" cy="914400"/>
+          </a:xfrm>
+          <a:prstGeom prst="ellipse">
+            <a:avLst/>
+          </a:prstGeom>
+          <a:solidFill>
+            <a:srgbClr val="F96167"/>
+          </a:solidFill>
+          <a:ln/>
+        </p:spPr>
+      </p:sp>
+      <p:sp>
+        <p:nvSpPr>
+          <p:cNvPr id="7" name="Text 4"/>
+          <p:cNvSpPr/>
+          <p:nvPr/>
+        </p:nvSpPr>
+        <p:spPr>
+          <a:xfrm>
+            <a:off x="960120" y="1005840"/>
+            <a:ext cx="914400" cy="914400"/>
+          </a:xfrm>
+          <a:prstGeom prst="rect">
+            <a:avLst/>
+          </a:prstGeom>
+          <a:noFill/>
+          <a:ln/>
+        </p:spPr>
+        <p:txBody>
+          <a:bodyPr wrap="square" lIns="0" tIns="0" rIns="0" bIns="0" rtlCol="0" anchor="ctr"/>
+          <a:lstStyle/>
+          <a:p>
+            <a:pPr algn="ctr" indent="0" marL="0">
+              <a:buNone/>
+            </a:pPr>
+            <a:r>
+              <a:rPr lang="en-US" sz="2800" b="1" dirty="0">
+                <a:solidFill>
+                  <a:srgbClr val="FFFFFF"/>
+                </a:solidFill>
+                <a:latin typeface="Georgia" pitchFamily="34" charset="0"/>
+                <a:ea typeface="Georgia" pitchFamily="34" charset="-122"/>
+                <a:cs typeface="Georgia" pitchFamily="34" charset="-120"/>
+              </a:rPr>
+              <a:t>1</a:t>
+            </a:r>
+            <a:endParaRPr lang="en-US" sz="2800" dirty="0"/>
+          </a:p>
+        </p:txBody>
+      </p:sp>
+      <p:sp>
+        <p:nvSpPr>
+          <p:cNvPr id="8" name="Shape 5"/>
+          <p:cNvSpPr/>
+          <p:nvPr/>
+        </p:nvSpPr>
+        <p:spPr>
+          <a:xfrm>
+            <a:off x="2011680" y="1463040"/>
+            <a:ext cx="731520" cy="0"/>
+          </a:xfrm>
+          <a:prstGeom prst="line">
+            <a:avLst/>
+          </a:prstGeom>
+          <a:noFill/>
+          <a:ln w="25400">
+            <a:solidFill>
+              <a:srgbClr val="ADB5BD"/>
+            </a:solidFill>
+            <a:prstDash val="solid"/>
+          </a:ln>
+        </p:spPr>
+      </p:sp>
+      <p:sp>
+        <p:nvSpPr>
+          <p:cNvPr id="9" name="Text 6"/>
+          <p:cNvSpPr/>
+          <p:nvPr/>
+        </p:nvSpPr>
+        <p:spPr>
+          <a:xfrm>
+            <a:off x="548640" y="2103120"/>
+            <a:ext cx="1737360" cy="365760"/>
+          </a:xfrm>
+          <a:prstGeom prst="rect">
+            <a:avLst/>
+          </a:prstGeom>
+          <a:noFill/>
+          <a:ln/>
+        </p:spPr>
+        <p:txBody>
+          <a:bodyPr wrap="square" lIns="0" tIns="0" rIns="0" bIns="0" rtlCol="0" anchor="ctr"/>
+          <a:lstStyle/>
+          <a:p>
+            <a:pPr algn="ctr" indent="0" marL="0">
+              <a:buNone/>
+            </a:pPr>
+            <a:r>
+              <a:rPr lang="en-US" sz="1700" b="1" dirty="0">
+                <a:solidFill>
+                  <a:srgbClr val="1E2761"/>
+                </a:solidFill>
+                <a:latin typeface="Georgia" pitchFamily="34" charset="0"/>
+                <a:ea typeface="Georgia" pitchFamily="34" charset="-122"/>
+                <a:cs typeface="Georgia" pitchFamily="34" charset="-120"/>
+              </a:rPr>
+              <a:t>Collect</a:t>
+            </a:r>
+            <a:endParaRPr lang="en-US" sz="1700" dirty="0"/>
+          </a:p>
+        </p:txBody>
+      </p:sp>
+      <p:sp>
+        <p:nvSpPr>
+          <p:cNvPr id="10" name="Text 7"/>
+          <p:cNvSpPr/>
+          <p:nvPr/>
+        </p:nvSpPr>
+        <p:spPr>
+          <a:xfrm>
+            <a:off x="548640" y="2468880"/>
+            <a:ext cx="1737360" cy="640080"/>
+          </a:xfrm>
+          <a:prstGeom prst="rect">
+            <a:avLst/>
+          </a:prstGeom>
+          <a:noFill/>
+          <a:ln/>
+        </p:spPr>
+        <p:txBody>
+          <a:bodyPr wrap="square" lIns="0" tIns="0" rIns="0" bIns="0" rtlCol="0" anchor="ctr"/>
+          <a:lstStyle/>
+          <a:p>
+            <a:pPr algn="ctr" indent="0" marL="0">
+              <a:buNone/>
+            </a:pPr>
+            <a:r>
+              <a:rPr lang="en-US" sz="1100" dirty="0">
+                <a:solidFill>
+                  <a:srgbClr val="6C757D"/>
+                </a:solidFill>
+                <a:latin typeface="Calibri" pitchFamily="34" charset="0"/>
+                <a:ea typeface="Calibri" pitchFamily="34" charset="-122"/>
+                <a:cs typeface="Calibri" pitchFamily="34" charset="-120"/>
+              </a:rPr>
+              <a:t>HR survey data, work hours, satisfaction scores</a:t>
+            </a:r>
+            <a:endParaRPr lang="en-US" sz="1100" dirty="0"/>
+          </a:p>
+        </p:txBody>
+      </p:sp>
+      <p:sp>
+        <p:nvSpPr>
+          <p:cNvPr id="11" name="Shape 8"/>
+          <p:cNvSpPr/>
+          <p:nvPr/>
+        </p:nvSpPr>
+        <p:spPr>
+          <a:xfrm>
+            <a:off x="3154680" y="1005840"/>
+            <a:ext cx="914400" cy="914400"/>
+          </a:xfrm>
+          <a:prstGeom prst="ellipse">
+            <a:avLst/>
+          </a:prstGeom>
+          <a:solidFill>
+            <a:srgbClr val="FFFFFF"/>
+          </a:solidFill>
+          <a:ln/>
+          <a:effectLst>
+            <a:outerShdw sx="100000" sy="100000" kx="0" ky="0" algn="bl" rotWithShape="0" blurRad="76200" dist="25400" dir="8100000">
+              <a:srgbClr val="000000">
+                <a:alpha val="12000"/>
+              </a:srgbClr>
+            </a:outerShdw>
+          </a:effectLst>
+        </p:spPr>
+      </p:sp>
+      <p:sp>
+        <p:nvSpPr>
+          <p:cNvPr id="12" name="Shape 9"/>
+          <p:cNvSpPr/>
+          <p:nvPr/>
+        </p:nvSpPr>
+        <p:spPr>
+          <a:xfrm>
+            <a:off x="3154680" y="1005840"/>
+            <a:ext cx="914400" cy="914400"/>
+          </a:xfrm>
+          <a:prstGeom prst="ellipse">
+            <a:avLst/>
+          </a:prstGeom>
+          <a:solidFill>
+            <a:srgbClr val="F96167"/>
+          </a:solidFill>
+          <a:ln/>
+        </p:spPr>
+      </p:sp>
+      <p:sp>
+        <p:nvSpPr>
+          <p:cNvPr id="13" name="Text 10"/>
+          <p:cNvSpPr/>
+          <p:nvPr/>
+        </p:nvSpPr>
+        <p:spPr>
+          <a:xfrm>
+            <a:off x="3154680" y="1005840"/>
+            <a:ext cx="914400" cy="914400"/>
+          </a:xfrm>
+          <a:prstGeom prst="rect">
+            <a:avLst/>
+          </a:prstGeom>
+          <a:noFill/>
+          <a:ln/>
+        </p:spPr>
+        <p:txBody>
+          <a:bodyPr wrap="square" lIns="0" tIns="0" rIns="0" bIns="0" rtlCol="0" anchor="ctr"/>
+          <a:lstStyle/>
+          <a:p>
+            <a:pPr algn="ctr" indent="0" marL="0">
+              <a:buNone/>
+            </a:pPr>
+            <a:r>
+              <a:rPr lang="en-US" sz="2800" b="1" dirty="0">
+                <a:solidFill>
+                  <a:srgbClr val="FFFFFF"/>
+                </a:solidFill>
+                <a:latin typeface="Georgia" pitchFamily="34" charset="0"/>
+                <a:ea typeface="Georgia" pitchFamily="34" charset="-122"/>
+                <a:cs typeface="Georgia" pitchFamily="34" charset="-120"/>
+              </a:rPr>
+              <a:t>2</a:t>
+            </a:r>
+            <a:endParaRPr lang="en-US" sz="2800" dirty="0"/>
+          </a:p>
+        </p:txBody>
+      </p:sp>
+      <p:sp>
+        <p:nvSpPr>
+          <p:cNvPr id="14" name="Shape 11"/>
+          <p:cNvSpPr/>
+          <p:nvPr/>
+        </p:nvSpPr>
+        <p:spPr>
+          <a:xfrm>
+            <a:off x="4206240" y="1463040"/>
+            <a:ext cx="731520" cy="0"/>
+          </a:xfrm>
+          <a:prstGeom prst="line">
+            <a:avLst/>
+          </a:prstGeom>
+          <a:noFill/>
+          <a:ln w="25400">
+            <a:solidFill>
+              <a:srgbClr val="ADB5BD"/>
+            </a:solidFill>
+            <a:prstDash val="solid"/>
+          </a:ln>
+        </p:spPr>
+      </p:sp>
+      <p:sp>
+        <p:nvSpPr>
+          <p:cNvPr id="15" name="Text 12"/>
+          <p:cNvSpPr/>
+          <p:nvPr/>
+        </p:nvSpPr>
+        <p:spPr>
+          <a:xfrm>
+            <a:off x="2743200" y="2103120"/>
+            <a:ext cx="1737360" cy="365760"/>
+          </a:xfrm>
+          <a:prstGeom prst="rect">
+            <a:avLst/>
+          </a:prstGeom>
+          <a:noFill/>
+          <a:ln/>
+        </p:spPr>
+        <p:txBody>
+          <a:bodyPr wrap="square" lIns="0" tIns="0" rIns="0" bIns="0" rtlCol="0" anchor="ctr"/>
+          <a:lstStyle/>
+          <a:p>
+            <a:pPr algn="ctr" indent="0" marL="0">
+              <a:buNone/>
+            </a:pPr>
+            <a:r>
+              <a:rPr lang="en-US" sz="1700" b="1" dirty="0">
+                <a:solidFill>
+                  <a:srgbClr val="1E2761"/>
+                </a:solidFill>
+                <a:latin typeface="Georgia" pitchFamily="34" charset="0"/>
+                <a:ea typeface="Georgia" pitchFamily="34" charset="-122"/>
+                <a:cs typeface="Georgia" pitchFamily="34" charset="-120"/>
+              </a:rPr>
+              <a:t>Analyse</a:t>
+            </a:r>
+            <a:endParaRPr lang="en-US" sz="1700" dirty="0"/>
+          </a:p>
+        </p:txBody>
+      </p:sp>
+      <p:sp>
+        <p:nvSpPr>
+          <p:cNvPr id="16" name="Text 13"/>
+          <p:cNvSpPr/>
+          <p:nvPr/>
+        </p:nvSpPr>
+        <p:spPr>
+          <a:xfrm>
+            <a:off x="2743200" y="2468880"/>
+            <a:ext cx="1737360" cy="640080"/>
+          </a:xfrm>
+          <a:prstGeom prst="rect">
+            <a:avLst/>
+          </a:prstGeom>
+          <a:noFill/>
+          <a:ln/>
+        </p:spPr>
+        <p:txBody>
+          <a:bodyPr wrap="square" lIns="0" tIns="0" rIns="0" bIns="0" rtlCol="0" anchor="ctr"/>
+          <a:lstStyle/>
+          <a:p>
+            <a:pPr algn="ctr" indent="0" marL="0">
+              <a:buNone/>
+            </a:pPr>
+            <a:r>
+              <a:rPr lang="en-US" sz="1100" dirty="0">
+                <a:solidFill>
+                  <a:srgbClr val="6C757D"/>
+                </a:solidFill>
+                <a:latin typeface="Calibri" pitchFamily="34" charset="0"/>
+                <a:ea typeface="Calibri" pitchFamily="34" charset="-122"/>
+                <a:cs typeface="Calibri" pitchFamily="34" charset="-120"/>
+              </a:rPr>
+              <a:t>AI identifies burnout patterns from 13 key factors</a:t>
+            </a:r>
+            <a:endParaRPr lang="en-US" sz="1100" dirty="0"/>
+          </a:p>
+        </p:txBody>
+      </p:sp>
+      <p:sp>
+        <p:nvSpPr>
+          <p:cNvPr id="17" name="Shape 14"/>
+          <p:cNvSpPr/>
+          <p:nvPr/>
+        </p:nvSpPr>
+        <p:spPr>
+          <a:xfrm>
+            <a:off x="5349240" y="1005840"/>
+            <a:ext cx="914400" cy="914400"/>
+          </a:xfrm>
+          <a:prstGeom prst="ellipse">
+            <a:avLst/>
+          </a:prstGeom>
+          <a:solidFill>
+            <a:srgbClr val="FFFFFF"/>
+          </a:solidFill>
+          <a:ln/>
+          <a:effectLst>
+            <a:outerShdw sx="100000" sy="100000" kx="0" ky="0" algn="bl" rotWithShape="0" blurRad="76200" dist="25400" dir="8100000">
+              <a:srgbClr val="000000">
+                <a:alpha val="12000"/>
+              </a:srgbClr>
+            </a:outerShdw>
+          </a:effectLst>
+        </p:spPr>
+      </p:sp>
+      <p:sp>
+        <p:nvSpPr>
+          <p:cNvPr id="18" name="Shape 15"/>
+          <p:cNvSpPr/>
+          <p:nvPr/>
+        </p:nvSpPr>
+        <p:spPr>
+          <a:xfrm>
+            <a:off x="5349240" y="1005840"/>
+            <a:ext cx="914400" cy="914400"/>
+          </a:xfrm>
+          <a:prstGeom prst="ellipse">
+            <a:avLst/>
+          </a:prstGeom>
+          <a:solidFill>
+            <a:srgbClr val="F96167"/>
+          </a:solidFill>
+          <a:ln/>
+        </p:spPr>
+      </p:sp>
+      <p:sp>
+        <p:nvSpPr>
+          <p:cNvPr id="19" name="Text 16"/>
+          <p:cNvSpPr/>
+          <p:nvPr/>
+        </p:nvSpPr>
+        <p:spPr>
+          <a:xfrm>
+            <a:off x="5349240" y="1005840"/>
+            <a:ext cx="914400" cy="914400"/>
+          </a:xfrm>
+          <a:prstGeom prst="rect">
+            <a:avLst/>
+          </a:prstGeom>
+          <a:noFill/>
+          <a:ln/>
+        </p:spPr>
+        <p:txBody>
+          <a:bodyPr wrap="square" lIns="0" tIns="0" rIns="0" bIns="0" rtlCol="0" anchor="ctr"/>
+          <a:lstStyle/>
+          <a:p>
+            <a:pPr algn="ctr" indent="0" marL="0">
+              <a:buNone/>
+            </a:pPr>
+            <a:r>
+              <a:rPr lang="en-US" sz="2800" b="1" dirty="0">
+                <a:solidFill>
+                  <a:srgbClr val="FFFFFF"/>
+                </a:solidFill>
+                <a:latin typeface="Georgia" pitchFamily="34" charset="0"/>
+                <a:ea typeface="Georgia" pitchFamily="34" charset="-122"/>
+                <a:cs typeface="Georgia" pitchFamily="34" charset="-120"/>
+              </a:rPr>
+              <a:t>3</a:t>
+            </a:r>
+            <a:endParaRPr lang="en-US" sz="2800" dirty="0"/>
+          </a:p>
+        </p:txBody>
+      </p:sp>
+      <p:sp>
+        <p:nvSpPr>
+          <p:cNvPr id="20" name="Shape 17"/>
+          <p:cNvSpPr/>
+          <p:nvPr/>
+        </p:nvSpPr>
+        <p:spPr>
+          <a:xfrm>
+            <a:off x="6400800" y="1463040"/>
+            <a:ext cx="731520" cy="0"/>
+          </a:xfrm>
+          <a:prstGeom prst="line">
+            <a:avLst/>
+          </a:prstGeom>
+          <a:noFill/>
+          <a:ln w="25400">
+            <a:solidFill>
+              <a:srgbClr val="ADB5BD"/>
+            </a:solidFill>
+            <a:prstDash val="solid"/>
+          </a:ln>
+        </p:spPr>
+      </p:sp>
+      <p:sp>
+        <p:nvSpPr>
+          <p:cNvPr id="21" name="Text 18"/>
+          <p:cNvSpPr/>
+          <p:nvPr/>
+        </p:nvSpPr>
+        <p:spPr>
+          <a:xfrm>
+            <a:off x="4937760" y="2103120"/>
+            <a:ext cx="1737360" cy="365760"/>
+          </a:xfrm>
+          <a:prstGeom prst="rect">
+            <a:avLst/>
+          </a:prstGeom>
+          <a:noFill/>
+          <a:ln/>
+        </p:spPr>
+        <p:txBody>
+          <a:bodyPr wrap="square" lIns="0" tIns="0" rIns="0" bIns="0" rtlCol="0" anchor="ctr"/>
+          <a:lstStyle/>
+          <a:p>
+            <a:pPr algn="ctr" indent="0" marL="0">
+              <a:buNone/>
+            </a:pPr>
+            <a:r>
+              <a:rPr lang="en-US" sz="1700" b="1" dirty="0">
+                <a:solidFill>
+                  <a:srgbClr val="1E2761"/>
+                </a:solidFill>
+                <a:latin typeface="Georgia" pitchFamily="34" charset="0"/>
+                <a:ea typeface="Georgia" pitchFamily="34" charset="-122"/>
+                <a:cs typeface="Georgia" pitchFamily="34" charset="-120"/>
+              </a:rPr>
+              <a:t>Predict</a:t>
+            </a:r>
+            <a:endParaRPr lang="en-US" sz="1700" dirty="0"/>
+          </a:p>
+        </p:txBody>
+      </p:sp>
+      <p:sp>
+        <p:nvSpPr>
+          <p:cNvPr id="22" name="Text 19"/>
+          <p:cNvSpPr/>
+          <p:nvPr/>
+        </p:nvSpPr>
+        <p:spPr>
+          <a:xfrm>
+            <a:off x="4937760" y="2468880"/>
+            <a:ext cx="1737360" cy="640080"/>
+          </a:xfrm>
+          <a:prstGeom prst="rect">
+            <a:avLst/>
+          </a:prstGeom>
+          <a:noFill/>
+          <a:ln/>
+        </p:spPr>
+        <p:txBody>
+          <a:bodyPr wrap="square" lIns="0" tIns="0" rIns="0" bIns="0" rtlCol="0" anchor="ctr"/>
+          <a:lstStyle/>
+          <a:p>
+            <a:pPr algn="ctr" indent="0" marL="0">
+              <a:buNone/>
+            </a:pPr>
+            <a:r>
+              <a:rPr lang="en-US" sz="1100" dirty="0">
+                <a:solidFill>
+                  <a:srgbClr val="6C757D"/>
+                </a:solidFill>
+                <a:latin typeface="Calibri" pitchFamily="34" charset="0"/>
+                <a:ea typeface="Calibri" pitchFamily="34" charset="-122"/>
+                <a:cs typeface="Calibri" pitchFamily="34" charset="-120"/>
+              </a:rPr>
+              <a:t>Each employee gets a risk score (0-100%)</a:t>
+            </a:r>
+            <a:endParaRPr lang="en-US" sz="1100" dirty="0"/>
+          </a:p>
+        </p:txBody>
+      </p:sp>
+      <p:sp>
+        <p:nvSpPr>
+          <p:cNvPr id="23" name="Shape 20"/>
+          <p:cNvSpPr/>
+          <p:nvPr/>
+        </p:nvSpPr>
+        <p:spPr>
+          <a:xfrm>
+            <a:off x="7543800" y="1005840"/>
+            <a:ext cx="914400" cy="914400"/>
+          </a:xfrm>
+          <a:prstGeom prst="ellipse">
+            <a:avLst/>
+          </a:prstGeom>
+          <a:solidFill>
+            <a:srgbClr val="FFFFFF"/>
+          </a:solidFill>
+          <a:ln/>
+          <a:effectLst>
+            <a:outerShdw sx="100000" sy="100000" kx="0" ky="0" algn="bl" rotWithShape="0" blurRad="76200" dist="25400" dir="8100000">
+              <a:srgbClr val="000000">
+                <a:alpha val="12000"/>
+              </a:srgbClr>
+            </a:outerShdw>
+          </a:effectLst>
+        </p:spPr>
+      </p:sp>
+      <p:sp>
+        <p:nvSpPr>
+          <p:cNvPr id="24" name="Shape 21"/>
+          <p:cNvSpPr/>
+          <p:nvPr/>
+        </p:nvSpPr>
+        <p:spPr>
+          <a:xfrm>
+            <a:off x="7543800" y="1005840"/>
+            <a:ext cx="914400" cy="914400"/>
+          </a:xfrm>
+          <a:prstGeom prst="ellipse">
+            <a:avLst/>
+          </a:prstGeom>
+          <a:solidFill>
+            <a:srgbClr val="F96167"/>
+          </a:solidFill>
+          <a:ln/>
+        </p:spPr>
+      </p:sp>
+      <p:sp>
+        <p:nvSpPr>
+          <p:cNvPr id="25" name="Text 22"/>
+          <p:cNvSpPr/>
+          <p:nvPr/>
+        </p:nvSpPr>
+        <p:spPr>
+          <a:xfrm>
+            <a:off x="7543800" y="1005840"/>
+            <a:ext cx="914400" cy="914400"/>
+          </a:xfrm>
+          <a:prstGeom prst="rect">
+            <a:avLst/>
+          </a:prstGeom>
+          <a:noFill/>
+          <a:ln/>
+        </p:spPr>
+        <p:txBody>
+          <a:bodyPr wrap="square" lIns="0" tIns="0" rIns="0" bIns="0" rtlCol="0" anchor="ctr"/>
+          <a:lstStyle/>
+          <a:p>
+            <a:pPr algn="ctr" indent="0" marL="0">
+              <a:buNone/>
+            </a:pPr>
+            <a:r>
+              <a:rPr lang="en-US" sz="2800" b="1" dirty="0">
+                <a:solidFill>
+                  <a:srgbClr val="FFFFFF"/>
+                </a:solidFill>
+                <a:latin typeface="Georgia" pitchFamily="34" charset="0"/>
+                <a:ea typeface="Georgia" pitchFamily="34" charset="-122"/>
+                <a:cs typeface="Georgia" pitchFamily="34" charset="-120"/>
+              </a:rPr>
+              <a:t>4</a:t>
+            </a:r>
+            <a:endParaRPr lang="en-US" sz="2800" dirty="0"/>
+          </a:p>
+        </p:txBody>
+      </p:sp>
+      <p:sp>
+        <p:nvSpPr>
+          <p:cNvPr id="26" name="Text 23"/>
+          <p:cNvSpPr/>
+          <p:nvPr/>
+        </p:nvSpPr>
+        <p:spPr>
+          <a:xfrm>
+            <a:off x="7132320" y="2103120"/>
+            <a:ext cx="1737360" cy="365760"/>
+          </a:xfrm>
+          <a:prstGeom prst="rect">
+            <a:avLst/>
+          </a:prstGeom>
+          <a:noFill/>
+          <a:ln/>
+        </p:spPr>
+        <p:txBody>
+          <a:bodyPr wrap="square" lIns="0" tIns="0" rIns="0" bIns="0" rtlCol="0" anchor="ctr"/>
+          <a:lstStyle/>
+          <a:p>
+            <a:pPr algn="ctr" indent="0" marL="0">
+              <a:buNone/>
+            </a:pPr>
+            <a:r>
+              <a:rPr lang="en-US" sz="1700" b="1" dirty="0">
+                <a:solidFill>
+                  <a:srgbClr val="1E2761"/>
+                </a:solidFill>
+                <a:latin typeface="Georgia" pitchFamily="34" charset="0"/>
+                <a:ea typeface="Georgia" pitchFamily="34" charset="-122"/>
+                <a:cs typeface="Georgia" pitchFamily="34" charset="-120"/>
+              </a:rPr>
+              <a:t>Act</a:t>
+            </a:r>
+            <a:endParaRPr lang="en-US" sz="1700" dirty="0"/>
+          </a:p>
+        </p:txBody>
+      </p:sp>
+      <p:sp>
+        <p:nvSpPr>
+          <p:cNvPr id="27" name="Text 24"/>
+          <p:cNvSpPr/>
+          <p:nvPr/>
+        </p:nvSpPr>
+        <p:spPr>
+          <a:xfrm>
+            <a:off x="7132320" y="2468880"/>
+            <a:ext cx="1737360" cy="640080"/>
+          </a:xfrm>
+          <a:prstGeom prst="rect">
+            <a:avLst/>
+          </a:prstGeom>
+          <a:noFill/>
+          <a:ln/>
+        </p:spPr>
+        <p:txBody>
+          <a:bodyPr wrap="square" lIns="0" tIns="0" rIns="0" bIns="0" rtlCol="0" anchor="ctr"/>
+          <a:lstStyle/>
+          <a:p>
+            <a:pPr algn="ctr" indent="0" marL="0">
+              <a:buNone/>
+            </a:pPr>
+            <a:r>
+              <a:rPr lang="en-US" sz="1100" dirty="0">
+                <a:solidFill>
+                  <a:srgbClr val="6C757D"/>
+                </a:solidFill>
+                <a:latin typeface="Calibri" pitchFamily="34" charset="0"/>
+                <a:ea typeface="Calibri" pitchFamily="34" charset="-122"/>
+                <a:cs typeface="Calibri" pitchFamily="34" charset="-120"/>
+              </a:rPr>
+              <a:t>Managers receive alerts + intervention guidance</a:t>
+            </a:r>
+            <a:endParaRPr lang="en-US" sz="1100" dirty="0"/>
+          </a:p>
+        </p:txBody>
+      </p:sp>
+      <p:pic>
+        <p:nvPicPr>
+          <p:cNvPr id="28" name="Image 1" descr="preencoded.png">    </p:cNvPr>
+          <p:cNvPicPr>
+            <a:picLocks noChangeAspect="1"/>
+          </p:cNvPicPr>
+          <p:nvPr/>
+        </p:nvPicPr>
+        <p:blipFill>
+          <a:blip r:embed="rId2"/>
+          <a:stretch>
+            <a:fillRect/>
+          </a:stretch>
+        </p:blipFill>
+        <p:spPr>
+          <a:xfrm>
+            <a:off x="1097280" y="3383280"/>
+            <a:ext cx="365760" cy="365760"/>
+          </a:xfrm>
+          <a:prstGeom prst="rect">
+            <a:avLst/>
+          </a:prstGeom>
+        </p:spPr>
+      </p:pic>
+      <p:pic>
+        <p:nvPicPr>
+          <p:cNvPr id="29" name="Image 2" descr="preencoded.png">    </p:cNvPr>
           <p:cNvPicPr>
             <a:picLocks noChangeAspect="1"/>
           </p:cNvPicPr>
@@ -5852,7 +6873,7 @@
         </p:blipFill>
         <p:spPr>
           <a:xfrm>
-            <a:off x="731520" y="228600"/>
+            <a:off x="3291840" y="3383280"/>
             <a:ext cx="365760" cy="365760"/>
           </a:xfrm>
           <a:prstGeom prst="rect">
@@ -5860,773 +6881,9 @@
           </a:prstGeom>
         </p:spPr>
       </p:pic>
-      <p:sp>
-        <p:nvSpPr>
-          <p:cNvPr id="4" name="Text 1"/>
-          <p:cNvSpPr/>
-          <p:nvPr/>
-        </p:nvSpPr>
-        <p:spPr>
-          <a:xfrm>
-            <a:off x="1234440" y="228600"/>
-            <a:ext cx="7315200" cy="548640"/>
-          </a:xfrm>
-          <a:prstGeom prst="rect">
-            <a:avLst/>
-          </a:prstGeom>
-          <a:noFill/>
-          <a:ln/>
-        </p:spPr>
-        <p:txBody>
-          <a:bodyPr wrap="square" lIns="0" tIns="0" rIns="0" bIns="0" rtlCol="0" anchor="ctr"/>
-          <a:lstStyle/>
-          <a:p>
-            <a:pPr marL="0" indent="0">
-              <a:buNone/>
-            </a:pPr>
-            <a:r>
-              <a:rPr lang="en-US" sz="3400" b="1" dirty="0">
-                <a:solidFill>
-                  <a:srgbClr val="1E2761"/>
-                </a:solidFill>
-                <a:latin typeface="Georgia" pitchFamily="34" charset="0"/>
-                <a:ea typeface="Georgia" pitchFamily="34" charset="-122"/>
-                <a:cs typeface="Georgia" pitchFamily="34" charset="-120"/>
-              </a:rPr>
-              <a:t>How It Works</a:t>
-            </a:r>
-            <a:endParaRPr lang="en-US" sz="3400" dirty="0"/>
-          </a:p>
-        </p:txBody>
-      </p:sp>
-      <p:sp>
-        <p:nvSpPr>
-          <p:cNvPr id="5" name="Shape 2"/>
-          <p:cNvSpPr/>
-          <p:nvPr/>
-        </p:nvSpPr>
-        <p:spPr>
-          <a:xfrm>
-            <a:off x="960120" y="1005840"/>
-            <a:ext cx="914400" cy="914400"/>
-          </a:xfrm>
-          <a:prstGeom prst="ellipse">
-            <a:avLst/>
-          </a:prstGeom>
-          <a:solidFill>
-            <a:srgbClr val="FFFFFF"/>
-          </a:solidFill>
-          <a:ln/>
-          <a:effectLst>
-            <a:outerShdw blurRad="76200" dist="25400" dir="8100000" algn="bl" rotWithShape="0">
-              <a:srgbClr val="000000">
-                <a:alpha val="12000"/>
-              </a:srgbClr>
-            </a:outerShdw>
-          </a:effectLst>
-        </p:spPr>
-      </p:sp>
-      <p:sp>
-        <p:nvSpPr>
-          <p:cNvPr id="6" name="Shape 3"/>
-          <p:cNvSpPr/>
-          <p:nvPr/>
-        </p:nvSpPr>
-        <p:spPr>
-          <a:xfrm>
-            <a:off x="960120" y="1005840"/>
-            <a:ext cx="914400" cy="914400"/>
-          </a:xfrm>
-          <a:prstGeom prst="ellipse">
-            <a:avLst/>
-          </a:prstGeom>
-          <a:solidFill>
-            <a:srgbClr val="F96167"/>
-          </a:solidFill>
-          <a:ln/>
-        </p:spPr>
-      </p:sp>
-      <p:sp>
-        <p:nvSpPr>
-          <p:cNvPr id="7" name="Text 4"/>
-          <p:cNvSpPr/>
-          <p:nvPr/>
-        </p:nvSpPr>
-        <p:spPr>
-          <a:xfrm>
-            <a:off x="960120" y="1005840"/>
-            <a:ext cx="914400" cy="914400"/>
-          </a:xfrm>
-          <a:prstGeom prst="rect">
-            <a:avLst/>
-          </a:prstGeom>
-          <a:noFill/>
-          <a:ln/>
-        </p:spPr>
-        <p:txBody>
-          <a:bodyPr wrap="square" lIns="0" tIns="0" rIns="0" bIns="0" rtlCol="0" anchor="ctr"/>
-          <a:lstStyle/>
-          <a:p>
-            <a:pPr marL="0" indent="0" algn="ctr">
-              <a:buNone/>
-            </a:pPr>
-            <a:r>
-              <a:rPr lang="en-US" sz="2800" b="1" dirty="0">
-                <a:solidFill>
-                  <a:srgbClr val="FFFFFF"/>
-                </a:solidFill>
-                <a:latin typeface="Georgia" pitchFamily="34" charset="0"/>
-                <a:ea typeface="Georgia" pitchFamily="34" charset="-122"/>
-                <a:cs typeface="Georgia" pitchFamily="34" charset="-120"/>
-              </a:rPr>
-              <a:t>1</a:t>
-            </a:r>
-            <a:endParaRPr lang="en-US" sz="2800" dirty="0"/>
-          </a:p>
-        </p:txBody>
-      </p:sp>
-      <p:sp>
-        <p:nvSpPr>
-          <p:cNvPr id="8" name="Shape 5"/>
-          <p:cNvSpPr/>
-          <p:nvPr/>
-        </p:nvSpPr>
-        <p:spPr>
-          <a:xfrm>
-            <a:off x="2011680" y="1463040"/>
-            <a:ext cx="731520" cy="0"/>
-          </a:xfrm>
-          <a:prstGeom prst="line">
-            <a:avLst/>
-          </a:prstGeom>
-          <a:noFill/>
-          <a:ln w="25400">
-            <a:solidFill>
-              <a:srgbClr val="ADB5BD"/>
-            </a:solidFill>
-            <a:prstDash val="solid"/>
-          </a:ln>
-        </p:spPr>
-      </p:sp>
-      <p:sp>
-        <p:nvSpPr>
-          <p:cNvPr id="9" name="Text 6"/>
-          <p:cNvSpPr/>
-          <p:nvPr/>
-        </p:nvSpPr>
-        <p:spPr>
-          <a:xfrm>
-            <a:off x="548640" y="2103120"/>
-            <a:ext cx="1737360" cy="365760"/>
-          </a:xfrm>
-          <a:prstGeom prst="rect">
-            <a:avLst/>
-          </a:prstGeom>
-          <a:noFill/>
-          <a:ln/>
-        </p:spPr>
-        <p:txBody>
-          <a:bodyPr wrap="square" lIns="0" tIns="0" rIns="0" bIns="0" rtlCol="0" anchor="ctr"/>
-          <a:lstStyle/>
-          <a:p>
-            <a:pPr marL="0" indent="0" algn="ctr">
-              <a:buNone/>
-            </a:pPr>
-            <a:r>
-              <a:rPr lang="en-US" sz="1700" b="1" dirty="0">
-                <a:solidFill>
-                  <a:srgbClr val="1E2761"/>
-                </a:solidFill>
-                <a:latin typeface="Georgia" pitchFamily="34" charset="0"/>
-                <a:ea typeface="Georgia" pitchFamily="34" charset="-122"/>
-                <a:cs typeface="Georgia" pitchFamily="34" charset="-120"/>
-              </a:rPr>
-              <a:t>Collect</a:t>
-            </a:r>
-            <a:endParaRPr lang="en-US" sz="1700" dirty="0"/>
-          </a:p>
-        </p:txBody>
-      </p:sp>
-      <p:sp>
-        <p:nvSpPr>
-          <p:cNvPr id="10" name="Text 7"/>
-          <p:cNvSpPr/>
-          <p:nvPr/>
-        </p:nvSpPr>
-        <p:spPr>
-          <a:xfrm>
-            <a:off x="548640" y="2468880"/>
-            <a:ext cx="1737360" cy="640080"/>
-          </a:xfrm>
-          <a:prstGeom prst="rect">
-            <a:avLst/>
-          </a:prstGeom>
-          <a:noFill/>
-          <a:ln/>
-        </p:spPr>
-        <p:txBody>
-          <a:bodyPr wrap="square" lIns="0" tIns="0" rIns="0" bIns="0" rtlCol="0" anchor="ctr"/>
-          <a:lstStyle/>
-          <a:p>
-            <a:pPr marL="0" indent="0" algn="ctr">
-              <a:buNone/>
-            </a:pPr>
-            <a:r>
-              <a:rPr lang="en-US" sz="1100" dirty="0">
-                <a:solidFill>
-                  <a:srgbClr val="6C757D"/>
-                </a:solidFill>
-                <a:latin typeface="Calibri" pitchFamily="34" charset="0"/>
-                <a:ea typeface="Calibri" pitchFamily="34" charset="-122"/>
-                <a:cs typeface="Calibri" pitchFamily="34" charset="-120"/>
-              </a:rPr>
-              <a:t>HR survey data, work hours, satisfaction scores</a:t>
-            </a:r>
-            <a:endParaRPr lang="en-US" sz="1100" dirty="0"/>
-          </a:p>
-        </p:txBody>
-      </p:sp>
-      <p:sp>
-        <p:nvSpPr>
-          <p:cNvPr id="11" name="Shape 8"/>
-          <p:cNvSpPr/>
-          <p:nvPr/>
-        </p:nvSpPr>
-        <p:spPr>
-          <a:xfrm>
-            <a:off x="3154680" y="1005840"/>
-            <a:ext cx="914400" cy="914400"/>
-          </a:xfrm>
-          <a:prstGeom prst="ellipse">
-            <a:avLst/>
-          </a:prstGeom>
-          <a:solidFill>
-            <a:srgbClr val="FFFFFF"/>
-          </a:solidFill>
-          <a:ln/>
-          <a:effectLst>
-            <a:outerShdw blurRad="76200" dist="25400" dir="8100000" algn="bl" rotWithShape="0">
-              <a:srgbClr val="000000">
-                <a:alpha val="12000"/>
-              </a:srgbClr>
-            </a:outerShdw>
-          </a:effectLst>
-        </p:spPr>
-      </p:sp>
-      <p:sp>
-        <p:nvSpPr>
-          <p:cNvPr id="12" name="Shape 9"/>
-          <p:cNvSpPr/>
-          <p:nvPr/>
-        </p:nvSpPr>
-        <p:spPr>
-          <a:xfrm>
-            <a:off x="3154680" y="1005840"/>
-            <a:ext cx="914400" cy="914400"/>
-          </a:xfrm>
-          <a:prstGeom prst="ellipse">
-            <a:avLst/>
-          </a:prstGeom>
-          <a:solidFill>
-            <a:srgbClr val="F96167"/>
-          </a:solidFill>
-          <a:ln/>
-        </p:spPr>
-      </p:sp>
-      <p:sp>
-        <p:nvSpPr>
-          <p:cNvPr id="13" name="Text 10"/>
-          <p:cNvSpPr/>
-          <p:nvPr/>
-        </p:nvSpPr>
-        <p:spPr>
-          <a:xfrm>
-            <a:off x="3154680" y="1005840"/>
-            <a:ext cx="914400" cy="914400"/>
-          </a:xfrm>
-          <a:prstGeom prst="rect">
-            <a:avLst/>
-          </a:prstGeom>
-          <a:noFill/>
-          <a:ln/>
-        </p:spPr>
-        <p:txBody>
-          <a:bodyPr wrap="square" lIns="0" tIns="0" rIns="0" bIns="0" rtlCol="0" anchor="ctr"/>
-          <a:lstStyle/>
-          <a:p>
-            <a:pPr marL="0" indent="0" algn="ctr">
-              <a:buNone/>
-            </a:pPr>
-            <a:r>
-              <a:rPr lang="en-US" sz="2800" b="1" dirty="0">
-                <a:solidFill>
-                  <a:srgbClr val="FFFFFF"/>
-                </a:solidFill>
-                <a:latin typeface="Georgia" pitchFamily="34" charset="0"/>
-                <a:ea typeface="Georgia" pitchFamily="34" charset="-122"/>
-                <a:cs typeface="Georgia" pitchFamily="34" charset="-120"/>
-              </a:rPr>
-              <a:t>2</a:t>
-            </a:r>
-            <a:endParaRPr lang="en-US" sz="2800" dirty="0"/>
-          </a:p>
-        </p:txBody>
-      </p:sp>
-      <p:sp>
-        <p:nvSpPr>
-          <p:cNvPr id="14" name="Shape 11"/>
-          <p:cNvSpPr/>
-          <p:nvPr/>
-        </p:nvSpPr>
-        <p:spPr>
-          <a:xfrm>
-            <a:off x="4206240" y="1463040"/>
-            <a:ext cx="731520" cy="0"/>
-          </a:xfrm>
-          <a:prstGeom prst="line">
-            <a:avLst/>
-          </a:prstGeom>
-          <a:noFill/>
-          <a:ln w="25400">
-            <a:solidFill>
-              <a:srgbClr val="ADB5BD"/>
-            </a:solidFill>
-            <a:prstDash val="solid"/>
-          </a:ln>
-        </p:spPr>
-      </p:sp>
-      <p:sp>
-        <p:nvSpPr>
-          <p:cNvPr id="15" name="Text 12"/>
-          <p:cNvSpPr/>
-          <p:nvPr/>
-        </p:nvSpPr>
-        <p:spPr>
-          <a:xfrm>
-            <a:off x="2743200" y="2103120"/>
-            <a:ext cx="1737360" cy="365760"/>
-          </a:xfrm>
-          <a:prstGeom prst="rect">
-            <a:avLst/>
-          </a:prstGeom>
-          <a:noFill/>
-          <a:ln/>
-        </p:spPr>
-        <p:txBody>
-          <a:bodyPr wrap="square" lIns="0" tIns="0" rIns="0" bIns="0" rtlCol="0" anchor="ctr"/>
-          <a:lstStyle/>
-          <a:p>
-            <a:pPr marL="0" indent="0" algn="ctr">
-              <a:buNone/>
-            </a:pPr>
-            <a:r>
-              <a:rPr lang="en-US" sz="1700" b="1" dirty="0">
-                <a:solidFill>
-                  <a:srgbClr val="1E2761"/>
-                </a:solidFill>
-                <a:latin typeface="Georgia" pitchFamily="34" charset="0"/>
-                <a:ea typeface="Georgia" pitchFamily="34" charset="-122"/>
-                <a:cs typeface="Georgia" pitchFamily="34" charset="-120"/>
-              </a:rPr>
-              <a:t>Analyse</a:t>
-            </a:r>
-            <a:endParaRPr lang="en-US" sz="1700" dirty="0"/>
-          </a:p>
-        </p:txBody>
-      </p:sp>
-      <p:sp>
-        <p:nvSpPr>
-          <p:cNvPr id="16" name="Text 13"/>
-          <p:cNvSpPr/>
-          <p:nvPr/>
-        </p:nvSpPr>
-        <p:spPr>
-          <a:xfrm>
-            <a:off x="2743200" y="2468880"/>
-            <a:ext cx="1737360" cy="640080"/>
-          </a:xfrm>
-          <a:prstGeom prst="rect">
-            <a:avLst/>
-          </a:prstGeom>
-          <a:noFill/>
-          <a:ln/>
-        </p:spPr>
-        <p:txBody>
-          <a:bodyPr wrap="square" lIns="0" tIns="0" rIns="0" bIns="0" rtlCol="0" anchor="ctr"/>
-          <a:lstStyle/>
-          <a:p>
-            <a:pPr marL="0" indent="0" algn="ctr">
-              <a:buNone/>
-            </a:pPr>
-            <a:r>
-              <a:rPr lang="en-US" sz="1100" dirty="0">
-                <a:solidFill>
-                  <a:srgbClr val="6C757D"/>
-                </a:solidFill>
-                <a:latin typeface="Calibri" pitchFamily="34" charset="0"/>
-                <a:ea typeface="Calibri" pitchFamily="34" charset="-122"/>
-                <a:cs typeface="Calibri" pitchFamily="34" charset="-120"/>
-              </a:rPr>
-              <a:t>AI identifies burnout patterns from 13 key factors</a:t>
-            </a:r>
-            <a:endParaRPr lang="en-US" sz="1100" dirty="0"/>
-          </a:p>
-        </p:txBody>
-      </p:sp>
-      <p:sp>
-        <p:nvSpPr>
-          <p:cNvPr id="17" name="Shape 14"/>
-          <p:cNvSpPr/>
-          <p:nvPr/>
-        </p:nvSpPr>
-        <p:spPr>
-          <a:xfrm>
-            <a:off x="5349240" y="1005840"/>
-            <a:ext cx="914400" cy="914400"/>
-          </a:xfrm>
-          <a:prstGeom prst="ellipse">
-            <a:avLst/>
-          </a:prstGeom>
-          <a:solidFill>
-            <a:srgbClr val="FFFFFF"/>
-          </a:solidFill>
-          <a:ln/>
-          <a:effectLst>
-            <a:outerShdw blurRad="76200" dist="25400" dir="8100000" algn="bl" rotWithShape="0">
-              <a:srgbClr val="000000">
-                <a:alpha val="12000"/>
-              </a:srgbClr>
-            </a:outerShdw>
-          </a:effectLst>
-        </p:spPr>
-      </p:sp>
-      <p:sp>
-        <p:nvSpPr>
-          <p:cNvPr id="18" name="Shape 15"/>
-          <p:cNvSpPr/>
-          <p:nvPr/>
-        </p:nvSpPr>
-        <p:spPr>
-          <a:xfrm>
-            <a:off x="5349240" y="1005840"/>
-            <a:ext cx="914400" cy="914400"/>
-          </a:xfrm>
-          <a:prstGeom prst="ellipse">
-            <a:avLst/>
-          </a:prstGeom>
-          <a:solidFill>
-            <a:srgbClr val="F96167"/>
-          </a:solidFill>
-          <a:ln/>
-        </p:spPr>
-      </p:sp>
-      <p:sp>
-        <p:nvSpPr>
-          <p:cNvPr id="19" name="Text 16"/>
-          <p:cNvSpPr/>
-          <p:nvPr/>
-        </p:nvSpPr>
-        <p:spPr>
-          <a:xfrm>
-            <a:off x="5349240" y="1005840"/>
-            <a:ext cx="914400" cy="914400"/>
-          </a:xfrm>
-          <a:prstGeom prst="rect">
-            <a:avLst/>
-          </a:prstGeom>
-          <a:noFill/>
-          <a:ln/>
-        </p:spPr>
-        <p:txBody>
-          <a:bodyPr wrap="square" lIns="0" tIns="0" rIns="0" bIns="0" rtlCol="0" anchor="ctr"/>
-          <a:lstStyle/>
-          <a:p>
-            <a:pPr marL="0" indent="0" algn="ctr">
-              <a:buNone/>
-            </a:pPr>
-            <a:r>
-              <a:rPr lang="en-US" sz="2800" b="1" dirty="0">
-                <a:solidFill>
-                  <a:srgbClr val="FFFFFF"/>
-                </a:solidFill>
-                <a:latin typeface="Georgia" pitchFamily="34" charset="0"/>
-                <a:ea typeface="Georgia" pitchFamily="34" charset="-122"/>
-                <a:cs typeface="Georgia" pitchFamily="34" charset="-120"/>
-              </a:rPr>
-              <a:t>3</a:t>
-            </a:r>
-            <a:endParaRPr lang="en-US" sz="2800" dirty="0"/>
-          </a:p>
-        </p:txBody>
-      </p:sp>
-      <p:sp>
-        <p:nvSpPr>
-          <p:cNvPr id="20" name="Shape 17"/>
-          <p:cNvSpPr/>
-          <p:nvPr/>
-        </p:nvSpPr>
-        <p:spPr>
-          <a:xfrm>
-            <a:off x="6400800" y="1463040"/>
-            <a:ext cx="731520" cy="0"/>
-          </a:xfrm>
-          <a:prstGeom prst="line">
-            <a:avLst/>
-          </a:prstGeom>
-          <a:noFill/>
-          <a:ln w="25400">
-            <a:solidFill>
-              <a:srgbClr val="ADB5BD"/>
-            </a:solidFill>
-            <a:prstDash val="solid"/>
-          </a:ln>
-        </p:spPr>
-      </p:sp>
-      <p:sp>
-        <p:nvSpPr>
-          <p:cNvPr id="21" name="Text 18"/>
-          <p:cNvSpPr/>
-          <p:nvPr/>
-        </p:nvSpPr>
-        <p:spPr>
-          <a:xfrm>
-            <a:off x="4937760" y="2103120"/>
-            <a:ext cx="1737360" cy="365760"/>
-          </a:xfrm>
-          <a:prstGeom prst="rect">
-            <a:avLst/>
-          </a:prstGeom>
-          <a:noFill/>
-          <a:ln/>
-        </p:spPr>
-        <p:txBody>
-          <a:bodyPr wrap="square" lIns="0" tIns="0" rIns="0" bIns="0" rtlCol="0" anchor="ctr"/>
-          <a:lstStyle/>
-          <a:p>
-            <a:pPr marL="0" indent="0" algn="ctr">
-              <a:buNone/>
-            </a:pPr>
-            <a:r>
-              <a:rPr lang="en-US" sz="1700" b="1" dirty="0">
-                <a:solidFill>
-                  <a:srgbClr val="1E2761"/>
-                </a:solidFill>
-                <a:latin typeface="Georgia" pitchFamily="34" charset="0"/>
-                <a:ea typeface="Georgia" pitchFamily="34" charset="-122"/>
-                <a:cs typeface="Georgia" pitchFamily="34" charset="-120"/>
-              </a:rPr>
-              <a:t>Predict</a:t>
-            </a:r>
-            <a:endParaRPr lang="en-US" sz="1700" dirty="0"/>
-          </a:p>
-        </p:txBody>
-      </p:sp>
-      <p:sp>
-        <p:nvSpPr>
-          <p:cNvPr id="22" name="Text 19"/>
-          <p:cNvSpPr/>
-          <p:nvPr/>
-        </p:nvSpPr>
-        <p:spPr>
-          <a:xfrm>
-            <a:off x="4937760" y="2468880"/>
-            <a:ext cx="1737360" cy="640080"/>
-          </a:xfrm>
-          <a:prstGeom prst="rect">
-            <a:avLst/>
-          </a:prstGeom>
-          <a:noFill/>
-          <a:ln/>
-        </p:spPr>
-        <p:txBody>
-          <a:bodyPr wrap="square" lIns="0" tIns="0" rIns="0" bIns="0" rtlCol="0" anchor="ctr"/>
-          <a:lstStyle/>
-          <a:p>
-            <a:pPr marL="0" indent="0" algn="ctr">
-              <a:buNone/>
-            </a:pPr>
-            <a:r>
-              <a:rPr lang="en-US" sz="1100" dirty="0">
-                <a:solidFill>
-                  <a:srgbClr val="6C757D"/>
-                </a:solidFill>
-                <a:latin typeface="Calibri" pitchFamily="34" charset="0"/>
-                <a:ea typeface="Calibri" pitchFamily="34" charset="-122"/>
-                <a:cs typeface="Calibri" pitchFamily="34" charset="-120"/>
-              </a:rPr>
-              <a:t>Each employee gets a risk score (0-100%)</a:t>
-            </a:r>
-            <a:endParaRPr lang="en-US" sz="1100" dirty="0"/>
-          </a:p>
-        </p:txBody>
-      </p:sp>
-      <p:sp>
-        <p:nvSpPr>
-          <p:cNvPr id="23" name="Shape 20"/>
-          <p:cNvSpPr/>
-          <p:nvPr/>
-        </p:nvSpPr>
-        <p:spPr>
-          <a:xfrm>
-            <a:off x="7543800" y="1005840"/>
-            <a:ext cx="914400" cy="914400"/>
-          </a:xfrm>
-          <a:prstGeom prst="ellipse">
-            <a:avLst/>
-          </a:prstGeom>
-          <a:solidFill>
-            <a:srgbClr val="FFFFFF"/>
-          </a:solidFill>
-          <a:ln/>
-          <a:effectLst>
-            <a:outerShdw blurRad="76200" dist="25400" dir="8100000" algn="bl" rotWithShape="0">
-              <a:srgbClr val="000000">
-                <a:alpha val="12000"/>
-              </a:srgbClr>
-            </a:outerShdw>
-          </a:effectLst>
-        </p:spPr>
-      </p:sp>
-      <p:sp>
-        <p:nvSpPr>
-          <p:cNvPr id="24" name="Shape 21"/>
-          <p:cNvSpPr/>
-          <p:nvPr/>
-        </p:nvSpPr>
-        <p:spPr>
-          <a:xfrm>
-            <a:off x="7543800" y="1005840"/>
-            <a:ext cx="914400" cy="914400"/>
-          </a:xfrm>
-          <a:prstGeom prst="ellipse">
-            <a:avLst/>
-          </a:prstGeom>
-          <a:solidFill>
-            <a:srgbClr val="F96167"/>
-          </a:solidFill>
-          <a:ln/>
-        </p:spPr>
-      </p:sp>
-      <p:sp>
-        <p:nvSpPr>
-          <p:cNvPr id="25" name="Text 22"/>
-          <p:cNvSpPr/>
-          <p:nvPr/>
-        </p:nvSpPr>
-        <p:spPr>
-          <a:xfrm>
-            <a:off x="7543800" y="1005840"/>
-            <a:ext cx="914400" cy="914400"/>
-          </a:xfrm>
-          <a:prstGeom prst="rect">
-            <a:avLst/>
-          </a:prstGeom>
-          <a:noFill/>
-          <a:ln/>
-        </p:spPr>
-        <p:txBody>
-          <a:bodyPr wrap="square" lIns="0" tIns="0" rIns="0" bIns="0" rtlCol="0" anchor="ctr"/>
-          <a:lstStyle/>
-          <a:p>
-            <a:pPr marL="0" indent="0" algn="ctr">
-              <a:buNone/>
-            </a:pPr>
-            <a:r>
-              <a:rPr lang="en-US" sz="2800" b="1" dirty="0">
-                <a:solidFill>
-                  <a:srgbClr val="FFFFFF"/>
-                </a:solidFill>
-                <a:latin typeface="Georgia" pitchFamily="34" charset="0"/>
-                <a:ea typeface="Georgia" pitchFamily="34" charset="-122"/>
-                <a:cs typeface="Georgia" pitchFamily="34" charset="-120"/>
-              </a:rPr>
-              <a:t>4</a:t>
-            </a:r>
-            <a:endParaRPr lang="en-US" sz="2800" dirty="0"/>
-          </a:p>
-        </p:txBody>
-      </p:sp>
-      <p:sp>
-        <p:nvSpPr>
-          <p:cNvPr id="26" name="Text 23"/>
-          <p:cNvSpPr/>
-          <p:nvPr/>
-        </p:nvSpPr>
-        <p:spPr>
-          <a:xfrm>
-            <a:off x="7132320" y="2103120"/>
-            <a:ext cx="1737360" cy="365760"/>
-          </a:xfrm>
-          <a:prstGeom prst="rect">
-            <a:avLst/>
-          </a:prstGeom>
-          <a:noFill/>
-          <a:ln/>
-        </p:spPr>
-        <p:txBody>
-          <a:bodyPr wrap="square" lIns="0" tIns="0" rIns="0" bIns="0" rtlCol="0" anchor="ctr"/>
-          <a:lstStyle/>
-          <a:p>
-            <a:pPr marL="0" indent="0" algn="ctr">
-              <a:buNone/>
-            </a:pPr>
-            <a:r>
-              <a:rPr lang="en-US" sz="1700" b="1" dirty="0">
-                <a:solidFill>
-                  <a:srgbClr val="1E2761"/>
-                </a:solidFill>
-                <a:latin typeface="Georgia" pitchFamily="34" charset="0"/>
-                <a:ea typeface="Georgia" pitchFamily="34" charset="-122"/>
-                <a:cs typeface="Georgia" pitchFamily="34" charset="-120"/>
-              </a:rPr>
-              <a:t>Act</a:t>
-            </a:r>
-            <a:endParaRPr lang="en-US" sz="1700" dirty="0"/>
-          </a:p>
-        </p:txBody>
-      </p:sp>
-      <p:sp>
-        <p:nvSpPr>
-          <p:cNvPr id="27" name="Text 24"/>
-          <p:cNvSpPr/>
-          <p:nvPr/>
-        </p:nvSpPr>
-        <p:spPr>
-          <a:xfrm>
-            <a:off x="7132320" y="2468880"/>
-            <a:ext cx="1737360" cy="640080"/>
-          </a:xfrm>
-          <a:prstGeom prst="rect">
-            <a:avLst/>
-          </a:prstGeom>
-          <a:noFill/>
-          <a:ln/>
-        </p:spPr>
-        <p:txBody>
-          <a:bodyPr wrap="square" lIns="0" tIns="0" rIns="0" bIns="0" rtlCol="0" anchor="ctr"/>
-          <a:lstStyle/>
-          <a:p>
-            <a:pPr marL="0" indent="0" algn="ctr">
-              <a:buNone/>
-            </a:pPr>
-            <a:r>
-              <a:rPr lang="en-US" sz="1100" dirty="0">
-                <a:solidFill>
-                  <a:srgbClr val="6C757D"/>
-                </a:solidFill>
-                <a:latin typeface="Calibri" pitchFamily="34" charset="0"/>
-                <a:ea typeface="Calibri" pitchFamily="34" charset="-122"/>
-                <a:cs typeface="Calibri" pitchFamily="34" charset="-120"/>
-              </a:rPr>
-              <a:t>Managers receive alerts + intervention guidance</a:t>
-            </a:r>
-            <a:endParaRPr lang="en-US" sz="1100" dirty="0"/>
-          </a:p>
-        </p:txBody>
-      </p:sp>
       <p:pic>
         <p:nvPicPr>
-          <p:cNvPr id="28" name="Image 1" descr="preencoded.png"/>
+          <p:cNvPr id="30" name="Image 3" descr="preencoded.png">    </p:cNvPr>
           <p:cNvPicPr>
             <a:picLocks noChangeAspect="1"/>
           </p:cNvPicPr>
@@ -6640,7 +6897,7 @@
         </p:blipFill>
         <p:spPr>
           <a:xfrm>
-            <a:off x="1097280" y="3383280"/>
+            <a:off x="5486400" y="3383280"/>
             <a:ext cx="365760" cy="365760"/>
           </a:xfrm>
           <a:prstGeom prst="rect">
@@ -6650,7 +6907,7 @@
       </p:pic>
       <p:pic>
         <p:nvPicPr>
-          <p:cNvPr id="29" name="Image 2" descr="preencoded.png"/>
+          <p:cNvPr id="31" name="Image 4" descr="preencoded.png">    </p:cNvPr>
           <p:cNvPicPr>
             <a:picLocks noChangeAspect="1"/>
           </p:cNvPicPr>
@@ -6664,54 +6921,6 @@
         </p:blipFill>
         <p:spPr>
           <a:xfrm>
-            <a:off x="3291840" y="3383280"/>
-            <a:ext cx="365760" cy="365760"/>
-          </a:xfrm>
-          <a:prstGeom prst="rect">
-            <a:avLst/>
-          </a:prstGeom>
-        </p:spPr>
-      </p:pic>
-      <p:pic>
-        <p:nvPicPr>
-          <p:cNvPr id="30" name="Image 3" descr="preencoded.png"/>
-          <p:cNvPicPr>
-            <a:picLocks noChangeAspect="1"/>
-          </p:cNvPicPr>
-          <p:nvPr/>
-        </p:nvPicPr>
-        <p:blipFill>
-          <a:blip r:embed="rId6"/>
-          <a:stretch>
-            <a:fillRect/>
-          </a:stretch>
-        </p:blipFill>
-        <p:spPr>
-          <a:xfrm>
-            <a:off x="5486400" y="3383280"/>
-            <a:ext cx="365760" cy="365760"/>
-          </a:xfrm>
-          <a:prstGeom prst="rect">
-            <a:avLst/>
-          </a:prstGeom>
-        </p:spPr>
-      </p:pic>
-      <p:pic>
-        <p:nvPicPr>
-          <p:cNvPr id="31" name="Image 4" descr="preencoded.png"/>
-          <p:cNvPicPr>
-            <a:picLocks noChangeAspect="1"/>
-          </p:cNvPicPr>
-          <p:nvPr/>
-        </p:nvPicPr>
-        <p:blipFill>
-          <a:blip r:embed="rId7"/>
-          <a:stretch>
-            <a:fillRect/>
-          </a:stretch>
-        </p:blipFill>
-        <p:spPr>
-          <a:xfrm>
             <a:off x="7680960" y="3383280"/>
             <a:ext cx="365760" cy="365760"/>
           </a:xfrm>
@@ -6739,7 +6948,7 @@
           </a:solidFill>
           <a:ln/>
           <a:effectLst>
-            <a:outerShdw blurRad="76200" dist="25400" dir="8100000" algn="bl" rotWithShape="0">
+            <a:outerShdw sx="100000" sy="100000" kx="0" ky="0" algn="bl" rotWithShape="0" blurRad="76200" dist="25400" dir="8100000">
               <a:srgbClr val="000000">
                 <a:alpha val="12000"/>
               </a:srgbClr>
@@ -6768,7 +6977,7 @@
           <a:bodyPr wrap="square" lIns="0" tIns="0" rIns="0" bIns="0" rtlCol="0" anchor="ctr"/>
           <a:lstStyle/>
           <a:p>
-            <a:pPr marL="0" indent="0">
+            <a:pPr indent="0" marL="0">
               <a:buNone/>
             </a:pPr>
             <a:r>
@@ -6782,6 +6991,9 @@
               </a:rPr>
               <a:t>Data Foundation: </a:t>
             </a:r>
+            <a:pPr indent="0" marL="0">
+              <a:buNone/>
+            </a:pPr>
             <a:r>
               <a:rPr lang="en-US" sz="1100" dirty="0">
                 <a:solidFill>
@@ -6813,7 +7025,6 @@
         <a:solidFill>
           <a:srgbClr val="1E2761"/>
         </a:solidFill>
-        <a:effectLst/>
       </p:bgPr>
     </p:bg>
     <p:spTree>
@@ -6852,7 +7063,322 @@
       </p:sp>
       <p:pic>
         <p:nvPicPr>
-          <p:cNvPr id="3" name="Image 0" descr="preencoded.png"/>
+          <p:cNvPr id="3" name="Image 0" descr="preencoded.png">    </p:cNvPr>
+          <p:cNvPicPr>
+            <a:picLocks noChangeAspect="1"/>
+          </p:cNvPicPr>
+          <p:nvPr/>
+        </p:nvPicPr>
+        <p:blipFill>
+          <a:blip r:embed="rId1"/>
+          <a:stretch>
+            <a:fillRect/>
+          </a:stretch>
+        </p:blipFill>
+        <p:spPr>
+          <a:xfrm>
+            <a:off x="731520" y="228600"/>
+            <a:ext cx="411480" cy="411480"/>
+          </a:xfrm>
+          <a:prstGeom prst="rect">
+            <a:avLst/>
+          </a:prstGeom>
+        </p:spPr>
+      </p:pic>
+      <p:sp>
+        <p:nvSpPr>
+          <p:cNvPr id="4" name="Text 1"/>
+          <p:cNvSpPr/>
+          <p:nvPr/>
+        </p:nvSpPr>
+        <p:spPr>
+          <a:xfrm>
+            <a:off x="1280160" y="228600"/>
+            <a:ext cx="7315200" cy="548640"/>
+          </a:xfrm>
+          <a:prstGeom prst="rect">
+            <a:avLst/>
+          </a:prstGeom>
+          <a:noFill/>
+          <a:ln/>
+        </p:spPr>
+        <p:txBody>
+          <a:bodyPr wrap="square" lIns="0" tIns="0" rIns="0" bIns="0" rtlCol="0" anchor="ctr"/>
+          <a:lstStyle/>
+          <a:p>
+            <a:pPr indent="0" marL="0">
+              <a:buNone/>
+            </a:pPr>
+            <a:r>
+              <a:rPr lang="en-US" sz="3400" b="1" dirty="0">
+                <a:solidFill>
+                  <a:srgbClr val="FFFFFF"/>
+                </a:solidFill>
+                <a:latin typeface="Georgia" pitchFamily="34" charset="0"/>
+                <a:ea typeface="Georgia" pitchFamily="34" charset="-122"/>
+                <a:cs typeface="Georgia" pitchFamily="34" charset="-120"/>
+              </a:rPr>
+              <a:t>Key Results</a:t>
+            </a:r>
+            <a:endParaRPr lang="en-US" sz="3400" dirty="0"/>
+          </a:p>
+        </p:txBody>
+      </p:sp>
+      <p:sp>
+        <p:nvSpPr>
+          <p:cNvPr id="5" name="Shape 2"/>
+          <p:cNvSpPr/>
+          <p:nvPr/>
+        </p:nvSpPr>
+        <p:spPr>
+          <a:xfrm>
+            <a:off x="731520" y="1097280"/>
+            <a:ext cx="2468880" cy="2743200"/>
+          </a:xfrm>
+          <a:prstGeom prst="rect">
+            <a:avLst/>
+          </a:prstGeom>
+          <a:solidFill>
+            <a:srgbClr val="0F1B3D"/>
+          </a:solidFill>
+          <a:ln/>
+          <a:effectLst>
+            <a:outerShdw sx="100000" sy="100000" kx="0" ky="0" algn="bl" rotWithShape="0" blurRad="76200" dist="25400" dir="8100000">
+              <a:srgbClr val="000000">
+                <a:alpha val="12000"/>
+              </a:srgbClr>
+            </a:outerShdw>
+          </a:effectLst>
+        </p:spPr>
+      </p:sp>
+      <p:sp>
+        <p:nvSpPr>
+          <p:cNvPr id="6" name="Shape 3"/>
+          <p:cNvSpPr/>
+          <p:nvPr/>
+        </p:nvSpPr>
+        <p:spPr>
+          <a:xfrm>
+            <a:off x="731520" y="1097280"/>
+            <a:ext cx="2468880" cy="45720"/>
+          </a:xfrm>
+          <a:prstGeom prst="rect">
+            <a:avLst/>
+          </a:prstGeom>
+          <a:solidFill>
+            <a:srgbClr val="F9E795"/>
+          </a:solidFill>
+          <a:ln/>
+        </p:spPr>
+      </p:sp>
+      <p:pic>
+        <p:nvPicPr>
+          <p:cNvPr id="7" name="Image 1" descr="preencoded.png">    </p:cNvPr>
+          <p:cNvPicPr>
+            <a:picLocks noChangeAspect="1"/>
+          </p:cNvPicPr>
+          <p:nvPr/>
+        </p:nvPicPr>
+        <p:blipFill>
+          <a:blip r:embed="rId2"/>
+          <a:stretch>
+            <a:fillRect/>
+          </a:stretch>
+        </p:blipFill>
+        <p:spPr>
+          <a:xfrm>
+            <a:off x="1645920" y="1280160"/>
+            <a:ext cx="502920" cy="502920"/>
+          </a:xfrm>
+          <a:prstGeom prst="rect">
+            <a:avLst/>
+          </a:prstGeom>
+        </p:spPr>
+      </p:pic>
+      <p:sp>
+        <p:nvSpPr>
+          <p:cNvPr id="8" name="Text 4"/>
+          <p:cNvSpPr/>
+          <p:nvPr/>
+        </p:nvSpPr>
+        <p:spPr>
+          <a:xfrm>
+            <a:off x="731520" y="1828800"/>
+            <a:ext cx="2468880" cy="914400"/>
+          </a:xfrm>
+          <a:prstGeom prst="rect">
+            <a:avLst/>
+          </a:prstGeom>
+          <a:noFill/>
+          <a:ln/>
+        </p:spPr>
+        <p:txBody>
+          <a:bodyPr wrap="square" lIns="0" tIns="0" rIns="0" bIns="0" rtlCol="0" anchor="ctr"/>
+          <a:lstStyle/>
+          <a:p>
+            <a:pPr algn="ctr" indent="0" marL="0">
+              <a:buNone/>
+            </a:pPr>
+            <a:r>
+              <a:rPr lang="en-US" sz="4800" b="1" dirty="0">
+                <a:solidFill>
+                  <a:srgbClr val="F9E795"/>
+                </a:solidFill>
+                <a:latin typeface="Georgia" pitchFamily="34" charset="0"/>
+                <a:ea typeface="Georgia" pitchFamily="34" charset="-122"/>
+                <a:cs typeface="Georgia" pitchFamily="34" charset="-120"/>
+              </a:rPr>
+              <a:t>91%</a:t>
+            </a:r>
+            <a:endParaRPr lang="en-US" sz="4800" dirty="0"/>
+          </a:p>
+        </p:txBody>
+      </p:sp>
+      <p:sp>
+        <p:nvSpPr>
+          <p:cNvPr id="9" name="Text 5"/>
+          <p:cNvSpPr/>
+          <p:nvPr/>
+        </p:nvSpPr>
+        <p:spPr>
+          <a:xfrm>
+            <a:off x="731520" y="2743200"/>
+            <a:ext cx="2468880" cy="320040"/>
+          </a:xfrm>
+          <a:prstGeom prst="rect">
+            <a:avLst/>
+          </a:prstGeom>
+          <a:noFill/>
+          <a:ln/>
+        </p:spPr>
+        <p:txBody>
+          <a:bodyPr wrap="square" lIns="0" tIns="0" rIns="0" bIns="0" rtlCol="0" anchor="ctr"/>
+          <a:lstStyle/>
+          <a:p>
+            <a:pPr algn="ctr" indent="0" marL="0">
+              <a:buNone/>
+            </a:pPr>
+            <a:r>
+              <a:rPr lang="en-US" sz="1500" b="1" dirty="0">
+                <a:solidFill>
+                  <a:srgbClr val="FFFFFF"/>
+                </a:solidFill>
+                <a:latin typeface="Calibri" pitchFamily="34" charset="0"/>
+                <a:ea typeface="Calibri" pitchFamily="34" charset="-122"/>
+                <a:cs typeface="Calibri" pitchFamily="34" charset="-120"/>
+              </a:rPr>
+              <a:t>F1 Score</a:t>
+            </a:r>
+            <a:endParaRPr lang="en-US" sz="1500" dirty="0"/>
+          </a:p>
+        </p:txBody>
+      </p:sp>
+      <p:sp>
+        <p:nvSpPr>
+          <p:cNvPr id="10" name="Text 6"/>
+          <p:cNvSpPr/>
+          <p:nvPr/>
+        </p:nvSpPr>
+        <p:spPr>
+          <a:xfrm>
+            <a:off x="1005840" y="3108960"/>
+            <a:ext cx="1920240" cy="548640"/>
+          </a:xfrm>
+          <a:prstGeom prst="rect">
+            <a:avLst/>
+          </a:prstGeom>
+          <a:noFill/>
+          <a:ln/>
+        </p:spPr>
+        <p:txBody>
+          <a:bodyPr wrap="square" lIns="0" tIns="0" rIns="0" bIns="0" rtlCol="0" anchor="ctr"/>
+          <a:lstStyle/>
+          <a:p>
+            <a:pPr algn="ctr" indent="0" marL="0">
+              <a:buNone/>
+            </a:pPr>
+            <a:r>
+              <a:rPr lang="en-US" sz="1000" dirty="0">
+                <a:solidFill>
+                  <a:srgbClr val="ADB5BD"/>
+                </a:solidFill>
+                <a:latin typeface="Calibri" pitchFamily="34" charset="0"/>
+                <a:ea typeface="Calibri" pitchFamily="34" charset="-122"/>
+                <a:cs typeface="Calibri" pitchFamily="34" charset="-120"/>
+              </a:rPr>
+              <a:t>Best-in-class balance of</a:t>
+            </a:r>
+            <a:endParaRPr lang="en-US" sz="1000" dirty="0"/>
+          </a:p>
+          <a:p>
+            <a:pPr algn="ctr" indent="0" marL="0">
+              <a:buNone/>
+            </a:pPr>
+            <a:r>
+              <a:rPr lang="en-US" sz="1000" dirty="0">
+                <a:solidFill>
+                  <a:srgbClr val="ADB5BD"/>
+                </a:solidFill>
+                <a:latin typeface="Calibri" pitchFamily="34" charset="0"/>
+                <a:ea typeface="Calibri" pitchFamily="34" charset="-122"/>
+                <a:cs typeface="Calibri" pitchFamily="34" charset="-120"/>
+              </a:rPr>
+              <a:t>precision and recall</a:t>
+            </a:r>
+            <a:endParaRPr lang="en-US" sz="1000" dirty="0"/>
+          </a:p>
+        </p:txBody>
+      </p:sp>
+      <p:sp>
+        <p:nvSpPr>
+          <p:cNvPr id="11" name="Shape 7"/>
+          <p:cNvSpPr/>
+          <p:nvPr/>
+        </p:nvSpPr>
+        <p:spPr>
+          <a:xfrm>
+            <a:off x="3566160" y="1097280"/>
+            <a:ext cx="2468880" cy="2743200"/>
+          </a:xfrm>
+          <a:prstGeom prst="rect">
+            <a:avLst/>
+          </a:prstGeom>
+          <a:solidFill>
+            <a:srgbClr val="0F1B3D"/>
+          </a:solidFill>
+          <a:ln/>
+          <a:effectLst>
+            <a:outerShdw sx="100000" sy="100000" kx="0" ky="0" algn="bl" rotWithShape="0" blurRad="76200" dist="25400" dir="8100000">
+              <a:srgbClr val="000000">
+                <a:alpha val="12000"/>
+              </a:srgbClr>
+            </a:outerShdw>
+          </a:effectLst>
+        </p:spPr>
+      </p:sp>
+      <p:sp>
+        <p:nvSpPr>
+          <p:cNvPr id="12" name="Shape 8"/>
+          <p:cNvSpPr/>
+          <p:nvPr/>
+        </p:nvSpPr>
+        <p:spPr>
+          <a:xfrm>
+            <a:off x="3566160" y="1097280"/>
+            <a:ext cx="2468880" cy="45720"/>
+          </a:xfrm>
+          <a:prstGeom prst="rect">
+            <a:avLst/>
+          </a:prstGeom>
+          <a:solidFill>
+            <a:srgbClr val="F9E795"/>
+          </a:solidFill>
+          <a:ln/>
+        </p:spPr>
+      </p:sp>
+      <p:pic>
+        <p:nvPicPr>
+          <p:cNvPr id="13" name="Image 2" descr="preencoded.png">    </p:cNvPr>
           <p:cNvPicPr>
             <a:picLocks noChangeAspect="1"/>
           </p:cNvPicPr>
@@ -6866,8 +7392,8 @@
         </p:blipFill>
         <p:spPr>
           <a:xfrm>
-            <a:off x="731520" y="228600"/>
-            <a:ext cx="411480" cy="411480"/>
+            <a:off x="4480560" y="1280160"/>
+            <a:ext cx="502920" cy="502920"/>
           </a:xfrm>
           <a:prstGeom prst="rect">
             <a:avLst/>
@@ -6876,14 +7402,14 @@
       </p:pic>
       <p:sp>
         <p:nvSpPr>
-          <p:cNvPr id="4" name="Text 1"/>
-          <p:cNvSpPr/>
-          <p:nvPr/>
-        </p:nvSpPr>
-        <p:spPr>
-          <a:xfrm>
-            <a:off x="1280160" y="228600"/>
-            <a:ext cx="7315200" cy="548640"/>
+          <p:cNvPr id="14" name="Text 9"/>
+          <p:cNvSpPr/>
+          <p:nvPr/>
+        </p:nvSpPr>
+        <p:spPr>
+          <a:xfrm>
+            <a:off x="3566160" y="1828800"/>
+            <a:ext cx="2468880" cy="914400"/>
           </a:xfrm>
           <a:prstGeom prst="rect">
             <a:avLst/>
@@ -6895,33 +7421,128 @@
           <a:bodyPr wrap="square" lIns="0" tIns="0" rIns="0" bIns="0" rtlCol="0" anchor="ctr"/>
           <a:lstStyle/>
           <a:p>
-            <a:pPr marL="0" indent="0">
-              <a:buNone/>
-            </a:pPr>
-            <a:r>
-              <a:rPr lang="en-US" sz="3400" b="1" dirty="0">
-                <a:solidFill>
-                  <a:srgbClr val="FFFFFF"/>
+            <a:pPr algn="ctr" indent="0" marL="0">
+              <a:buNone/>
+            </a:pPr>
+            <a:r>
+              <a:rPr lang="en-US" sz="4800" b="1" dirty="0">
+                <a:solidFill>
+                  <a:srgbClr val="F9E795"/>
                 </a:solidFill>
                 <a:latin typeface="Georgia" pitchFamily="34" charset="0"/>
                 <a:ea typeface="Georgia" pitchFamily="34" charset="-122"/>
                 <a:cs typeface="Georgia" pitchFamily="34" charset="-120"/>
               </a:rPr>
-              <a:t>Key Results</a:t>
-            </a:r>
-            <a:endParaRPr lang="en-US" sz="3400" dirty="0"/>
-          </a:p>
-        </p:txBody>
-      </p:sp>
-      <p:sp>
-        <p:nvSpPr>
-          <p:cNvPr id="5" name="Shape 2"/>
-          <p:cNvSpPr/>
-          <p:nvPr/>
-        </p:nvSpPr>
-        <p:spPr>
-          <a:xfrm>
-            <a:off x="731520" y="1097280"/>
+              <a:t>99%</a:t>
+            </a:r>
+            <a:endParaRPr lang="en-US" sz="4800" dirty="0"/>
+          </a:p>
+        </p:txBody>
+      </p:sp>
+      <p:sp>
+        <p:nvSpPr>
+          <p:cNvPr id="15" name="Text 10"/>
+          <p:cNvSpPr/>
+          <p:nvPr/>
+        </p:nvSpPr>
+        <p:spPr>
+          <a:xfrm>
+            <a:off x="3566160" y="2743200"/>
+            <a:ext cx="2468880" cy="320040"/>
+          </a:xfrm>
+          <a:prstGeom prst="rect">
+            <a:avLst/>
+          </a:prstGeom>
+          <a:noFill/>
+          <a:ln/>
+        </p:spPr>
+        <p:txBody>
+          <a:bodyPr wrap="square" lIns="0" tIns="0" rIns="0" bIns="0" rtlCol="0" anchor="ctr"/>
+          <a:lstStyle/>
+          <a:p>
+            <a:pPr algn="ctr" indent="0" marL="0">
+              <a:buNone/>
+            </a:pPr>
+            <a:r>
+              <a:rPr lang="en-US" sz="1500" b="1" dirty="0">
+                <a:solidFill>
+                  <a:srgbClr val="FFFFFF"/>
+                </a:solidFill>
+                <a:latin typeface="Calibri" pitchFamily="34" charset="0"/>
+                <a:ea typeface="Calibri" pitchFamily="34" charset="-122"/>
+                <a:cs typeface="Calibri" pitchFamily="34" charset="-120"/>
+              </a:rPr>
+              <a:t>AUC Score</a:t>
+            </a:r>
+            <a:endParaRPr lang="en-US" sz="1500" dirty="0"/>
+          </a:p>
+        </p:txBody>
+      </p:sp>
+      <p:sp>
+        <p:nvSpPr>
+          <p:cNvPr id="16" name="Text 11"/>
+          <p:cNvSpPr/>
+          <p:nvPr/>
+        </p:nvSpPr>
+        <p:spPr>
+          <a:xfrm>
+            <a:off x="3840480" y="3108960"/>
+            <a:ext cx="1920240" cy="548640"/>
+          </a:xfrm>
+          <a:prstGeom prst="rect">
+            <a:avLst/>
+          </a:prstGeom>
+          <a:noFill/>
+          <a:ln/>
+        </p:spPr>
+        <p:txBody>
+          <a:bodyPr wrap="square" lIns="0" tIns="0" rIns="0" bIns="0" rtlCol="0" anchor="ctr"/>
+          <a:lstStyle/>
+          <a:p>
+            <a:pPr algn="ctr" indent="0" marL="0">
+              <a:buNone/>
+            </a:pPr>
+            <a:r>
+              <a:rPr lang="en-US" sz="1000" dirty="0">
+                <a:solidFill>
+                  <a:srgbClr val="ADB5BD"/>
+                </a:solidFill>
+                <a:latin typeface="Calibri" pitchFamily="34" charset="0"/>
+                <a:ea typeface="Calibri" pitchFamily="34" charset="-122"/>
+                <a:cs typeface="Calibri" pitchFamily="34" charset="-120"/>
+              </a:rPr>
+              <a:t>Near-perfect discrimination</a:t>
+            </a:r>
+            <a:endParaRPr lang="en-US" sz="1000" dirty="0"/>
+          </a:p>
+          <a:p>
+            <a:pPr algn="ctr" indent="0" marL="0">
+              <a:buNone/>
+            </a:pPr>
+            <a:r>
+              <a:rPr lang="en-US" sz="1000" dirty="0">
+                <a:solidFill>
+                  <a:srgbClr val="ADB5BD"/>
+                </a:solidFill>
+                <a:latin typeface="Calibri" pitchFamily="34" charset="0"/>
+                <a:ea typeface="Calibri" pitchFamily="34" charset="-122"/>
+                <a:cs typeface="Calibri" pitchFamily="34" charset="-120"/>
+              </a:rPr>
+              <a:t>between risk groups</a:t>
+            </a:r>
+            <a:endParaRPr lang="en-US" sz="1000" dirty="0"/>
+          </a:p>
+        </p:txBody>
+      </p:sp>
+      <p:sp>
+        <p:nvSpPr>
+          <p:cNvPr id="17" name="Shape 12"/>
+          <p:cNvSpPr/>
+          <p:nvPr/>
+        </p:nvSpPr>
+        <p:spPr>
+          <a:xfrm>
+            <a:off x="6400800" y="1097280"/>
             <a:ext cx="2468880" cy="2743200"/>
           </a:xfrm>
           <a:prstGeom prst="rect">
@@ -6932,7 +7553,7 @@
           </a:solidFill>
           <a:ln/>
           <a:effectLst>
-            <a:outerShdw blurRad="76200" dist="25400" dir="8100000" algn="bl" rotWithShape="0">
+            <a:outerShdw sx="100000" sy="100000" kx="0" ky="0" algn="bl" rotWithShape="0" blurRad="76200" dist="25400" dir="8100000">
               <a:srgbClr val="000000">
                 <a:alpha val="12000"/>
               </a:srgbClr>
@@ -6942,13 +7563,13 @@
       </p:sp>
       <p:sp>
         <p:nvSpPr>
-          <p:cNvPr id="6" name="Shape 3"/>
-          <p:cNvSpPr/>
-          <p:nvPr/>
-        </p:nvSpPr>
-        <p:spPr>
-          <a:xfrm>
-            <a:off x="731520" y="1097280"/>
+          <p:cNvPr id="18" name="Shape 13"/>
+          <p:cNvSpPr/>
+          <p:nvPr/>
+        </p:nvSpPr>
+        <p:spPr>
+          <a:xfrm>
+            <a:off x="6400800" y="1097280"/>
             <a:ext cx="2468880" cy="45720"/>
           </a:xfrm>
           <a:prstGeom prst="rect">
@@ -6962,7 +7583,7 @@
       </p:sp>
       <p:pic>
         <p:nvPicPr>
-          <p:cNvPr id="7" name="Image 1" descr="preencoded.png"/>
+          <p:cNvPr id="19" name="Image 3" descr="preencoded.png">    </p:cNvPr>
           <p:cNvPicPr>
             <a:picLocks noChangeAspect="1"/>
           </p:cNvPicPr>
@@ -6976,7 +7597,7 @@
         </p:blipFill>
         <p:spPr>
           <a:xfrm>
-            <a:off x="1645920" y="1280160"/>
+            <a:off x="7315200" y="1280160"/>
             <a:ext cx="502920" cy="502920"/>
           </a:xfrm>
           <a:prstGeom prst="rect">
@@ -6986,13 +7607,13 @@
       </p:pic>
       <p:sp>
         <p:nvSpPr>
-          <p:cNvPr id="8" name="Text 4"/>
-          <p:cNvSpPr/>
-          <p:nvPr/>
-        </p:nvSpPr>
-        <p:spPr>
-          <a:xfrm>
-            <a:off x="731520" y="1828800"/>
+          <p:cNvPr id="20" name="Text 14"/>
+          <p:cNvSpPr/>
+          <p:nvPr/>
+        </p:nvSpPr>
+        <p:spPr>
+          <a:xfrm>
+            <a:off x="6400800" y="1828800"/>
             <a:ext cx="2468880" cy="914400"/>
           </a:xfrm>
           <a:prstGeom prst="rect">
@@ -7005,7 +7626,7 @@
           <a:bodyPr wrap="square" lIns="0" tIns="0" rIns="0" bIns="0" rtlCol="0" anchor="ctr"/>
           <a:lstStyle/>
           <a:p>
-            <a:pPr marL="0" indent="0" algn="ctr">
+            <a:pPr algn="ctr" indent="0" marL="0">
               <a:buNone/>
             </a:pPr>
             <a:r>
@@ -7017,7 +7638,7 @@
                 <a:ea typeface="Georgia" pitchFamily="34" charset="-122"/>
                 <a:cs typeface="Georgia" pitchFamily="34" charset="-120"/>
               </a:rPr>
-              <a:t>91%</a:t>
+              <a:t>90%</a:t>
             </a:r>
             <a:endParaRPr lang="en-US" sz="4800" dirty="0"/>
           </a:p>
@@ -7025,13 +7646,13 @@
       </p:sp>
       <p:sp>
         <p:nvSpPr>
-          <p:cNvPr id="9" name="Text 5"/>
-          <p:cNvSpPr/>
-          <p:nvPr/>
-        </p:nvSpPr>
-        <p:spPr>
-          <a:xfrm>
-            <a:off x="731520" y="2743200"/>
+          <p:cNvPr id="21" name="Text 15"/>
+          <p:cNvSpPr/>
+          <p:nvPr/>
+        </p:nvSpPr>
+        <p:spPr>
+          <a:xfrm>
+            <a:off x="6400800" y="2743200"/>
             <a:ext cx="2468880" cy="320040"/>
           </a:xfrm>
           <a:prstGeom prst="rect">
@@ -7044,7 +7665,7 @@
           <a:bodyPr wrap="square" lIns="0" tIns="0" rIns="0" bIns="0" rtlCol="0" anchor="ctr"/>
           <a:lstStyle/>
           <a:p>
-            <a:pPr marL="0" indent="0" algn="ctr">
+            <a:pPr algn="ctr" indent="0" marL="0">
               <a:buNone/>
             </a:pPr>
             <a:r>
@@ -7056,7 +7677,7 @@
                 <a:ea typeface="Calibri" pitchFamily="34" charset="-122"/>
                 <a:cs typeface="Calibri" pitchFamily="34" charset="-120"/>
               </a:rPr>
-              <a:t>F1 Score</a:t>
+              <a:t>Recall</a:t>
             </a:r>
             <a:endParaRPr lang="en-US" sz="1500" dirty="0"/>
           </a:p>
@@ -7064,13 +7685,13 @@
       </p:sp>
       <p:sp>
         <p:nvSpPr>
-          <p:cNvPr id="10" name="Text 6"/>
-          <p:cNvSpPr/>
-          <p:nvPr/>
-        </p:nvSpPr>
-        <p:spPr>
-          <a:xfrm>
-            <a:off x="1005840" y="3108960"/>
+          <p:cNvPr id="22" name="Text 16"/>
+          <p:cNvSpPr/>
+          <p:nvPr/>
+        </p:nvSpPr>
+        <p:spPr>
+          <a:xfrm>
+            <a:off x="6675120" y="3108960"/>
             <a:ext cx="1920240" cy="548640"/>
           </a:xfrm>
           <a:prstGeom prst="rect">
@@ -7083,7 +7704,7 @@
           <a:bodyPr wrap="square" lIns="0" tIns="0" rIns="0" bIns="0" rtlCol="0" anchor="ctr"/>
           <a:lstStyle/>
           <a:p>
-            <a:pPr marL="0" indent="0" algn="ctr">
+            <a:pPr algn="ctr" indent="0" marL="0">
               <a:buNone/>
             </a:pPr>
             <a:r>
@@ -7095,12 +7716,12 @@
                 <a:ea typeface="Calibri" pitchFamily="34" charset="-122"/>
                 <a:cs typeface="Calibri" pitchFamily="34" charset="-120"/>
               </a:rPr>
-              <a:t>Best-in-class balance of</a:t>
+              <a:t>Catches 90% of all</a:t>
             </a:r>
             <a:endParaRPr lang="en-US" sz="1000" dirty="0"/>
           </a:p>
           <a:p>
-            <a:pPr marL="0" indent="0" algn="ctr">
+            <a:pPr algn="ctr" indent="0" marL="0">
               <a:buNone/>
             </a:pPr>
             <a:r>
@@ -7112,416 +7733,6 @@
                 <a:ea typeface="Calibri" pitchFamily="34" charset="-122"/>
                 <a:cs typeface="Calibri" pitchFamily="34" charset="-120"/>
               </a:rPr>
-              <a:t>precision and recall</a:t>
-            </a:r>
-            <a:endParaRPr lang="en-US" sz="1000" dirty="0"/>
-          </a:p>
-        </p:txBody>
-      </p:sp>
-      <p:sp>
-        <p:nvSpPr>
-          <p:cNvPr id="11" name="Shape 7"/>
-          <p:cNvSpPr/>
-          <p:nvPr/>
-        </p:nvSpPr>
-        <p:spPr>
-          <a:xfrm>
-            <a:off x="3566160" y="1097280"/>
-            <a:ext cx="2468880" cy="2743200"/>
-          </a:xfrm>
-          <a:prstGeom prst="rect">
-            <a:avLst/>
-          </a:prstGeom>
-          <a:solidFill>
-            <a:srgbClr val="0F1B3D"/>
-          </a:solidFill>
-          <a:ln/>
-          <a:effectLst>
-            <a:outerShdw blurRad="76200" dist="25400" dir="8100000" algn="bl" rotWithShape="0">
-              <a:srgbClr val="000000">
-                <a:alpha val="12000"/>
-              </a:srgbClr>
-            </a:outerShdw>
-          </a:effectLst>
-        </p:spPr>
-      </p:sp>
-      <p:sp>
-        <p:nvSpPr>
-          <p:cNvPr id="12" name="Shape 8"/>
-          <p:cNvSpPr/>
-          <p:nvPr/>
-        </p:nvSpPr>
-        <p:spPr>
-          <a:xfrm>
-            <a:off x="3566160" y="1097280"/>
-            <a:ext cx="2468880" cy="45720"/>
-          </a:xfrm>
-          <a:prstGeom prst="rect">
-            <a:avLst/>
-          </a:prstGeom>
-          <a:solidFill>
-            <a:srgbClr val="F9E795"/>
-          </a:solidFill>
-          <a:ln/>
-        </p:spPr>
-      </p:sp>
-      <p:pic>
-        <p:nvPicPr>
-          <p:cNvPr id="13" name="Image 2" descr="preencoded.png"/>
-          <p:cNvPicPr>
-            <a:picLocks noChangeAspect="1"/>
-          </p:cNvPicPr>
-          <p:nvPr/>
-        </p:nvPicPr>
-        <p:blipFill>
-          <a:blip r:embed="rId5"/>
-          <a:stretch>
-            <a:fillRect/>
-          </a:stretch>
-        </p:blipFill>
-        <p:spPr>
-          <a:xfrm>
-            <a:off x="4480560" y="1280160"/>
-            <a:ext cx="502920" cy="502920"/>
-          </a:xfrm>
-          <a:prstGeom prst="rect">
-            <a:avLst/>
-          </a:prstGeom>
-        </p:spPr>
-      </p:pic>
-      <p:sp>
-        <p:nvSpPr>
-          <p:cNvPr id="14" name="Text 9"/>
-          <p:cNvSpPr/>
-          <p:nvPr/>
-        </p:nvSpPr>
-        <p:spPr>
-          <a:xfrm>
-            <a:off x="3566160" y="1828800"/>
-            <a:ext cx="2468880" cy="914400"/>
-          </a:xfrm>
-          <a:prstGeom prst="rect">
-            <a:avLst/>
-          </a:prstGeom>
-          <a:noFill/>
-          <a:ln/>
-        </p:spPr>
-        <p:txBody>
-          <a:bodyPr wrap="square" lIns="0" tIns="0" rIns="0" bIns="0" rtlCol="0" anchor="ctr"/>
-          <a:lstStyle/>
-          <a:p>
-            <a:pPr marL="0" indent="0" algn="ctr">
-              <a:buNone/>
-            </a:pPr>
-            <a:r>
-              <a:rPr lang="en-US" sz="4800" b="1" dirty="0">
-                <a:solidFill>
-                  <a:srgbClr val="F9E795"/>
-                </a:solidFill>
-                <a:latin typeface="Georgia" pitchFamily="34" charset="0"/>
-                <a:ea typeface="Georgia" pitchFamily="34" charset="-122"/>
-                <a:cs typeface="Georgia" pitchFamily="34" charset="-120"/>
-              </a:rPr>
-              <a:t>99%</a:t>
-            </a:r>
-            <a:endParaRPr lang="en-US" sz="4800" dirty="0"/>
-          </a:p>
-        </p:txBody>
-      </p:sp>
-      <p:sp>
-        <p:nvSpPr>
-          <p:cNvPr id="15" name="Text 10"/>
-          <p:cNvSpPr/>
-          <p:nvPr/>
-        </p:nvSpPr>
-        <p:spPr>
-          <a:xfrm>
-            <a:off x="3566160" y="2743200"/>
-            <a:ext cx="2468880" cy="320040"/>
-          </a:xfrm>
-          <a:prstGeom prst="rect">
-            <a:avLst/>
-          </a:prstGeom>
-          <a:noFill/>
-          <a:ln/>
-        </p:spPr>
-        <p:txBody>
-          <a:bodyPr wrap="square" lIns="0" tIns="0" rIns="0" bIns="0" rtlCol="0" anchor="ctr"/>
-          <a:lstStyle/>
-          <a:p>
-            <a:pPr marL="0" indent="0" algn="ctr">
-              <a:buNone/>
-            </a:pPr>
-            <a:r>
-              <a:rPr lang="en-US" sz="1500" b="1" dirty="0">
-                <a:solidFill>
-                  <a:srgbClr val="FFFFFF"/>
-                </a:solidFill>
-                <a:latin typeface="Calibri" pitchFamily="34" charset="0"/>
-                <a:ea typeface="Calibri" pitchFamily="34" charset="-122"/>
-                <a:cs typeface="Calibri" pitchFamily="34" charset="-120"/>
-              </a:rPr>
-              <a:t>AUC Score</a:t>
-            </a:r>
-            <a:endParaRPr lang="en-US" sz="1500" dirty="0"/>
-          </a:p>
-        </p:txBody>
-      </p:sp>
-      <p:sp>
-        <p:nvSpPr>
-          <p:cNvPr id="16" name="Text 11"/>
-          <p:cNvSpPr/>
-          <p:nvPr/>
-        </p:nvSpPr>
-        <p:spPr>
-          <a:xfrm>
-            <a:off x="3840480" y="3108960"/>
-            <a:ext cx="1920240" cy="548640"/>
-          </a:xfrm>
-          <a:prstGeom prst="rect">
-            <a:avLst/>
-          </a:prstGeom>
-          <a:noFill/>
-          <a:ln/>
-        </p:spPr>
-        <p:txBody>
-          <a:bodyPr wrap="square" lIns="0" tIns="0" rIns="0" bIns="0" rtlCol="0" anchor="ctr"/>
-          <a:lstStyle/>
-          <a:p>
-            <a:pPr marL="0" indent="0" algn="ctr">
-              <a:buNone/>
-            </a:pPr>
-            <a:r>
-              <a:rPr lang="en-US" sz="1000" dirty="0">
-                <a:solidFill>
-                  <a:srgbClr val="ADB5BD"/>
-                </a:solidFill>
-                <a:latin typeface="Calibri" pitchFamily="34" charset="0"/>
-                <a:ea typeface="Calibri" pitchFamily="34" charset="-122"/>
-                <a:cs typeface="Calibri" pitchFamily="34" charset="-120"/>
-              </a:rPr>
-              <a:t>Near-perfect discrimination</a:t>
-            </a:r>
-            <a:endParaRPr lang="en-US" sz="1000" dirty="0"/>
-          </a:p>
-          <a:p>
-            <a:pPr marL="0" indent="0" algn="ctr">
-              <a:buNone/>
-            </a:pPr>
-            <a:r>
-              <a:rPr lang="en-US" sz="1000" dirty="0">
-                <a:solidFill>
-                  <a:srgbClr val="ADB5BD"/>
-                </a:solidFill>
-                <a:latin typeface="Calibri" pitchFamily="34" charset="0"/>
-                <a:ea typeface="Calibri" pitchFamily="34" charset="-122"/>
-                <a:cs typeface="Calibri" pitchFamily="34" charset="-120"/>
-              </a:rPr>
-              <a:t>between risk groups</a:t>
-            </a:r>
-            <a:endParaRPr lang="en-US" sz="1000" dirty="0"/>
-          </a:p>
-        </p:txBody>
-      </p:sp>
-      <p:sp>
-        <p:nvSpPr>
-          <p:cNvPr id="17" name="Shape 12"/>
-          <p:cNvSpPr/>
-          <p:nvPr/>
-        </p:nvSpPr>
-        <p:spPr>
-          <a:xfrm>
-            <a:off x="6400800" y="1097280"/>
-            <a:ext cx="2468880" cy="2743200"/>
-          </a:xfrm>
-          <a:prstGeom prst="rect">
-            <a:avLst/>
-          </a:prstGeom>
-          <a:solidFill>
-            <a:srgbClr val="0F1B3D"/>
-          </a:solidFill>
-          <a:ln/>
-          <a:effectLst>
-            <a:outerShdw blurRad="76200" dist="25400" dir="8100000" algn="bl" rotWithShape="0">
-              <a:srgbClr val="000000">
-                <a:alpha val="12000"/>
-              </a:srgbClr>
-            </a:outerShdw>
-          </a:effectLst>
-        </p:spPr>
-      </p:sp>
-      <p:sp>
-        <p:nvSpPr>
-          <p:cNvPr id="18" name="Shape 13"/>
-          <p:cNvSpPr/>
-          <p:nvPr/>
-        </p:nvSpPr>
-        <p:spPr>
-          <a:xfrm>
-            <a:off x="6400800" y="1097280"/>
-            <a:ext cx="2468880" cy="45720"/>
-          </a:xfrm>
-          <a:prstGeom prst="rect">
-            <a:avLst/>
-          </a:prstGeom>
-          <a:solidFill>
-            <a:srgbClr val="F9E795"/>
-          </a:solidFill>
-          <a:ln/>
-        </p:spPr>
-      </p:sp>
-      <p:pic>
-        <p:nvPicPr>
-          <p:cNvPr id="19" name="Image 3" descr="preencoded.png"/>
-          <p:cNvPicPr>
-            <a:picLocks noChangeAspect="1"/>
-          </p:cNvPicPr>
-          <p:nvPr/>
-        </p:nvPicPr>
-        <p:blipFill>
-          <a:blip r:embed="rId6"/>
-          <a:stretch>
-            <a:fillRect/>
-          </a:stretch>
-        </p:blipFill>
-        <p:spPr>
-          <a:xfrm>
-            <a:off x="7315200" y="1280160"/>
-            <a:ext cx="502920" cy="502920"/>
-          </a:xfrm>
-          <a:prstGeom prst="rect">
-            <a:avLst/>
-          </a:prstGeom>
-        </p:spPr>
-      </p:pic>
-      <p:sp>
-        <p:nvSpPr>
-          <p:cNvPr id="20" name="Text 14"/>
-          <p:cNvSpPr/>
-          <p:nvPr/>
-        </p:nvSpPr>
-        <p:spPr>
-          <a:xfrm>
-            <a:off x="6400800" y="1828800"/>
-            <a:ext cx="2468880" cy="914400"/>
-          </a:xfrm>
-          <a:prstGeom prst="rect">
-            <a:avLst/>
-          </a:prstGeom>
-          <a:noFill/>
-          <a:ln/>
-        </p:spPr>
-        <p:txBody>
-          <a:bodyPr wrap="square" lIns="0" tIns="0" rIns="0" bIns="0" rtlCol="0" anchor="ctr"/>
-          <a:lstStyle/>
-          <a:p>
-            <a:pPr marL="0" indent="0" algn="ctr">
-              <a:buNone/>
-            </a:pPr>
-            <a:r>
-              <a:rPr lang="en-US" sz="4800" b="1" dirty="0">
-                <a:solidFill>
-                  <a:srgbClr val="F9E795"/>
-                </a:solidFill>
-                <a:latin typeface="Georgia" pitchFamily="34" charset="0"/>
-                <a:ea typeface="Georgia" pitchFamily="34" charset="-122"/>
-                <a:cs typeface="Georgia" pitchFamily="34" charset="-120"/>
-              </a:rPr>
-              <a:t>90%</a:t>
-            </a:r>
-            <a:endParaRPr lang="en-US" sz="4800" dirty="0"/>
-          </a:p>
-        </p:txBody>
-      </p:sp>
-      <p:sp>
-        <p:nvSpPr>
-          <p:cNvPr id="21" name="Text 15"/>
-          <p:cNvSpPr/>
-          <p:nvPr/>
-        </p:nvSpPr>
-        <p:spPr>
-          <a:xfrm>
-            <a:off x="6400800" y="2743200"/>
-            <a:ext cx="2468880" cy="320040"/>
-          </a:xfrm>
-          <a:prstGeom prst="rect">
-            <a:avLst/>
-          </a:prstGeom>
-          <a:noFill/>
-          <a:ln/>
-        </p:spPr>
-        <p:txBody>
-          <a:bodyPr wrap="square" lIns="0" tIns="0" rIns="0" bIns="0" rtlCol="0" anchor="ctr"/>
-          <a:lstStyle/>
-          <a:p>
-            <a:pPr marL="0" indent="0" algn="ctr">
-              <a:buNone/>
-            </a:pPr>
-            <a:r>
-              <a:rPr lang="en-US" sz="1500" b="1" dirty="0">
-                <a:solidFill>
-                  <a:srgbClr val="FFFFFF"/>
-                </a:solidFill>
-                <a:latin typeface="Calibri" pitchFamily="34" charset="0"/>
-                <a:ea typeface="Calibri" pitchFamily="34" charset="-122"/>
-                <a:cs typeface="Calibri" pitchFamily="34" charset="-120"/>
-              </a:rPr>
-              <a:t>Recall</a:t>
-            </a:r>
-            <a:endParaRPr lang="en-US" sz="1500" dirty="0"/>
-          </a:p>
-        </p:txBody>
-      </p:sp>
-      <p:sp>
-        <p:nvSpPr>
-          <p:cNvPr id="22" name="Text 16"/>
-          <p:cNvSpPr/>
-          <p:nvPr/>
-        </p:nvSpPr>
-        <p:spPr>
-          <a:xfrm>
-            <a:off x="6675120" y="3108960"/>
-            <a:ext cx="1920240" cy="548640"/>
-          </a:xfrm>
-          <a:prstGeom prst="rect">
-            <a:avLst/>
-          </a:prstGeom>
-          <a:noFill/>
-          <a:ln/>
-        </p:spPr>
-        <p:txBody>
-          <a:bodyPr wrap="square" lIns="0" tIns="0" rIns="0" bIns="0" rtlCol="0" anchor="ctr"/>
-          <a:lstStyle/>
-          <a:p>
-            <a:pPr marL="0" indent="0" algn="ctr">
-              <a:buNone/>
-            </a:pPr>
-            <a:r>
-              <a:rPr lang="en-US" sz="1000" dirty="0">
-                <a:solidFill>
-                  <a:srgbClr val="ADB5BD"/>
-                </a:solidFill>
-                <a:latin typeface="Calibri" pitchFamily="34" charset="0"/>
-                <a:ea typeface="Calibri" pitchFamily="34" charset="-122"/>
-                <a:cs typeface="Calibri" pitchFamily="34" charset="-120"/>
-              </a:rPr>
-              <a:t>Catches 90% of all</a:t>
-            </a:r>
-            <a:endParaRPr lang="en-US" sz="1000" dirty="0"/>
-          </a:p>
-          <a:p>
-            <a:pPr marL="0" indent="0" algn="ctr">
-              <a:buNone/>
-            </a:pPr>
-            <a:r>
-              <a:rPr lang="en-US" sz="1000" dirty="0">
-                <a:solidFill>
-                  <a:srgbClr val="ADB5BD"/>
-                </a:solidFill>
-                <a:latin typeface="Calibri" pitchFamily="34" charset="0"/>
-                <a:ea typeface="Calibri" pitchFamily="34" charset="-122"/>
-                <a:cs typeface="Calibri" pitchFamily="34" charset="-120"/>
-              </a:rPr>
               <a:t>at-risk employees</a:t>
             </a:r>
             <a:endParaRPr lang="en-US" sz="1000" dirty="0"/>
@@ -7549,7 +7760,7 @@
           <a:bodyPr wrap="square" lIns="0" tIns="0" rIns="0" bIns="0" rtlCol="0" anchor="ctr"/>
           <a:lstStyle/>
           <a:p>
-            <a:pPr marL="0" indent="0" algn="ctr">
+            <a:pPr algn="ctr" indent="0" marL="0">
               <a:buNone/>
             </a:pPr>
             <a:r>
@@ -7583,7 +7794,6 @@
         <a:solidFill>
           <a:srgbClr val="FFFFFF"/>
         </a:solidFill>
-        <a:effectLst/>
       </p:bgPr>
     </p:bg>
     <p:spTree>
@@ -7622,7 +7832,86 @@
       </p:sp>
       <p:pic>
         <p:nvPicPr>
-          <p:cNvPr id="3" name="Image 0" descr="preencoded.png"/>
+          <p:cNvPr id="3" name="Image 0" descr="preencoded.png">    </p:cNvPr>
+          <p:cNvPicPr>
+            <a:picLocks noChangeAspect="1"/>
+          </p:cNvPicPr>
+          <p:nvPr/>
+        </p:nvPicPr>
+        <p:blipFill>
+          <a:blip r:embed="rId1"/>
+          <a:stretch>
+            <a:fillRect/>
+          </a:stretch>
+        </p:blipFill>
+        <p:spPr>
+          <a:xfrm>
+            <a:off x="731520" y="228600"/>
+            <a:ext cx="365760" cy="365760"/>
+          </a:xfrm>
+          <a:prstGeom prst="rect">
+            <a:avLst/>
+          </a:prstGeom>
+        </p:spPr>
+      </p:pic>
+      <p:sp>
+        <p:nvSpPr>
+          <p:cNvPr id="4" name="Text 1"/>
+          <p:cNvSpPr/>
+          <p:nvPr/>
+        </p:nvSpPr>
+        <p:spPr>
+          <a:xfrm>
+            <a:off x="1234440" y="228600"/>
+            <a:ext cx="7315200" cy="502920"/>
+          </a:xfrm>
+          <a:prstGeom prst="rect">
+            <a:avLst/>
+          </a:prstGeom>
+          <a:noFill/>
+          <a:ln/>
+        </p:spPr>
+        <p:txBody>
+          <a:bodyPr wrap="square" lIns="0" tIns="0" rIns="0" bIns="0" rtlCol="0" anchor="ctr"/>
+          <a:lstStyle/>
+          <a:p>
+            <a:pPr indent="0" marL="0">
+              <a:buNone/>
+            </a:pPr>
+            <a:r>
+              <a:rPr lang="en-US" sz="3200" b="1" dirty="0">
+                <a:solidFill>
+                  <a:srgbClr val="1E2761"/>
+                </a:solidFill>
+                <a:latin typeface="Georgia" pitchFamily="34" charset="0"/>
+                <a:ea typeface="Georgia" pitchFamily="34" charset="-122"/>
+                <a:cs typeface="Georgia" pitchFamily="34" charset="-120"/>
+              </a:rPr>
+              <a:t>Model Comparison</a:t>
+            </a:r>
+            <a:endParaRPr lang="en-US" sz="3200" dirty="0"/>
+          </a:p>
+        </p:txBody>
+      </p:sp>
+      <p:graphicFrame>
+        <p:nvGraphicFramePr>
+          <p:cNvPr id="5" name="Chart 0" descr=""/>
+          <p:cNvGraphicFramePr/>
+          <p:nvPr/>
+        </p:nvGraphicFramePr>
+        <p:xfrm>
+          <a:off x="457200" y="914400"/>
+          <a:ext cx="8229600" cy="3200400"/>
+        </p:xfrm>
+        <a:graphic xmlns:a="http://schemas.openxmlformats.org/drawingml/2006/main">
+          <a:graphicData uri="http://schemas.openxmlformats.org/drawingml/2006/chart">
+            <c:chart xmlns:c="http://schemas.openxmlformats.org/drawingml/2006/chart" r:id="rId2"/>
+          </a:graphicData>
+        </a:graphic>
+      </p:graphicFrame>
+      <p:pic>
+        <p:nvPicPr>
+          <p:cNvPr id="6" name="Image 1" descr="preencoded.png">    </p:cNvPr>
           <p:cNvPicPr>
             <a:picLocks noChangeAspect="1"/>
           </p:cNvPicPr>
@@ -7636,85 +7925,6 @@
         </p:blipFill>
         <p:spPr>
           <a:xfrm>
-            <a:off x="731520" y="228600"/>
-            <a:ext cx="365760" cy="365760"/>
-          </a:xfrm>
-          <a:prstGeom prst="rect">
-            <a:avLst/>
-          </a:prstGeom>
-        </p:spPr>
-      </p:pic>
-      <p:sp>
-        <p:nvSpPr>
-          <p:cNvPr id="4" name="Text 1"/>
-          <p:cNvSpPr/>
-          <p:nvPr/>
-        </p:nvSpPr>
-        <p:spPr>
-          <a:xfrm>
-            <a:off x="1234440" y="228600"/>
-            <a:ext cx="7315200" cy="502920"/>
-          </a:xfrm>
-          <a:prstGeom prst="rect">
-            <a:avLst/>
-          </a:prstGeom>
-          <a:noFill/>
-          <a:ln/>
-        </p:spPr>
-        <p:txBody>
-          <a:bodyPr wrap="square" lIns="0" tIns="0" rIns="0" bIns="0" rtlCol="0" anchor="ctr"/>
-          <a:lstStyle/>
-          <a:p>
-            <a:pPr marL="0" indent="0">
-              <a:buNone/>
-            </a:pPr>
-            <a:r>
-              <a:rPr lang="en-US" sz="3200" b="1" dirty="0">
-                <a:solidFill>
-                  <a:srgbClr val="1E2761"/>
-                </a:solidFill>
-                <a:latin typeface="Georgia" pitchFamily="34" charset="0"/>
-                <a:ea typeface="Georgia" pitchFamily="34" charset="-122"/>
-                <a:cs typeface="Georgia" pitchFamily="34" charset="-120"/>
-              </a:rPr>
-              <a:t>Model Comparison</a:t>
-            </a:r>
-            <a:endParaRPr lang="en-US" sz="3200" dirty="0"/>
-          </a:p>
-        </p:txBody>
-      </p:sp>
-      <p:graphicFrame>
-        <p:nvGraphicFramePr>
-          <p:cNvPr id="5" name="Chart 0"/>
-          <p:cNvGraphicFramePr/>
-          <p:nvPr/>
-        </p:nvGraphicFramePr>
-        <p:xfrm>
-          <a:off x="457200" y="914400"/>
-          <a:ext cx="8229600" cy="3200400"/>
-        </p:xfrm>
-        <a:graphic>
-          <a:graphicData uri="http://schemas.openxmlformats.org/drawingml/2006/chart">
-            <c:chart xmlns:c="http://schemas.openxmlformats.org/drawingml/2006/chart" xmlns:r="http://schemas.openxmlformats.org/officeDocument/2006/relationships" r:id="rId4"/>
-          </a:graphicData>
-        </a:graphic>
-      </p:graphicFrame>
-      <p:pic>
-        <p:nvPicPr>
-          <p:cNvPr id="6" name="Image 1" descr="preencoded.png"/>
-          <p:cNvPicPr>
-            <a:picLocks noChangeAspect="1"/>
-          </p:cNvPicPr>
-          <p:nvPr/>
-        </p:nvPicPr>
-        <p:blipFill>
-          <a:blip r:embed="rId5"/>
-          <a:stretch>
-            <a:fillRect/>
-          </a:stretch>
-        </p:blipFill>
-        <p:spPr>
-          <a:xfrm>
             <a:off x="731520" y="4251960"/>
             <a:ext cx="274320" cy="274320"/>
           </a:xfrm>
@@ -7744,7 +7954,7 @@
           <a:bodyPr wrap="square" lIns="0" tIns="0" rIns="0" bIns="0" rtlCol="0" anchor="ctr"/>
           <a:lstStyle/>
           <a:p>
-            <a:pPr marL="0" indent="0">
+            <a:pPr indent="0" marL="0">
               <a:buNone/>
             </a:pPr>
             <a:r>
@@ -7778,7 +7988,6 @@
         <a:solidFill>
           <a:srgbClr val="F8F9FA"/>
         </a:solidFill>
-        <a:effectLst/>
       </p:bgPr>
     </p:bg>
     <p:spTree>
@@ -7817,7 +8026,125 @@
       </p:sp>
       <p:pic>
         <p:nvPicPr>
-          <p:cNvPr id="3" name="Image 0" descr="preencoded.png"/>
+          <p:cNvPr id="3" name="Image 0" descr="preencoded.png">    </p:cNvPr>
+          <p:cNvPicPr>
+            <a:picLocks noChangeAspect="1"/>
+          </p:cNvPicPr>
+          <p:nvPr/>
+        </p:nvPicPr>
+        <p:blipFill>
+          <a:blip r:embed="rId1"/>
+          <a:stretch>
+            <a:fillRect/>
+          </a:stretch>
+        </p:blipFill>
+        <p:spPr>
+          <a:xfrm>
+            <a:off x="731520" y="228600"/>
+            <a:ext cx="365760" cy="365760"/>
+          </a:xfrm>
+          <a:prstGeom prst="rect">
+            <a:avLst/>
+          </a:prstGeom>
+        </p:spPr>
+      </p:pic>
+      <p:sp>
+        <p:nvSpPr>
+          <p:cNvPr id="4" name="Text 1"/>
+          <p:cNvSpPr/>
+          <p:nvPr/>
+        </p:nvSpPr>
+        <p:spPr>
+          <a:xfrm>
+            <a:off x="1234440" y="228600"/>
+            <a:ext cx="7315200" cy="548640"/>
+          </a:xfrm>
+          <a:prstGeom prst="rect">
+            <a:avLst/>
+          </a:prstGeom>
+          <a:noFill/>
+          <a:ln/>
+        </p:spPr>
+        <p:txBody>
+          <a:bodyPr wrap="square" lIns="0" tIns="0" rIns="0" bIns="0" rtlCol="0" anchor="ctr"/>
+          <a:lstStyle/>
+          <a:p>
+            <a:pPr indent="0" marL="0">
+              <a:buNone/>
+            </a:pPr>
+            <a:r>
+              <a:rPr lang="en-US" sz="3400" b="1" dirty="0">
+                <a:solidFill>
+                  <a:srgbClr val="1E2761"/>
+                </a:solidFill>
+                <a:latin typeface="Georgia" pitchFamily="34" charset="0"/>
+                <a:ea typeface="Georgia" pitchFamily="34" charset="-122"/>
+                <a:cs typeface="Georgia" pitchFamily="34" charset="-120"/>
+              </a:rPr>
+              <a:t>What Drives Burnout?</a:t>
+            </a:r>
+            <a:endParaRPr lang="en-US" sz="3400" dirty="0"/>
+          </a:p>
+        </p:txBody>
+      </p:sp>
+      <p:sp>
+        <p:nvSpPr>
+          <p:cNvPr id="5" name="Text 2"/>
+          <p:cNvSpPr/>
+          <p:nvPr/>
+        </p:nvSpPr>
+        <p:spPr>
+          <a:xfrm>
+            <a:off x="731520" y="777240"/>
+            <a:ext cx="7680960" cy="320040"/>
+          </a:xfrm>
+          <a:prstGeom prst="rect">
+            <a:avLst/>
+          </a:prstGeom>
+          <a:noFill/>
+          <a:ln/>
+        </p:spPr>
+        <p:txBody>
+          <a:bodyPr wrap="square" lIns="0" tIns="0" rIns="0" bIns="0" rtlCol="0" anchor="ctr"/>
+          <a:lstStyle/>
+          <a:p>
+            <a:pPr indent="0" marL="0">
+              <a:buNone/>
+            </a:pPr>
+            <a:r>
+              <a:rPr lang="en-US" sz="1300" dirty="0">
+                <a:solidFill>
+                  <a:srgbClr val="6C757D"/>
+                </a:solidFill>
+                <a:latin typeface="Calibri" pitchFamily="34" charset="0"/>
+                <a:ea typeface="Calibri" pitchFamily="34" charset="-122"/>
+                <a:cs typeface="Calibri" pitchFamily="34" charset="-120"/>
+              </a:rPr>
+              <a:t>SHAP analysis reveals the top factors pushing employees toward burnout risk</a:t>
+            </a:r>
+            <a:endParaRPr lang="en-US" sz="1300" dirty="0"/>
+          </a:p>
+        </p:txBody>
+      </p:sp>
+      <p:graphicFrame>
+        <p:nvGraphicFramePr>
+          <p:cNvPr id="6" name="Chart 0" descr=""/>
+          <p:cNvGraphicFramePr/>
+          <p:nvPr/>
+        </p:nvGraphicFramePr>
+        <p:xfrm>
+          <a:off x="457200" y="1188720"/>
+          <a:ext cx="8229600" cy="2926080"/>
+        </p:xfrm>
+        <a:graphic xmlns:a="http://schemas.openxmlformats.org/drawingml/2006/main">
+          <a:graphicData uri="http://schemas.openxmlformats.org/drawingml/2006/chart">
+            <c:chart xmlns:c="http://schemas.openxmlformats.org/drawingml/2006/chart" r:id="rId2"/>
+          </a:graphicData>
+        </a:graphic>
+      </p:graphicFrame>
+      <p:pic>
+        <p:nvPicPr>
+          <p:cNvPr id="7" name="Image 1" descr="preencoded.png">    </p:cNvPr>
           <p:cNvPicPr>
             <a:picLocks noChangeAspect="1"/>
           </p:cNvPicPr>
@@ -7831,124 +8158,6 @@
         </p:blipFill>
         <p:spPr>
           <a:xfrm>
-            <a:off x="731520" y="228600"/>
-            <a:ext cx="365760" cy="365760"/>
-          </a:xfrm>
-          <a:prstGeom prst="rect">
-            <a:avLst/>
-          </a:prstGeom>
-        </p:spPr>
-      </p:pic>
-      <p:sp>
-        <p:nvSpPr>
-          <p:cNvPr id="4" name="Text 1"/>
-          <p:cNvSpPr/>
-          <p:nvPr/>
-        </p:nvSpPr>
-        <p:spPr>
-          <a:xfrm>
-            <a:off x="1234440" y="228600"/>
-            <a:ext cx="7315200" cy="548640"/>
-          </a:xfrm>
-          <a:prstGeom prst="rect">
-            <a:avLst/>
-          </a:prstGeom>
-          <a:noFill/>
-          <a:ln/>
-        </p:spPr>
-        <p:txBody>
-          <a:bodyPr wrap="square" lIns="0" tIns="0" rIns="0" bIns="0" rtlCol="0" anchor="ctr"/>
-          <a:lstStyle/>
-          <a:p>
-            <a:pPr marL="0" indent="0">
-              <a:buNone/>
-            </a:pPr>
-            <a:r>
-              <a:rPr lang="en-US" sz="3400" b="1" dirty="0">
-                <a:solidFill>
-                  <a:srgbClr val="1E2761"/>
-                </a:solidFill>
-                <a:latin typeface="Georgia" pitchFamily="34" charset="0"/>
-                <a:ea typeface="Georgia" pitchFamily="34" charset="-122"/>
-                <a:cs typeface="Georgia" pitchFamily="34" charset="-120"/>
-              </a:rPr>
-              <a:t>What Drives Burnout?</a:t>
-            </a:r>
-            <a:endParaRPr lang="en-US" sz="3400" dirty="0"/>
-          </a:p>
-        </p:txBody>
-      </p:sp>
-      <p:sp>
-        <p:nvSpPr>
-          <p:cNvPr id="5" name="Text 2"/>
-          <p:cNvSpPr/>
-          <p:nvPr/>
-        </p:nvSpPr>
-        <p:spPr>
-          <a:xfrm>
-            <a:off x="731520" y="777240"/>
-            <a:ext cx="7680960" cy="320040"/>
-          </a:xfrm>
-          <a:prstGeom prst="rect">
-            <a:avLst/>
-          </a:prstGeom>
-          <a:noFill/>
-          <a:ln/>
-        </p:spPr>
-        <p:txBody>
-          <a:bodyPr wrap="square" lIns="0" tIns="0" rIns="0" bIns="0" rtlCol="0" anchor="ctr"/>
-          <a:lstStyle/>
-          <a:p>
-            <a:pPr marL="0" indent="0">
-              <a:buNone/>
-            </a:pPr>
-            <a:r>
-              <a:rPr lang="en-US" sz="1300" dirty="0">
-                <a:solidFill>
-                  <a:srgbClr val="6C757D"/>
-                </a:solidFill>
-                <a:latin typeface="Calibri" pitchFamily="34" charset="0"/>
-                <a:ea typeface="Calibri" pitchFamily="34" charset="-122"/>
-                <a:cs typeface="Calibri" pitchFamily="34" charset="-120"/>
-              </a:rPr>
-              <a:t>SHAP analysis reveals the top factors pushing employees toward burnout risk</a:t>
-            </a:r>
-            <a:endParaRPr lang="en-US" sz="1300" dirty="0"/>
-          </a:p>
-        </p:txBody>
-      </p:sp>
-      <p:graphicFrame>
-        <p:nvGraphicFramePr>
-          <p:cNvPr id="6" name="Chart 0"/>
-          <p:cNvGraphicFramePr/>
-          <p:nvPr/>
-        </p:nvGraphicFramePr>
-        <p:xfrm>
-          <a:off x="457200" y="1188720"/>
-          <a:ext cx="8229600" cy="2926080"/>
-        </p:xfrm>
-        <a:graphic>
-          <a:graphicData uri="http://schemas.openxmlformats.org/drawingml/2006/chart">
-            <c:chart xmlns:c="http://schemas.openxmlformats.org/drawingml/2006/chart" xmlns:r="http://schemas.openxmlformats.org/officeDocument/2006/relationships" r:id="rId4"/>
-          </a:graphicData>
-        </a:graphic>
-      </p:graphicFrame>
-      <p:pic>
-        <p:nvPicPr>
-          <p:cNvPr id="7" name="Image 1" descr="preencoded.png"/>
-          <p:cNvPicPr>
-            <a:picLocks noChangeAspect="1"/>
-          </p:cNvPicPr>
-          <p:nvPr/>
-        </p:nvPicPr>
-        <p:blipFill>
-          <a:blip r:embed="rId5"/>
-          <a:stretch>
-            <a:fillRect/>
-          </a:stretch>
-        </p:blipFill>
-        <p:spPr>
-          <a:xfrm>
             <a:off x="731520" y="4297680"/>
             <a:ext cx="274320" cy="274320"/>
           </a:xfrm>
@@ -7978,7 +8187,7 @@
           <a:bodyPr wrap="square" lIns="0" tIns="0" rIns="0" bIns="0" rtlCol="0" anchor="ctr"/>
           <a:lstStyle/>
           <a:p>
-            <a:pPr marL="0" indent="0">
+            <a:pPr indent="0" marL="0">
               <a:buNone/>
             </a:pPr>
             <a:r>
@@ -8012,7 +8221,6 @@
         <a:solidFill>
           <a:srgbClr val="FFFFFF"/>
         </a:solidFill>
-        <a:effectLst/>
       </p:bgPr>
     </p:bg>
     <p:spTree>
@@ -8051,14 +8259,14 @@
       </p:sp>
       <p:pic>
         <p:nvPicPr>
-          <p:cNvPr id="3" name="Image 0" descr="preencoded.png"/>
+          <p:cNvPr id="3" name="Image 0" descr="preencoded.png">    </p:cNvPr>
           <p:cNvPicPr>
             <a:picLocks noChangeAspect="1"/>
           </p:cNvPicPr>
           <p:nvPr/>
         </p:nvPicPr>
         <p:blipFill>
-          <a:blip r:embed="rId3"/>
+          <a:blip r:embed="rId1"/>
           <a:stretch>
             <a:fillRect/>
           </a:stretch>
@@ -8094,7 +8302,7 @@
           <a:bodyPr wrap="square" lIns="0" tIns="0" rIns="0" bIns="0" rtlCol="0" anchor="ctr"/>
           <a:lstStyle/>
           <a:p>
-            <a:pPr marL="0" indent="0">
+            <a:pPr indent="0" marL="0">
               <a:buNone/>
             </a:pPr>
             <a:r>
@@ -8114,14 +8322,14 @@
       </p:sp>
       <p:pic>
         <p:nvPicPr>
-          <p:cNvPr id="5" name="Image 1" descr="preencoded.png"/>
+          <p:cNvPr id="5" name="Image 1" descr="preencoded.png">    </p:cNvPr>
           <p:cNvPicPr>
             <a:picLocks noChangeAspect="1"/>
           </p:cNvPicPr>
           <p:nvPr/>
         </p:nvPicPr>
         <p:blipFill>
-          <a:blip r:embed="rId4"/>
+          <a:blip r:embed="rId2"/>
           <a:stretch>
             <a:fillRect/>
           </a:stretch>
@@ -8157,7 +8365,7 @@
           <a:bodyPr wrap="square" lIns="0" tIns="0" rIns="0" bIns="0" rtlCol="0" anchor="ctr"/>
           <a:lstStyle/>
           <a:p>
-            <a:pPr marL="0" indent="0">
+            <a:pPr indent="0" marL="0">
               <a:buNone/>
             </a:pPr>
             <a:r>
@@ -8198,41 +8406,11 @@
             <a:tbl>
               <a:tblPr/>
               <a:tblGrid>
-                <a:gridCol w="2011680">
-                  <a:extLst>
-                    <a:ext uri="{9D8B030D-6E8A-4147-A177-3AD203B41FA5}">
-                      <a16:colId xmlns:a16="http://schemas.microsoft.com/office/drawing/2014/main" val="20000"/>
-                    </a:ext>
-                  </a:extLst>
-                </a:gridCol>
-                <a:gridCol w="822960">
-                  <a:extLst>
-                    <a:ext uri="{9D8B030D-6E8A-4147-A177-3AD203B41FA5}">
-                      <a16:colId xmlns:a16="http://schemas.microsoft.com/office/drawing/2014/main" val="20001"/>
-                    </a:ext>
-                  </a:extLst>
-                </a:gridCol>
-                <a:gridCol w="822960">
-                  <a:extLst>
-                    <a:ext uri="{9D8B030D-6E8A-4147-A177-3AD203B41FA5}">
-                      <a16:colId xmlns:a16="http://schemas.microsoft.com/office/drawing/2014/main" val="20002"/>
-                    </a:ext>
-                  </a:extLst>
-                </a:gridCol>
-                <a:gridCol w="822960">
-                  <a:extLst>
-                    <a:ext uri="{9D8B030D-6E8A-4147-A177-3AD203B41FA5}">
-                      <a16:colId xmlns:a16="http://schemas.microsoft.com/office/drawing/2014/main" val="20003"/>
-                    </a:ext>
-                  </a:extLst>
-                </a:gridCol>
-                <a:gridCol w="731520">
-                  <a:extLst>
-                    <a:ext uri="{9D8B030D-6E8A-4147-A177-3AD203B41FA5}">
-                      <a16:colId xmlns:a16="http://schemas.microsoft.com/office/drawing/2014/main" val="20004"/>
-                    </a:ext>
-                  </a:extLst>
-                </a:gridCol>
+                <a:gridCol w="2011680"/>
+                <a:gridCol w="822960"/>
+                <a:gridCol w="822960"/>
+                <a:gridCol w="822960"/>
+                <a:gridCol w="731520"/>
               </a:tblGrid>
               <a:tr h="365760">
                 <a:tc>
@@ -8240,7 +8418,7 @@
                     <a:bodyPr/>
                     <a:lstStyle/>
                     <a:p>
-                      <a:pPr marL="0" indent="0" algn="ctr">
+                      <a:pPr algn="ctr" indent="0" marL="0">
                         <a:buNone/>
                       </a:pPr>
                       <a:r>
@@ -8261,7 +8439,7 @@
                       </a:endParaRPr>
                     </a:p>
                   </a:txBody>
-                  <a:tcPr>
+                  <a:tcPr marL="91440" marR="91440" marT="45720" marB="45720">
                     <a:lnL w="6350" cap="flat" cmpd="sng" algn="ctr">
                       <a:solidFill>
                         <a:srgbClr val="ADB5BD"/>
@@ -8308,7 +8486,7 @@
                     <a:bodyPr/>
                     <a:lstStyle/>
                     <a:p>
-                      <a:pPr marL="0" indent="0" algn="ctr">
+                      <a:pPr algn="ctr" indent="0" marL="0">
                         <a:buNone/>
                       </a:pPr>
                       <a:r>
@@ -8329,7 +8507,7 @@
                       </a:endParaRPr>
                     </a:p>
                   </a:txBody>
-                  <a:tcPr>
+                  <a:tcPr marL="91440" marR="91440" marT="45720" marB="45720">
                     <a:lnL w="6350" cap="flat" cmpd="sng" algn="ctr">
                       <a:solidFill>
                         <a:srgbClr val="ADB5BD"/>
@@ -8376,7 +8554,7 @@
                     <a:bodyPr/>
                     <a:lstStyle/>
                     <a:p>
-                      <a:pPr marL="0" indent="0" algn="ctr">
+                      <a:pPr algn="ctr" indent="0" marL="0">
                         <a:buNone/>
                       </a:pPr>
                       <a:r>
@@ -8397,7 +8575,7 @@
                       </a:endParaRPr>
                     </a:p>
                   </a:txBody>
-                  <a:tcPr>
+                  <a:tcPr marL="91440" marR="91440" marT="45720" marB="45720">
                     <a:lnL w="6350" cap="flat" cmpd="sng" algn="ctr">
                       <a:solidFill>
                         <a:srgbClr val="ADB5BD"/>
@@ -8444,7 +8622,7 @@
                     <a:bodyPr/>
                     <a:lstStyle/>
                     <a:p>
-                      <a:pPr marL="0" indent="0" algn="ctr">
+                      <a:pPr algn="ctr" indent="0" marL="0">
                         <a:buNone/>
                       </a:pPr>
                       <a:r>
@@ -8465,7 +8643,7 @@
                       </a:endParaRPr>
                     </a:p>
                   </a:txBody>
-                  <a:tcPr>
+                  <a:tcPr marL="91440" marR="91440" marT="45720" marB="45720">
                     <a:lnL w="6350" cap="flat" cmpd="sng" algn="ctr">
                       <a:solidFill>
                         <a:srgbClr val="ADB5BD"/>
@@ -8512,7 +8690,7 @@
                     <a:bodyPr/>
                     <a:lstStyle/>
                     <a:p>
-                      <a:pPr marL="0" indent="0" algn="ctr">
+                      <a:pPr algn="ctr" indent="0" marL="0">
                         <a:buNone/>
                       </a:pPr>
                       <a:r>
@@ -8533,7 +8711,7 @@
                       </a:endParaRPr>
                     </a:p>
                   </a:txBody>
-                  <a:tcPr>
+                  <a:tcPr marL="91440" marR="91440" marT="45720" marB="45720">
                     <a:lnL w="6350" cap="flat" cmpd="sng" algn="ctr">
                       <a:solidFill>
                         <a:srgbClr val="ADB5BD"/>
@@ -8575,11 +8753,6 @@
                     </a:solidFill>
                   </a:tcPr>
                 </a:tc>
-                <a:extLst>
-                  <a:ext uri="{0D108BD9-81ED-4DB2-BD59-A6C34878D82A}">
-                    <a16:rowId xmlns:a16="http://schemas.microsoft.com/office/drawing/2014/main" val="10000"/>
-                  </a:ext>
-                </a:extLst>
               </a:tr>
               <a:tr h="320040">
                 <a:tc>
@@ -8587,7 +8760,7 @@
                     <a:bodyPr/>
                     <a:lstStyle/>
                     <a:p>
-                      <a:pPr marL="0" indent="0" algn="ctr">
+                      <a:pPr algn="ctr" indent="0" marL="0">
                         <a:buNone/>
                       </a:pPr>
                       <a:r>
@@ -8608,7 +8781,7 @@
                       </a:endParaRPr>
                     </a:p>
                   </a:txBody>
-                  <a:tcPr>
+                  <a:tcPr marL="91440" marR="91440" marT="45720" marB="45720">
                     <a:lnL w="6350" cap="flat" cmpd="sng" algn="ctr">
                       <a:solidFill>
                         <a:srgbClr val="ADB5BD"/>
@@ -8652,7 +8825,7 @@
                     <a:bodyPr/>
                     <a:lstStyle/>
                     <a:p>
-                      <a:pPr marL="0" indent="0" algn="ctr">
+                      <a:pPr algn="ctr" indent="0" marL="0">
                         <a:buNone/>
                       </a:pPr>
                       <a:r>
@@ -8673,7 +8846,7 @@
                       </a:endParaRPr>
                     </a:p>
                   </a:txBody>
-                  <a:tcPr>
+                  <a:tcPr marL="91440" marR="91440" marT="45720" marB="45720">
                     <a:lnL w="6350" cap="flat" cmpd="sng" algn="ctr">
                       <a:solidFill>
                         <a:srgbClr val="ADB5BD"/>
@@ -8717,7 +8890,7 @@
                     <a:bodyPr/>
                     <a:lstStyle/>
                     <a:p>
-                      <a:pPr marL="0" indent="0" algn="ctr">
+                      <a:pPr algn="ctr" indent="0" marL="0">
                         <a:buNone/>
                       </a:pPr>
                       <a:r>
@@ -8738,7 +8911,7 @@
                       </a:endParaRPr>
                     </a:p>
                   </a:txBody>
-                  <a:tcPr>
+                  <a:tcPr marL="91440" marR="91440" marT="45720" marB="45720">
                     <a:lnL w="6350" cap="flat" cmpd="sng" algn="ctr">
                       <a:solidFill>
                         <a:srgbClr val="ADB5BD"/>
@@ -8782,7 +8955,7 @@
                     <a:bodyPr/>
                     <a:lstStyle/>
                     <a:p>
-                      <a:pPr marL="0" indent="0" algn="ctr">
+                      <a:pPr algn="ctr" indent="0" marL="0">
                         <a:buNone/>
                       </a:pPr>
                       <a:r>
@@ -8803,7 +8976,7 @@
                       </a:endParaRPr>
                     </a:p>
                   </a:txBody>
-                  <a:tcPr>
+                  <a:tcPr marL="91440" marR="91440" marT="45720" marB="45720">
                     <a:lnL w="6350" cap="flat" cmpd="sng" algn="ctr">
                       <a:solidFill>
                         <a:srgbClr val="ADB5BD"/>
@@ -8847,7 +9020,7 @@
                     <a:bodyPr/>
                     <a:lstStyle/>
                     <a:p>
-                      <a:pPr marL="0" indent="0" algn="ctr">
+                      <a:pPr algn="ctr" indent="0" marL="0">
                         <a:buNone/>
                       </a:pPr>
                       <a:r>
@@ -8868,7 +9041,7 @@
                       </a:endParaRPr>
                     </a:p>
                   </a:txBody>
-                  <a:tcPr>
+                  <a:tcPr marL="91440" marR="91440" marT="45720" marB="45720">
                     <a:lnL w="6350" cap="flat" cmpd="sng" algn="ctr">
                       <a:solidFill>
                         <a:srgbClr val="ADB5BD"/>
@@ -8907,11 +9080,6 @@
                     </a:lnB>
                   </a:tcPr>
                 </a:tc>
-                <a:extLst>
-                  <a:ext uri="{0D108BD9-81ED-4DB2-BD59-A6C34878D82A}">
-                    <a16:rowId xmlns:a16="http://schemas.microsoft.com/office/drawing/2014/main" val="10001"/>
-                  </a:ext>
-                </a:extLst>
               </a:tr>
               <a:tr h="320040">
                 <a:tc>
@@ -8919,7 +9087,7 @@
                     <a:bodyPr/>
                     <a:lstStyle/>
                     <a:p>
-                      <a:pPr marL="0" indent="0" algn="ctr">
+                      <a:pPr algn="ctr" indent="0" marL="0">
                         <a:buNone/>
                       </a:pPr>
                       <a:r>
@@ -8940,7 +9108,7 @@
                       </a:endParaRPr>
                     </a:p>
                   </a:txBody>
-                  <a:tcPr>
+                  <a:tcPr marL="91440" marR="91440" marT="45720" marB="45720">
                     <a:lnL w="6350" cap="flat" cmpd="sng" algn="ctr">
                       <a:solidFill>
                         <a:srgbClr val="ADB5BD"/>
@@ -8984,7 +9152,7 @@
                     <a:bodyPr/>
                     <a:lstStyle/>
                     <a:p>
-                      <a:pPr marL="0" indent="0" algn="ctr">
+                      <a:pPr algn="ctr" indent="0" marL="0">
                         <a:buNone/>
                       </a:pPr>
                       <a:r>
@@ -9005,7 +9173,7 @@
                       </a:endParaRPr>
                     </a:p>
                   </a:txBody>
-                  <a:tcPr>
+                  <a:tcPr marL="91440" marR="91440" marT="45720" marB="45720">
                     <a:lnL w="6350" cap="flat" cmpd="sng" algn="ctr">
                       <a:solidFill>
                         <a:srgbClr val="ADB5BD"/>
@@ -9049,7 +9217,7 @@
                     <a:bodyPr/>
                     <a:lstStyle/>
                     <a:p>
-                      <a:pPr marL="0" indent="0" algn="ctr">
+                      <a:pPr algn="ctr" indent="0" marL="0">
                         <a:buNone/>
                       </a:pPr>
                       <a:r>
@@ -9070,7 +9238,7 @@
                       </a:endParaRPr>
                     </a:p>
                   </a:txBody>
-                  <a:tcPr>
+                  <a:tcPr marL="91440" marR="91440" marT="45720" marB="45720">
                     <a:lnL w="6350" cap="flat" cmpd="sng" algn="ctr">
                       <a:solidFill>
                         <a:srgbClr val="ADB5BD"/>
@@ -9114,7 +9282,7 @@
                     <a:bodyPr/>
                     <a:lstStyle/>
                     <a:p>
-                      <a:pPr marL="0" indent="0" algn="ctr">
+                      <a:pPr algn="ctr" indent="0" marL="0">
                         <a:buNone/>
                       </a:pPr>
                       <a:r>
@@ -9135,7 +9303,7 @@
                       </a:endParaRPr>
                     </a:p>
                   </a:txBody>
-                  <a:tcPr>
+                  <a:tcPr marL="91440" marR="91440" marT="45720" marB="45720">
                     <a:lnL w="6350" cap="flat" cmpd="sng" algn="ctr">
                       <a:solidFill>
                         <a:srgbClr val="ADB5BD"/>
@@ -9179,7 +9347,7 @@
                     <a:bodyPr/>
                     <a:lstStyle/>
                     <a:p>
-                      <a:pPr marL="0" indent="0" algn="ctr">
+                      <a:pPr algn="ctr" indent="0" marL="0">
                         <a:buNone/>
                       </a:pPr>
                       <a:r>
@@ -9200,7 +9368,7 @@
                       </a:endParaRPr>
                     </a:p>
                   </a:txBody>
-                  <a:tcPr>
+                  <a:tcPr marL="91440" marR="91440" marT="45720" marB="45720">
                     <a:lnL w="6350" cap="flat" cmpd="sng" algn="ctr">
                       <a:solidFill>
                         <a:srgbClr val="ADB5BD"/>
@@ -9239,11 +9407,6 @@
                     </a:lnB>
                   </a:tcPr>
                 </a:tc>
-                <a:extLst>
-                  <a:ext uri="{0D108BD9-81ED-4DB2-BD59-A6C34878D82A}">
-                    <a16:rowId xmlns:a16="http://schemas.microsoft.com/office/drawing/2014/main" val="10002"/>
-                  </a:ext>
-                </a:extLst>
               </a:tr>
               <a:tr h="320040">
                 <a:tc>
@@ -9251,7 +9414,7 @@
                     <a:bodyPr/>
                     <a:lstStyle/>
                     <a:p>
-                      <a:pPr marL="0" indent="0" algn="ctr">
+                      <a:pPr algn="ctr" indent="0" marL="0">
                         <a:buNone/>
                       </a:pPr>
                       <a:r>
@@ -9272,7 +9435,7 @@
                       </a:endParaRPr>
                     </a:p>
                   </a:txBody>
-                  <a:tcPr>
+                  <a:tcPr marL="91440" marR="91440" marT="45720" marB="45720">
                     <a:lnL w="6350" cap="flat" cmpd="sng" algn="ctr">
                       <a:solidFill>
                         <a:srgbClr val="ADB5BD"/>
@@ -9316,7 +9479,7 @@
                     <a:bodyPr/>
                     <a:lstStyle/>
                     <a:p>
-                      <a:pPr marL="0" indent="0" algn="ctr">
+                      <a:pPr algn="ctr" indent="0" marL="0">
                         <a:buNone/>
                       </a:pPr>
                       <a:r>
@@ -9337,7 +9500,7 @@
                       </a:endParaRPr>
                     </a:p>
                   </a:txBody>
-                  <a:tcPr>
+                  <a:tcPr marL="91440" marR="91440" marT="45720" marB="45720">
                     <a:lnL w="6350" cap="flat" cmpd="sng" algn="ctr">
                       <a:solidFill>
                         <a:srgbClr val="ADB5BD"/>
@@ -9381,7 +9544,7 @@
                     <a:bodyPr/>
                     <a:lstStyle/>
                     <a:p>
-                      <a:pPr marL="0" indent="0" algn="ctr">
+                      <a:pPr algn="ctr" indent="0" marL="0">
                         <a:buNone/>
                       </a:pPr>
                       <a:r>
@@ -9402,7 +9565,7 @@
                       </a:endParaRPr>
                     </a:p>
                   </a:txBody>
-                  <a:tcPr>
+                  <a:tcPr marL="91440" marR="91440" marT="45720" marB="45720">
                     <a:lnL w="6350" cap="flat" cmpd="sng" algn="ctr">
                       <a:solidFill>
                         <a:srgbClr val="ADB5BD"/>
@@ -9446,7 +9609,7 @@
                     <a:bodyPr/>
                     <a:lstStyle/>
                     <a:p>
-                      <a:pPr marL="0" indent="0" algn="ctr">
+                      <a:pPr algn="ctr" indent="0" marL="0">
                         <a:buNone/>
                       </a:pPr>
                       <a:r>
@@ -9467,7 +9630,7 @@
                       </a:endParaRPr>
                     </a:p>
                   </a:txBody>
-                  <a:tcPr>
+                  <a:tcPr marL="91440" marR="91440" marT="45720" marB="45720">
                     <a:lnL w="6350" cap="flat" cmpd="sng" algn="ctr">
                       <a:solidFill>
                         <a:srgbClr val="ADB5BD"/>
@@ -9511,7 +9674,7 @@
                     <a:bodyPr/>
                     <a:lstStyle/>
                     <a:p>
-                      <a:pPr marL="0" indent="0" algn="ctr">
+                      <a:pPr algn="ctr" indent="0" marL="0">
                         <a:buNone/>
                       </a:pPr>
                       <a:r>
@@ -9532,7 +9695,7 @@
                       </a:endParaRPr>
                     </a:p>
                   </a:txBody>
-                  <a:tcPr>
+                  <a:tcPr marL="91440" marR="91440" marT="45720" marB="45720">
                     <a:lnL w="6350" cap="flat" cmpd="sng" algn="ctr">
                       <a:solidFill>
                         <a:srgbClr val="ADB5BD"/>
@@ -9571,11 +9734,6 @@
                     </a:lnB>
                   </a:tcPr>
                 </a:tc>
-                <a:extLst>
-                  <a:ext uri="{0D108BD9-81ED-4DB2-BD59-A6C34878D82A}">
-                    <a16:rowId xmlns:a16="http://schemas.microsoft.com/office/drawing/2014/main" val="10003"/>
-                  </a:ext>
-                </a:extLst>
               </a:tr>
             </a:tbl>
           </a:graphicData>
@@ -9600,7 +9758,7 @@
           </a:solidFill>
           <a:ln/>
           <a:effectLst>
-            <a:outerShdw blurRad="76200" dist="25400" dir="8100000" algn="bl" rotWithShape="0">
+            <a:outerShdw sx="100000" sy="100000" kx="0" ky="0" algn="bl" rotWithShape="0" blurRad="76200" dist="25400" dir="8100000">
               <a:srgbClr val="000000">
                 <a:alpha val="12000"/>
               </a:srgbClr>
@@ -9610,14 +9768,14 @@
       </p:sp>
       <p:pic>
         <p:nvPicPr>
-          <p:cNvPr id="7" name="Image 2" descr="preencoded.png"/>
+          <p:cNvPr id="9" name="Image 2" descr="preencoded.png">    </p:cNvPr>
           <p:cNvPicPr>
             <a:picLocks noChangeAspect="1"/>
           </p:cNvPicPr>
           <p:nvPr/>
         </p:nvPicPr>
         <p:blipFill>
-          <a:blip r:embed="rId5"/>
+          <a:blip r:embed="rId3"/>
           <a:stretch>
             <a:fillRect/>
           </a:stretch>
@@ -9653,7 +9811,7 @@
           <a:bodyPr wrap="square" lIns="0" tIns="0" rIns="0" bIns="0" rtlCol="0" anchor="ctr"/>
           <a:lstStyle/>
           <a:p>
-            <a:pPr marL="0" indent="0">
+            <a:pPr indent="0" marL="0">
               <a:buNone/>
             </a:pPr>
             <a:r>
@@ -9692,7 +9850,7 @@
           <a:bodyPr wrap="square" lIns="0" tIns="0" rIns="0" bIns="0" rtlCol="0" anchor="ctr"/>
           <a:lstStyle/>
           <a:p>
-            <a:pPr marL="0" indent="0">
+            <a:pPr indent="0" marL="0">
               <a:buNone/>
             </a:pPr>
             <a:r>
@@ -9706,6 +9864,9 @@
               </a:rPr>
               <a:t>1. Group-specific threshold adjustment </a:t>
             </a:r>
+            <a:pPr indent="0" marL="0">
+              <a:buNone/>
+            </a:pPr>
             <a:r>
               <a:rPr lang="en-US" sz="1100" dirty="0">
                 <a:solidFill>
@@ -9720,7 +9881,7 @@
             <a:endParaRPr lang="en-US" sz="1100" dirty="0"/>
           </a:p>
           <a:p>
-            <a:pPr marL="0" indent="0">
+            <a:pPr indent="0" marL="0">
               <a:buNone/>
             </a:pPr>
             <a:r>
@@ -9734,6 +9895,9 @@
               </a:rPr>
               <a:t>2. Class-weighted re-training </a:t>
             </a:r>
+            <a:pPr indent="0" marL="0">
+              <a:buNone/>
+            </a:pPr>
             <a:r>
               <a:rPr lang="en-US" sz="1100" dirty="0">
                 <a:solidFill>
@@ -9748,7 +9912,7 @@
             <a:endParaRPr lang="en-US" sz="1100" dirty="0"/>
           </a:p>
           <a:p>
-            <a:pPr marL="0" indent="0">
+            <a:pPr indent="0" marL="0">
               <a:buNone/>
             </a:pPr>
             <a:r>
@@ -9762,6 +9926,9 @@
               </a:rPr>
               <a:t>3. Proxy feature correlation audit </a:t>
             </a:r>
+            <a:pPr indent="0" marL="0">
+              <a:buNone/>
+            </a:pPr>
             <a:r>
               <a:rPr lang="en-US" sz="1100" dirty="0">
                 <a:solidFill>
@@ -9793,7 +9960,6 @@
         <a:solidFill>
           <a:srgbClr val="1E2761"/>
         </a:solidFill>
-        <a:effectLst/>
       </p:bgPr>
     </p:bg>
     <p:spTree>
@@ -9832,14 +9998,14 @@
       </p:sp>
       <p:pic>
         <p:nvPicPr>
-          <p:cNvPr id="3" name="Image 0" descr="preencoded.png"/>
+          <p:cNvPr id="3" name="Image 0" descr="preencoded.png">    </p:cNvPr>
           <p:cNvPicPr>
             <a:picLocks noChangeAspect="1"/>
           </p:cNvPicPr>
           <p:nvPr/>
         </p:nvPicPr>
         <p:blipFill>
-          <a:blip r:embed="rId3"/>
+          <a:blip r:embed="rId1"/>
           <a:stretch>
             <a:fillRect/>
           </a:stretch>
@@ -9875,7 +10041,7 @@
           <a:bodyPr wrap="square" lIns="0" tIns="0" rIns="0" bIns="0" rtlCol="0" anchor="ctr"/>
           <a:lstStyle/>
           <a:p>
-            <a:pPr marL="0" indent="0">
+            <a:pPr indent="0" marL="0">
               <a:buNone/>
             </a:pPr>
             <a:r>
@@ -9895,14 +10061,14 @@
       </p:sp>
       <p:pic>
         <p:nvPicPr>
-          <p:cNvPr id="5" name="Image 1" descr="preencoded.png"/>
+          <p:cNvPr id="5" name="Image 1" descr="preencoded.png">    </p:cNvPr>
           <p:cNvPicPr>
             <a:picLocks noChangeAspect="1"/>
           </p:cNvPicPr>
           <p:nvPr/>
         </p:nvPicPr>
         <p:blipFill>
-          <a:blip r:embed="rId4"/>
+          <a:blip r:embed="rId2"/>
           <a:stretch>
             <a:fillRect/>
           </a:stretch>
@@ -9936,7 +10102,7 @@
           </a:solidFill>
           <a:ln/>
           <a:effectLst>
-            <a:outerShdw blurRad="76200" dist="25400" dir="8100000" algn="bl" rotWithShape="0">
+            <a:outerShdw sx="100000" sy="100000" kx="0" ky="0" algn="bl" rotWithShape="0" blurRad="76200" dist="25400" dir="8100000">
               <a:srgbClr val="000000">
                 <a:alpha val="12000"/>
               </a:srgbClr>
@@ -9965,7 +10131,7 @@
           <a:bodyPr wrap="square" lIns="0" tIns="0" rIns="0" bIns="0" rtlCol="0" anchor="ctr"/>
           <a:lstStyle/>
           <a:p>
-            <a:pPr marL="0" indent="0" algn="ctr">
+            <a:pPr algn="ctr" indent="0" marL="0">
               <a:buNone/>
             </a:pPr>
             <a:r>
@@ -10004,7 +10170,7 @@
           <a:bodyPr wrap="square" lIns="0" tIns="0" rIns="0" bIns="0" rtlCol="0" anchor="ctr"/>
           <a:lstStyle/>
           <a:p>
-            <a:pPr marL="0" indent="0" algn="ctr">
+            <a:pPr algn="ctr" indent="0" marL="0">
               <a:buNone/>
             </a:pPr>
             <a:r>
@@ -10043,7 +10209,7 @@
           <a:bodyPr wrap="square" lIns="0" tIns="0" rIns="0" bIns="0" rtlCol="0" anchor="ctr"/>
           <a:lstStyle/>
           <a:p>
-            <a:pPr marL="0" indent="0" algn="ctr">
+            <a:pPr algn="ctr" indent="0" marL="0">
               <a:buNone/>
             </a:pPr>
             <a:r>
@@ -10060,7 +10226,7 @@
             <a:endParaRPr lang="en-US" sz="1000" dirty="0"/>
           </a:p>
           <a:p>
-            <a:pPr marL="0" indent="0" algn="ctr">
+            <a:pPr algn="ctr" indent="0" marL="0">
               <a:buNone/>
             </a:pPr>
             <a:r>
@@ -10097,7 +10263,7 @@
           </a:solidFill>
           <a:ln/>
           <a:effectLst>
-            <a:outerShdw blurRad="76200" dist="25400" dir="8100000" algn="bl" rotWithShape="0">
+            <a:outerShdw sx="100000" sy="100000" kx="0" ky="0" algn="bl" rotWithShape="0" blurRad="76200" dist="25400" dir="8100000">
               <a:srgbClr val="000000">
                 <a:alpha val="12000"/>
               </a:srgbClr>
@@ -10126,7 +10292,7 @@
           <a:bodyPr wrap="square" lIns="0" tIns="0" rIns="0" bIns="0" rtlCol="0" anchor="ctr"/>
           <a:lstStyle/>
           <a:p>
-            <a:pPr marL="0" indent="0" algn="ctr">
+            <a:pPr algn="ctr" indent="0" marL="0">
               <a:buNone/>
             </a:pPr>
             <a:r>
@@ -10165,7 +10331,7 @@
           <a:bodyPr wrap="square" lIns="0" tIns="0" rIns="0" bIns="0" rtlCol="0" anchor="ctr"/>
           <a:lstStyle/>
           <a:p>
-            <a:pPr marL="0" indent="0" algn="ctr">
+            <a:pPr algn="ctr" indent="0" marL="0">
               <a:buNone/>
             </a:pPr>
             <a:r>
@@ -10204,7 +10370,7 @@
           <a:bodyPr wrap="square" lIns="0" tIns="0" rIns="0" bIns="0" rtlCol="0" anchor="ctr"/>
           <a:lstStyle/>
           <a:p>
-            <a:pPr marL="0" indent="0" algn="ctr">
+            <a:pPr algn="ctr" indent="0" marL="0">
               <a:buNone/>
             </a:pPr>
             <a:r>
@@ -10221,7 +10387,7 @@
             <a:endParaRPr lang="en-US" sz="1000" dirty="0"/>
           </a:p>
           <a:p>
-            <a:pPr marL="0" indent="0" algn="ctr">
+            <a:pPr algn="ctr" indent="0" marL="0">
               <a:buNone/>
             </a:pPr>
             <a:r>
@@ -10258,7 +10424,7 @@
           </a:solidFill>
           <a:ln/>
           <a:effectLst>
-            <a:outerShdw blurRad="76200" dist="25400" dir="8100000" algn="bl" rotWithShape="0">
+            <a:outerShdw sx="100000" sy="100000" kx="0" ky="0" algn="bl" rotWithShape="0" blurRad="76200" dist="25400" dir="8100000">
               <a:srgbClr val="000000">
                 <a:alpha val="12000"/>
               </a:srgbClr>
@@ -10287,7 +10453,7 @@
           <a:bodyPr wrap="square" lIns="0" tIns="0" rIns="0" bIns="0" rtlCol="0" anchor="ctr"/>
           <a:lstStyle/>
           <a:p>
-            <a:pPr marL="0" indent="0" algn="ctr">
+            <a:pPr algn="ctr" indent="0" marL="0">
               <a:buNone/>
             </a:pPr>
             <a:r>
@@ -10326,7 +10492,7 @@
           <a:bodyPr wrap="square" lIns="0" tIns="0" rIns="0" bIns="0" rtlCol="0" anchor="ctr"/>
           <a:lstStyle/>
           <a:p>
-            <a:pPr marL="0" indent="0" algn="ctr">
+            <a:pPr algn="ctr" indent="0" marL="0">
               <a:buNone/>
             </a:pPr>
             <a:r>
@@ -10365,7 +10531,7 @@
           <a:bodyPr wrap="square" lIns="0" tIns="0" rIns="0" bIns="0" rtlCol="0" anchor="ctr"/>
           <a:lstStyle/>
           <a:p>
-            <a:pPr marL="0" indent="0" algn="ctr">
+            <a:pPr algn="ctr" indent="0" marL="0">
               <a:buNone/>
             </a:pPr>
             <a:r>
@@ -10382,7 +10548,7 @@
             <a:endParaRPr lang="en-US" sz="1000" dirty="0"/>
           </a:p>
           <a:p>
-            <a:pPr marL="0" indent="0" algn="ctr">
+            <a:pPr algn="ctr" indent="0" marL="0">
               <a:buNone/>
             </a:pPr>
             <a:r>
@@ -10421,7 +10587,7 @@
           <a:bodyPr wrap="square" lIns="0" tIns="0" rIns="0" bIns="0" rtlCol="0" anchor="ctr"/>
           <a:lstStyle/>
           <a:p>
-            <a:pPr marL="0" indent="0" algn="ctr">
+            <a:pPr algn="ctr" indent="0" marL="0">
               <a:buNone/>
             </a:pPr>
             <a:r>
@@ -10740,299 +10906,4 @@
     </a:ext>
   </a:extLst>
 </a:theme>
-</file>
-
-<file path=ppt/theme/theme2.xml><?xml version="1.0" encoding="utf-8"?>
-<a:theme xmlns:a="http://schemas.openxmlformats.org/drawingml/2006/main" name="Office Theme">
-  <a:themeElements>
-    <a:clrScheme name="Office">
-      <a:dk1>
-        <a:sysClr val="windowText" lastClr="000000"/>
-      </a:dk1>
-      <a:lt1>
-        <a:sysClr val="window" lastClr="FFFFFF"/>
-      </a:lt1>
-      <a:dk2>
-        <a:srgbClr val="44546A"/>
-      </a:dk2>
-      <a:lt2>
-        <a:srgbClr val="E7E6E6"/>
-      </a:lt2>
-      <a:accent1>
-        <a:srgbClr val="4472C4"/>
-      </a:accent1>
-      <a:accent2>
-        <a:srgbClr val="ED7D31"/>
-      </a:accent2>
-      <a:accent3>
-        <a:srgbClr val="A5A5A5"/>
-      </a:accent3>
-      <a:accent4>
-        <a:srgbClr val="FFC000"/>
-      </a:accent4>
-      <a:accent5>
-        <a:srgbClr val="5B9BD5"/>
-      </a:accent5>
-      <a:accent6>
-        <a:srgbClr val="70AD47"/>
-      </a:accent6>
-      <a:hlink>
-        <a:srgbClr val="0563C1"/>
-      </a:hlink>
-      <a:folHlink>
-        <a:srgbClr val="954F72"/>
-      </a:folHlink>
-    </a:clrScheme>
-    <a:fontScheme name="Office">
-      <a:majorFont>
-        <a:latin typeface="Calibri Light" panose="020F0302020204030204"/>
-        <a:ea typeface=""/>
-        <a:cs typeface=""/>
-        <a:font script="Jpan" typeface="游ゴシック Light"/>
-        <a:font script="Hang" typeface="맑은 고딕"/>
-        <a:font script="Hans" typeface="等线 Light"/>
-        <a:font script="Hant" typeface="新細明體"/>
-        <a:font script="Arab" typeface="Times New Roman"/>
-        <a:font script="Hebr" typeface="Times New Roman"/>
-        <a:font script="Thai" typeface="Angsana New"/>
-        <a:font script="Ethi" typeface="Nyala"/>
-        <a:font script="Beng" typeface="Vrinda"/>
-        <a:font script="Gujr" typeface="Shruti"/>
-        <a:font script="Khmr" typeface="MoolBoran"/>
-        <a:font script="Knda" typeface="Tunga"/>
-        <a:font script="Guru" typeface="Raavi"/>
-        <a:font script="Cans" typeface="Euphemia"/>
-        <a:font script="Cher" typeface="Plantagenet Cherokee"/>
-        <a:font script="Yiii" typeface="Microsoft Yi Baiti"/>
-        <a:font script="Tibt" typeface="Microsoft Himalaya"/>
-        <a:font script="Thaa" typeface="MV Boli"/>
-        <a:font script="Deva" typeface="Mangal"/>
-        <a:font script="Telu" typeface="Gautami"/>
-        <a:font script="Taml" typeface="Latha"/>
-        <a:font script="Syrc" typeface="Estrangelo Edessa"/>
-        <a:font script="Orya" typeface="Kalinga"/>
-        <a:font script="Mlym" typeface="Kartika"/>
-        <a:font script="Laoo" typeface="DokChampa"/>
-        <a:font script="Sinh" typeface="Iskoola Pota"/>
-        <a:font script="Mong" typeface="Mongolian Baiti"/>
-        <a:font script="Viet" typeface="Times New Roman"/>
-        <a:font script="Uigh" typeface="Microsoft Uighur"/>
-        <a:font script="Geor" typeface="Sylfaen"/>
-        <a:font script="Armn" typeface="Arial"/>
-        <a:font script="Bugi" typeface="Leelawadee UI"/>
-        <a:font script="Bopo" typeface="Microsoft JhengHei"/>
-        <a:font script="Java" typeface="Javanese Text"/>
-        <a:font script="Lisu" typeface="Segoe UI"/>
-        <a:font script="Mymr" typeface="Myanmar Text"/>
-        <a:font script="Nkoo" typeface="Ebrima"/>
-        <a:font script="Olck" typeface="Nirmala UI"/>
-        <a:font script="Osma" typeface="Ebrima"/>
-        <a:font script="Phag" typeface="Phagspa"/>
-        <a:font script="Syrn" typeface="Estrangelo Edessa"/>
-        <a:font script="Syrj" typeface="Estrangelo Edessa"/>
-        <a:font script="Syre" typeface="Estrangelo Edessa"/>
-        <a:font script="Sora" typeface="Nirmala UI"/>
-        <a:font script="Tale" typeface="Microsoft Tai Le"/>
-        <a:font script="Talu" typeface="Microsoft New Tai Lue"/>
-        <a:font script="Tfng" typeface="Ebrima"/>
-      </a:majorFont>
-      <a:minorFont>
-        <a:latin typeface="Calibri" panose="020F0502020204030204"/>
-        <a:ea typeface=""/>
-        <a:cs typeface=""/>
-        <a:font script="Jpan" typeface="游ゴシック"/>
-        <a:font script="Hang" typeface="맑은 고딕"/>
-        <a:font script="Hans" typeface="等线"/>
-        <a:font script="Hant" typeface="新細明體"/>
-        <a:font script="Arab" typeface="Arial"/>
-        <a:font script="Hebr" typeface="Arial"/>
-        <a:font script="Thai" typeface="Cordia New"/>
-        <a:font script="Ethi" typeface="Nyala"/>
-        <a:font script="Beng" typeface="Vrinda"/>
-        <a:font script="Gujr" typeface="Shruti"/>
-        <a:font script="Khmr" typeface="DaunPenh"/>
-        <a:font script="Knda" typeface="Tunga"/>
-        <a:font script="Guru" typeface="Raavi"/>
-        <a:font script="Cans" typeface="Euphemia"/>
-        <a:font script="Cher" typeface="Plantagenet Cherokee"/>
-        <a:font script="Yiii" typeface="Microsoft Yi Baiti"/>
-        <a:font script="Tibt" typeface="Microsoft Himalaya"/>
-        <a:font script="Thaa" typeface="MV Boli"/>
-        <a:font script="Deva" typeface="Mangal"/>
-        <a:font script="Telu" typeface="Gautami"/>
-        <a:font script="Taml" typeface="Latha"/>
-        <a:font script="Syrc" typeface="Estrangelo Edessa"/>
-        <a:font script="Orya" typeface="Kalinga"/>
-        <a:font script="Mlym" typeface="Kartika"/>
-        <a:font script="Laoo" typeface="DokChampa"/>
-        <a:font script="Sinh" typeface="Iskoola Pota"/>
-        <a:font script="Mong" typeface="Mongolian Baiti"/>
-        <a:font script="Viet" typeface="Arial"/>
-        <a:font script="Uigh" typeface="Microsoft Uighur"/>
-        <a:font script="Geor" typeface="Sylfaen"/>
-        <a:font script="Armn" typeface="Arial"/>
-        <a:font script="Bugi" typeface="Leelawadee UI"/>
-        <a:font script="Bopo" typeface="Microsoft JhengHei"/>
-        <a:font script="Java" typeface="Javanese Text"/>
-        <a:font script="Lisu" typeface="Segoe UI"/>
-        <a:font script="Mymr" typeface="Myanmar Text"/>
-        <a:font script="Nkoo" typeface="Ebrima"/>
-        <a:font script="Olck" typeface="Nirmala UI"/>
-        <a:font script="Osma" typeface="Ebrima"/>
-        <a:font script="Phag" typeface="Phagspa"/>
-        <a:font script="Syrn" typeface="Estrangelo Edessa"/>
-        <a:font script="Syrj" typeface="Estrangelo Edessa"/>
-        <a:font script="Syre" typeface="Estrangelo Edessa"/>
-        <a:font script="Sora" typeface="Nirmala UI"/>
-        <a:font script="Tale" typeface="Microsoft Tai Le"/>
-        <a:font script="Talu" typeface="Microsoft New Tai Lue"/>
-        <a:font script="Tfng" typeface="Ebrima"/>
-      </a:minorFont>
-    </a:fontScheme>
-    <a:fmtScheme name="Office">
-      <a:fillStyleLst>
-        <a:solidFill>
-          <a:schemeClr val="phClr"/>
-        </a:solidFill>
-        <a:gradFill rotWithShape="1">
-          <a:gsLst>
-            <a:gs pos="0">
-              <a:schemeClr val="phClr">
-                <a:lumMod val="110000"/>
-                <a:satMod val="105000"/>
-                <a:tint val="67000"/>
-              </a:schemeClr>
-            </a:gs>
-            <a:gs pos="50000">
-              <a:schemeClr val="phClr">
-                <a:lumMod val="105000"/>
-                <a:satMod val="103000"/>
-                <a:tint val="73000"/>
-              </a:schemeClr>
-            </a:gs>
-            <a:gs pos="100000">
-              <a:schemeClr val="phClr">
-                <a:lumMod val="105000"/>
-                <a:satMod val="109000"/>
-                <a:tint val="81000"/>
-              </a:schemeClr>
-            </a:gs>
-          </a:gsLst>
-          <a:lin ang="5400000" scaled="0"/>
-        </a:gradFill>
-        <a:gradFill rotWithShape="1">
-          <a:gsLst>
-            <a:gs pos="0">
-              <a:schemeClr val="phClr">
-                <a:satMod val="103000"/>
-                <a:lumMod val="102000"/>
-                <a:tint val="94000"/>
-              </a:schemeClr>
-            </a:gs>
-            <a:gs pos="50000">
-              <a:schemeClr val="phClr">
-                <a:satMod val="110000"/>
-                <a:lumMod val="100000"/>
-                <a:shade val="100000"/>
-              </a:schemeClr>
-            </a:gs>
-            <a:gs pos="100000">
-              <a:schemeClr val="phClr">
-                <a:lumMod val="99000"/>
-                <a:satMod val="120000"/>
-                <a:shade val="78000"/>
-              </a:schemeClr>
-            </a:gs>
-          </a:gsLst>
-          <a:lin ang="5400000" scaled="0"/>
-        </a:gradFill>
-      </a:fillStyleLst>
-      <a:lnStyleLst>
-        <a:ln w="6350" cap="flat" cmpd="sng" algn="ctr">
-          <a:solidFill>
-            <a:schemeClr val="phClr"/>
-          </a:solidFill>
-          <a:prstDash val="solid"/>
-          <a:miter lim="800000"/>
-        </a:ln>
-        <a:ln w="12700" cap="flat" cmpd="sng" algn="ctr">
-          <a:solidFill>
-            <a:schemeClr val="phClr"/>
-          </a:solidFill>
-          <a:prstDash val="solid"/>
-          <a:miter lim="800000"/>
-        </a:ln>
-        <a:ln w="19050" cap="flat" cmpd="sng" algn="ctr">
-          <a:solidFill>
-            <a:schemeClr val="phClr"/>
-          </a:solidFill>
-          <a:prstDash val="solid"/>
-          <a:miter lim="800000"/>
-        </a:ln>
-      </a:lnStyleLst>
-      <a:effectStyleLst>
-        <a:effectStyle>
-          <a:effectLst/>
-        </a:effectStyle>
-        <a:effectStyle>
-          <a:effectLst/>
-        </a:effectStyle>
-        <a:effectStyle>
-          <a:effectLst>
-            <a:outerShdw blurRad="57150" dist="19050" dir="5400000" algn="ctr" rotWithShape="0">
-              <a:srgbClr val="000000">
-                <a:alpha val="63000"/>
-              </a:srgbClr>
-            </a:outerShdw>
-          </a:effectLst>
-        </a:effectStyle>
-      </a:effectStyleLst>
-      <a:bgFillStyleLst>
-        <a:solidFill>
-          <a:schemeClr val="phClr"/>
-        </a:solidFill>
-        <a:solidFill>
-          <a:schemeClr val="phClr">
-            <a:tint val="95000"/>
-            <a:satMod val="170000"/>
-          </a:schemeClr>
-        </a:solidFill>
-        <a:gradFill rotWithShape="1">
-          <a:gsLst>
-            <a:gs pos="0">
-              <a:schemeClr val="phClr">
-                <a:tint val="93000"/>
-                <a:satMod val="150000"/>
-                <a:shade val="98000"/>
-                <a:lumMod val="102000"/>
-              </a:schemeClr>
-            </a:gs>
-            <a:gs pos="50000">
-              <a:schemeClr val="phClr">
-                <a:tint val="98000"/>
-                <a:satMod val="130000"/>
-                <a:shade val="90000"/>
-                <a:lumMod val="103000"/>
-              </a:schemeClr>
-            </a:gs>
-            <a:gs pos="100000">
-              <a:schemeClr val="phClr">
-                <a:shade val="63000"/>
-                <a:satMod val="120000"/>
-              </a:schemeClr>
-            </a:gs>
-          </a:gsLst>
-          <a:lin ang="5400000" scaled="0"/>
-        </a:gradFill>
-      </a:bgFillStyleLst>
-    </a:fmtScheme>
-  </a:themeElements>
-  <a:objectDefaults/>
-  <a:extraClrSchemeLst/>
-  <a:extLst>
-    <a:ext uri="{05A4C25C-085E-4340-85A3-A5531E510DB2}">
-      <thm15:themeFamily xmlns:thm15="http://schemas.microsoft.com/office/thememl/2012/main" name="Office Theme" id="{62F939B6-93AF-4DB8-9C6B-D6C7DFDC589F}" vid="{4A3C46E8-61CC-4603-A589-7422A47A8E4A}"/>
-    </a:ext>
-  </a:extLst>
-</a:theme>
 </file>